--- a/Module 6 - Advanced UI Essentials/Chapter 1/PPT/PPT1.pptx
+++ b/Module 6 - Advanced UI Essentials/Chapter 1/PPT/PPT1.pptx
@@ -5,31 +5,31 @@
     <p:sldMasterId id="2147483648" r:id="rId1"/>
   </p:sldMasterIdLst>
   <p:notesMasterIdLst>
-    <p:notesMasterId r:id="rId4"/>
+    <p:notesMasterId r:id="rId24"/>
   </p:notesMasterIdLst>
   <p:sldIdLst>
-    <p:sldId id="256" r:id="rId3"/>
-    <p:sldId id="257" r:id="rId5"/>
-    <p:sldId id="258" r:id="rId6"/>
-    <p:sldId id="259" r:id="rId7"/>
-    <p:sldId id="260" r:id="rId8"/>
-    <p:sldId id="261" r:id="rId9"/>
-    <p:sldId id="262" r:id="rId10"/>
-    <p:sldId id="263" r:id="rId11"/>
-    <p:sldId id="264" r:id="rId12"/>
-    <p:sldId id="265" r:id="rId13"/>
-    <p:sldId id="266" r:id="rId14"/>
-    <p:sldId id="267" r:id="rId15"/>
-    <p:sldId id="268" r:id="rId16"/>
-    <p:sldId id="269" r:id="rId17"/>
-    <p:sldId id="270" r:id="rId18"/>
-    <p:sldId id="271" r:id="rId19"/>
-    <p:sldId id="272" r:id="rId20"/>
-    <p:sldId id="273" r:id="rId21"/>
-    <p:sldId id="274" r:id="rId22"/>
-    <p:sldId id="275" r:id="rId23"/>
-    <p:sldId id="276" r:id="rId24"/>
-    <p:sldId id="277" r:id="rId25"/>
+    <p:sldId id="256" r:id="rId2"/>
+    <p:sldId id="257" r:id="rId3"/>
+    <p:sldId id="258" r:id="rId4"/>
+    <p:sldId id="259" r:id="rId5"/>
+    <p:sldId id="260" r:id="rId6"/>
+    <p:sldId id="261" r:id="rId7"/>
+    <p:sldId id="262" r:id="rId8"/>
+    <p:sldId id="263" r:id="rId9"/>
+    <p:sldId id="264" r:id="rId10"/>
+    <p:sldId id="265" r:id="rId11"/>
+    <p:sldId id="266" r:id="rId12"/>
+    <p:sldId id="267" r:id="rId13"/>
+    <p:sldId id="268" r:id="rId14"/>
+    <p:sldId id="269" r:id="rId15"/>
+    <p:sldId id="270" r:id="rId16"/>
+    <p:sldId id="271" r:id="rId17"/>
+    <p:sldId id="272" r:id="rId18"/>
+    <p:sldId id="273" r:id="rId19"/>
+    <p:sldId id="274" r:id="rId20"/>
+    <p:sldId id="275" r:id="rId21"/>
+    <p:sldId id="276" r:id="rId22"/>
+    <p:sldId id="277" r:id="rId23"/>
   </p:sldIdLst>
   <p:sldSz cx="12192000" cy="6858000"/>
   <p:notesSz cx="6858000" cy="9144000"/>
@@ -278,7 +278,7 @@
     </p:bg>
     <p:spTree>
       <p:nvGrpSpPr>
-        <p:cNvPr id="2" name="Shape 2"/>
+        <p:cNvPr id="1" name="Shape 2"/>
         <p:cNvGrpSpPr/>
         <p:nvPr/>
       </p:nvGrpSpPr>
@@ -293,7 +293,9 @@
       <p:sp>
         <p:nvSpPr>
           <p:cNvPr id="3" name="Google Shape;3;n"/>
-          <p:cNvSpPr txBox="1"/>
+          <p:cNvSpPr txBox="1">
+            <a:spLocks noGrp="1"/>
+          </p:cNvSpPr>
           <p:nvPr>
             <p:ph type="hdr" idx="2"/>
           </p:nvPr>
@@ -488,13 +490,17 @@
               </a:defRPr>
             </a:lvl9pPr>
           </a:lstStyle>
-          <a:p/>
+          <a:p>
+            <a:endParaRPr/>
+          </a:p>
         </p:txBody>
       </p:sp>
       <p:sp>
         <p:nvSpPr>
           <p:cNvPr id="4" name="Google Shape;4;n"/>
-          <p:cNvSpPr txBox="1"/>
+          <p:cNvSpPr txBox="1">
+            <a:spLocks noGrp="1"/>
+          </p:cNvSpPr>
           <p:nvPr>
             <p:ph type="dt" idx="10"/>
           </p:nvPr>
@@ -689,13 +695,17 @@
               </a:defRPr>
             </a:lvl9pPr>
           </a:lstStyle>
-          <a:p/>
+          <a:p>
+            <a:endParaRPr/>
+          </a:p>
         </p:txBody>
       </p:sp>
       <p:sp>
         <p:nvSpPr>
           <p:cNvPr id="5" name="Google Shape;5;n"/>
-          <p:cNvSpPr/>
+          <p:cNvSpPr>
+            <a:spLocks noGrp="1" noRot="1" noChangeAspect="1"/>
+          </p:cNvSpPr>
           <p:nvPr>
             <p:ph type="sldImg" idx="3"/>
           </p:nvPr>
@@ -744,7 +754,9 @@
       <p:sp>
         <p:nvSpPr>
           <p:cNvPr id="6" name="Google Shape;6;n"/>
-          <p:cNvSpPr txBox="1"/>
+          <p:cNvSpPr txBox="1">
+            <a:spLocks noGrp="1"/>
+          </p:cNvSpPr>
           <p:nvPr>
             <p:ph type="body" idx="1"/>
           </p:nvPr>
@@ -939,13 +951,17 @@
               </a:defRPr>
             </a:lvl9pPr>
           </a:lstStyle>
-          <a:p/>
+          <a:p>
+            <a:endParaRPr/>
+          </a:p>
         </p:txBody>
       </p:sp>
       <p:sp>
         <p:nvSpPr>
           <p:cNvPr id="7" name="Google Shape;7;n"/>
-          <p:cNvSpPr txBox="1"/>
+          <p:cNvSpPr txBox="1">
+            <a:spLocks noGrp="1"/>
+          </p:cNvSpPr>
           <p:nvPr>
             <p:ph type="ftr" idx="11"/>
           </p:nvPr>
@@ -1140,13 +1156,17 @@
               </a:defRPr>
             </a:lvl9pPr>
           </a:lstStyle>
-          <a:p/>
+          <a:p>
+            <a:endParaRPr/>
+          </a:p>
         </p:txBody>
       </p:sp>
       <p:sp>
         <p:nvSpPr>
           <p:cNvPr id="8" name="Google Shape;8;n"/>
-          <p:cNvSpPr txBox="1"/>
+          <p:cNvSpPr txBox="1">
+            <a:spLocks noGrp="1"/>
+          </p:cNvSpPr>
           <p:nvPr>
             <p:ph type="sldNum" idx="12"/>
           </p:nvPr>
@@ -1189,6 +1209,16 @@
                 <a:cs typeface="Calibri" panose="020F0502020204030204"/>
                 <a:sym typeface="Calibri" panose="020F0502020204030204"/>
               </a:rPr>
+              <a:pPr marL="0" marR="0" lvl="0" indent="0" algn="r" rtl="0">
+                <a:spcBef>
+                  <a:spcPts val="0"/>
+                </a:spcBef>
+                <a:spcAft>
+                  <a:spcPts val="0"/>
+                </a:spcAft>
+                <a:buNone/>
+              </a:pPr>
+              <a:t>‹#›</a:t>
             </a:fld>
             <a:endParaRPr sz="1200" b="0" i="0" u="none" strike="noStrike" cap="none">
               <a:solidFill>
@@ -1438,11 +1468,11 @@
 </file>
 
 <file path=ppt/notesSlides/notesSlide1.xml><?xml version="1.0" encoding="utf-8"?>
-<p:notes xmlns:a="http://schemas.openxmlformats.org/drawingml/2006/main" xmlns:r="http://schemas.openxmlformats.org/officeDocument/2006/relationships" xmlns:p="http://schemas.openxmlformats.org/presentationml/2006/main" showMasterPhAnim="0" showMasterSp="0">
+<p:notes xmlns:a="http://schemas.openxmlformats.org/drawingml/2006/main" xmlns:r="http://schemas.openxmlformats.org/officeDocument/2006/relationships" xmlns:p="http://schemas.openxmlformats.org/presentationml/2006/main" showMasterSp="0" showMasterPhAnim="0">
   <p:cSld>
     <p:spTree>
       <p:nvGrpSpPr>
-        <p:cNvPr id="143" name="Shape 143"/>
+        <p:cNvPr id="1" name="Shape 143"/>
         <p:cNvGrpSpPr/>
         <p:nvPr/>
       </p:nvGrpSpPr>
@@ -1457,7 +1487,9 @@
       <p:sp>
         <p:nvSpPr>
           <p:cNvPr id="144" name="Google Shape;144;p1:notes"/>
-          <p:cNvSpPr txBox="1"/>
+          <p:cNvSpPr txBox="1">
+            <a:spLocks noGrp="1"/>
+          </p:cNvSpPr>
           <p:nvPr>
             <p:ph type="body" idx="1"/>
           </p:nvPr>
@@ -1507,7 +1539,6 @@
               <a:rPr lang="en-US"/>
               <a:t>,In this presentation we will delve into the world of Advanced UI Development Techniques : Mastering the Art of Engaging and Scalable Interfaces.We'll cover </a:t>
             </a:r>
-            <a:endParaRPr lang="en-US"/>
           </a:p>
           <a:p>
             <a:pPr marL="457200" lvl="0" indent="-228600" algn="l" rtl="0">
@@ -1528,7 +1559,6 @@
               <a:rPr lang="en-US"/>
               <a:t>Advanced widget usage, Custom widget, Complex widgets, Responsive Design, Advanced animations and Motion Design, short description of State management and Integrating UI with Backend services.</a:t>
             </a:r>
-            <a:endParaRPr lang="en-US"/>
           </a:p>
           <a:p>
             <a:pPr marL="0" lvl="0" indent="0" algn="l" rtl="0">
@@ -1540,13 +1570,16 @@
               </a:spcAft>
               <a:buNone/>
             </a:pPr>
+            <a:endParaRPr/>
           </a:p>
         </p:txBody>
       </p:sp>
       <p:sp>
         <p:nvSpPr>
           <p:cNvPr id="145" name="Google Shape;145;p1:notes"/>
-          <p:cNvSpPr/>
+          <p:cNvSpPr>
+            <a:spLocks noGrp="1" noRot="1" noChangeAspect="1"/>
+          </p:cNvSpPr>
           <p:nvPr>
             <p:ph type="sldImg" idx="2"/>
           </p:nvPr>
@@ -1591,11 +1624,11 @@
 </file>
 
 <file path=ppt/notesSlides/notesSlide10.xml><?xml version="1.0" encoding="utf-8"?>
-<p:notes xmlns:a="http://schemas.openxmlformats.org/drawingml/2006/main" xmlns:r="http://schemas.openxmlformats.org/officeDocument/2006/relationships" xmlns:p="http://schemas.openxmlformats.org/presentationml/2006/main" showMasterPhAnim="0" showMasterSp="0">
+<p:notes xmlns:a="http://schemas.openxmlformats.org/drawingml/2006/main" xmlns:r="http://schemas.openxmlformats.org/officeDocument/2006/relationships" xmlns:p="http://schemas.openxmlformats.org/presentationml/2006/main" showMasterSp="0" showMasterPhAnim="0">
   <p:cSld>
     <p:spTree>
       <p:nvGrpSpPr>
-        <p:cNvPr id="225" name="Shape 225"/>
+        <p:cNvPr id="1" name="Shape 225"/>
         <p:cNvGrpSpPr/>
         <p:nvPr/>
       </p:nvGrpSpPr>
@@ -1610,7 +1643,9 @@
       <p:sp>
         <p:nvSpPr>
           <p:cNvPr id="226" name="Google Shape;226;p10:notes"/>
-          <p:cNvSpPr/>
+          <p:cNvSpPr>
+            <a:spLocks noGrp="1" noRot="1" noChangeAspect="1"/>
+          </p:cNvSpPr>
           <p:nvPr>
             <p:ph type="sldImg" idx="2"/>
           </p:nvPr>
@@ -1659,7 +1694,9 @@
       <p:sp>
         <p:nvSpPr>
           <p:cNvPr id="227" name="Google Shape;227;p10:notes"/>
-          <p:cNvSpPr txBox="1"/>
+          <p:cNvSpPr txBox="1">
+            <a:spLocks noGrp="1"/>
+          </p:cNvSpPr>
           <p:nvPr>
             <p:ph type="body" idx="1"/>
           </p:nvPr>
@@ -1709,15 +1746,6 @@
               </a:rPr>
               <a:t>The navigation drawer in Flutter allows users to navigate to different pages of your app. </a:t>
             </a:r>
-            <a:endParaRPr lang="en-US" sz="1200">
-              <a:solidFill>
-                <a:srgbClr val="313337"/>
-              </a:solidFill>
-              <a:latin typeface="Calibri" panose="020F0502020204030204"/>
-              <a:ea typeface="Calibri" panose="020F0502020204030204"/>
-              <a:cs typeface="Calibri" panose="020F0502020204030204"/>
-              <a:sym typeface="Calibri" panose="020F0502020204030204"/>
-            </a:endParaRPr>
           </a:p>
           <a:p>
             <a:pPr marL="0" lvl="0" indent="0" algn="l" rtl="0">
@@ -1796,12 +1824,6 @@
               </a:rPr>
               <a:t>​</a:t>
             </a:r>
-            <a:endParaRPr lang="en-US" sz="1200">
-              <a:latin typeface="Calibri" panose="020F0502020204030204"/>
-              <a:ea typeface="Calibri" panose="020F0502020204030204"/>
-              <a:cs typeface="Calibri" panose="020F0502020204030204"/>
-              <a:sym typeface="Calibri" panose="020F0502020204030204"/>
-            </a:endParaRPr>
           </a:p>
           <a:p>
             <a:pPr marL="228600" lvl="0" indent="-152400" algn="l" rtl="0">
@@ -1864,12 +1886,6 @@
               </a:rPr>
               <a:t>​</a:t>
             </a:r>
-            <a:endParaRPr lang="en-US" sz="1200">
-              <a:latin typeface="Calibri" panose="020F0502020204030204"/>
-              <a:ea typeface="Calibri" panose="020F0502020204030204"/>
-              <a:cs typeface="Calibri" panose="020F0502020204030204"/>
-              <a:sym typeface="Calibri" panose="020F0502020204030204"/>
-            </a:endParaRPr>
           </a:p>
           <a:p>
             <a:pPr marL="228600" lvl="0" indent="-152400" algn="l" rtl="0">
@@ -1932,12 +1948,6 @@
               </a:rPr>
               <a:t>​</a:t>
             </a:r>
-            <a:endParaRPr lang="en-US" sz="1200">
-              <a:latin typeface="Calibri" panose="020F0502020204030204"/>
-              <a:ea typeface="Calibri" panose="020F0502020204030204"/>
-              <a:cs typeface="Calibri" panose="020F0502020204030204"/>
-              <a:sym typeface="Calibri" panose="020F0502020204030204"/>
-            </a:endParaRPr>
           </a:p>
           <a:p>
             <a:pPr marL="228600" lvl="0" indent="-152400" algn="l" rtl="0">
@@ -2000,12 +2010,6 @@
               </a:rPr>
               <a:t>​</a:t>
             </a:r>
-            <a:endParaRPr lang="en-US" sz="1200">
-              <a:latin typeface="Calibri" panose="020F0502020204030204"/>
-              <a:ea typeface="Calibri" panose="020F0502020204030204"/>
-              <a:cs typeface="Calibri" panose="020F0502020204030204"/>
-              <a:sym typeface="Calibri" panose="020F0502020204030204"/>
-            </a:endParaRPr>
           </a:p>
           <a:p>
             <a:pPr marL="0" lvl="0" indent="0" algn="l" rtl="0">
@@ -2017,13 +2021,16 @@
               </a:spcAft>
               <a:buNone/>
             </a:pPr>
+            <a:endParaRPr/>
           </a:p>
         </p:txBody>
       </p:sp>
       <p:sp>
         <p:nvSpPr>
           <p:cNvPr id="228" name="Google Shape;228;p10:notes"/>
-          <p:cNvSpPr txBox="1"/>
+          <p:cNvSpPr txBox="1">
+            <a:spLocks noGrp="1"/>
+          </p:cNvSpPr>
           <p:nvPr>
             <p:ph type="sldNum" idx="12"/>
           </p:nvPr>
@@ -2058,6 +2065,16 @@
             </a:pPr>
             <a:fld id="{00000000-1234-1234-1234-123412341234}" type="slidenum">
               <a:rPr lang="en-US"/>
+              <a:pPr marL="0" lvl="0" indent="0" algn="r" rtl="0">
+                <a:spcBef>
+                  <a:spcPts val="0"/>
+                </a:spcBef>
+                <a:spcAft>
+                  <a:spcPts val="0"/>
+                </a:spcAft>
+                <a:buNone/>
+              </a:pPr>
+              <a:t>10</a:t>
             </a:fld>
             <a:endParaRPr lang="en-US"/>
           </a:p>
@@ -2072,11 +2089,11 @@
 </file>
 
 <file path=ppt/notesSlides/notesSlide11.xml><?xml version="1.0" encoding="utf-8"?>
-<p:notes xmlns:a="http://schemas.openxmlformats.org/drawingml/2006/main" xmlns:r="http://schemas.openxmlformats.org/officeDocument/2006/relationships" xmlns:p="http://schemas.openxmlformats.org/presentationml/2006/main" showMasterPhAnim="0" showMasterSp="0">
+<p:notes xmlns:a="http://schemas.openxmlformats.org/drawingml/2006/main" xmlns:r="http://schemas.openxmlformats.org/officeDocument/2006/relationships" xmlns:p="http://schemas.openxmlformats.org/presentationml/2006/main" showMasterSp="0" showMasterPhAnim="0">
   <p:cSld>
     <p:spTree>
       <p:nvGrpSpPr>
-        <p:cNvPr id="233" name="Shape 233"/>
+        <p:cNvPr id="1" name="Shape 233"/>
         <p:cNvGrpSpPr/>
         <p:nvPr/>
       </p:nvGrpSpPr>
@@ -2091,7 +2108,9 @@
       <p:sp>
         <p:nvSpPr>
           <p:cNvPr id="234" name="Google Shape;234;p11:notes"/>
-          <p:cNvSpPr txBox="1"/>
+          <p:cNvSpPr txBox="1">
+            <a:spLocks noGrp="1"/>
+          </p:cNvSpPr>
           <p:nvPr>
             <p:ph type="body" idx="1"/>
           </p:nvPr>
@@ -2120,13 +2139,16 @@
               </a:spcAft>
               <a:buNone/>
             </a:pPr>
+            <a:endParaRPr/>
           </a:p>
         </p:txBody>
       </p:sp>
       <p:sp>
         <p:nvSpPr>
           <p:cNvPr id="235" name="Google Shape;235;p11:notes"/>
-          <p:cNvSpPr/>
+          <p:cNvSpPr>
+            <a:spLocks noGrp="1" noRot="1" noChangeAspect="1"/>
+          </p:cNvSpPr>
           <p:nvPr>
             <p:ph type="sldImg" idx="2"/>
           </p:nvPr>
@@ -2171,11 +2193,11 @@
 </file>
 
 <file path=ppt/notesSlides/notesSlide12.xml><?xml version="1.0" encoding="utf-8"?>
-<p:notes xmlns:a="http://schemas.openxmlformats.org/drawingml/2006/main" xmlns:r="http://schemas.openxmlformats.org/officeDocument/2006/relationships" xmlns:p="http://schemas.openxmlformats.org/presentationml/2006/main" showMasterPhAnim="0" showMasterSp="0">
+<p:notes xmlns:a="http://schemas.openxmlformats.org/drawingml/2006/main" xmlns:r="http://schemas.openxmlformats.org/officeDocument/2006/relationships" xmlns:p="http://schemas.openxmlformats.org/presentationml/2006/main" showMasterSp="0" showMasterPhAnim="0">
   <p:cSld>
     <p:spTree>
       <p:nvGrpSpPr>
-        <p:cNvPr id="244" name="Shape 244"/>
+        <p:cNvPr id="1" name="Shape 244"/>
         <p:cNvGrpSpPr/>
         <p:nvPr/>
       </p:nvGrpSpPr>
@@ -2190,7 +2212,9 @@
       <p:sp>
         <p:nvSpPr>
           <p:cNvPr id="245" name="Google Shape;245;p12:notes"/>
-          <p:cNvSpPr/>
+          <p:cNvSpPr>
+            <a:spLocks noGrp="1" noRot="1" noChangeAspect="1"/>
+          </p:cNvSpPr>
           <p:nvPr>
             <p:ph type="sldImg" idx="2"/>
           </p:nvPr>
@@ -2239,7 +2263,9 @@
       <p:sp>
         <p:nvSpPr>
           <p:cNvPr id="246" name="Google Shape;246;p12:notes"/>
-          <p:cNvSpPr txBox="1"/>
+          <p:cNvSpPr txBox="1">
+            <a:spLocks noGrp="1"/>
+          </p:cNvSpPr>
           <p:nvPr>
             <p:ph type="body" idx="1"/>
           </p:nvPr>
@@ -2298,12 +2324,6 @@
               </a:rPr>
               <a:t>​</a:t>
             </a:r>
-            <a:endParaRPr lang="en-US" sz="1200">
-              <a:latin typeface="Calibri" panose="020F0502020204030204"/>
-              <a:ea typeface="Calibri" panose="020F0502020204030204"/>
-              <a:cs typeface="Calibri" panose="020F0502020204030204"/>
-              <a:sym typeface="Calibri" panose="020F0502020204030204"/>
-            </a:endParaRPr>
           </a:p>
           <a:p>
             <a:pPr marL="228600" lvl="0" indent="-152400" algn="l" rtl="0">
@@ -2366,12 +2386,6 @@
               </a:rPr>
               <a:t>​</a:t>
             </a:r>
-            <a:endParaRPr lang="en-US" sz="1200">
-              <a:latin typeface="Calibri" panose="020F0502020204030204"/>
-              <a:ea typeface="Calibri" panose="020F0502020204030204"/>
-              <a:cs typeface="Calibri" panose="020F0502020204030204"/>
-              <a:sym typeface="Calibri" panose="020F0502020204030204"/>
-            </a:endParaRPr>
           </a:p>
           <a:p>
             <a:pPr marL="228600" lvl="0" indent="-152400" algn="l" rtl="0">
@@ -2434,12 +2448,6 @@
               </a:rPr>
               <a:t>​</a:t>
             </a:r>
-            <a:endParaRPr lang="en-US" sz="1200">
-              <a:latin typeface="Calibri" panose="020F0502020204030204"/>
-              <a:ea typeface="Calibri" panose="020F0502020204030204"/>
-              <a:cs typeface="Calibri" panose="020F0502020204030204"/>
-              <a:sym typeface="Calibri" panose="020F0502020204030204"/>
-            </a:endParaRPr>
           </a:p>
           <a:p>
             <a:pPr marL="0" lvl="0" indent="0" algn="l" rtl="0">
@@ -2451,13 +2459,16 @@
               </a:spcAft>
               <a:buNone/>
             </a:pPr>
+            <a:endParaRPr/>
           </a:p>
         </p:txBody>
       </p:sp>
       <p:sp>
         <p:nvSpPr>
           <p:cNvPr id="247" name="Google Shape;247;p12:notes"/>
-          <p:cNvSpPr txBox="1"/>
+          <p:cNvSpPr txBox="1">
+            <a:spLocks noGrp="1"/>
+          </p:cNvSpPr>
           <p:nvPr>
             <p:ph type="sldNum" idx="12"/>
           </p:nvPr>
@@ -2492,6 +2503,16 @@
             </a:pPr>
             <a:fld id="{00000000-1234-1234-1234-123412341234}" type="slidenum">
               <a:rPr lang="en-US"/>
+              <a:pPr marL="0" lvl="0" indent="0" algn="r" rtl="0">
+                <a:spcBef>
+                  <a:spcPts val="0"/>
+                </a:spcBef>
+                <a:spcAft>
+                  <a:spcPts val="0"/>
+                </a:spcAft>
+                <a:buNone/>
+              </a:pPr>
+              <a:t>12</a:t>
             </a:fld>
             <a:endParaRPr lang="en-US"/>
           </a:p>
@@ -2506,11 +2527,11 @@
 </file>
 
 <file path=ppt/notesSlides/notesSlide13.xml><?xml version="1.0" encoding="utf-8"?>
-<p:notes xmlns:a="http://schemas.openxmlformats.org/drawingml/2006/main" xmlns:r="http://schemas.openxmlformats.org/officeDocument/2006/relationships" xmlns:p="http://schemas.openxmlformats.org/presentationml/2006/main" showMasterPhAnim="0" showMasterSp="0">
+<p:notes xmlns:a="http://schemas.openxmlformats.org/drawingml/2006/main" xmlns:r="http://schemas.openxmlformats.org/officeDocument/2006/relationships" xmlns:p="http://schemas.openxmlformats.org/presentationml/2006/main" showMasterSp="0" showMasterPhAnim="0">
   <p:cSld>
     <p:spTree>
       <p:nvGrpSpPr>
-        <p:cNvPr id="252" name="Shape 252"/>
+        <p:cNvPr id="1" name="Shape 252"/>
         <p:cNvGrpSpPr/>
         <p:nvPr/>
       </p:nvGrpSpPr>
@@ -2525,7 +2546,9 @@
       <p:sp>
         <p:nvSpPr>
           <p:cNvPr id="253" name="Google Shape;253;p13:notes"/>
-          <p:cNvSpPr txBox="1"/>
+          <p:cNvSpPr txBox="1">
+            <a:spLocks noGrp="1"/>
+          </p:cNvSpPr>
           <p:nvPr>
             <p:ph type="body" idx="1"/>
           </p:nvPr>
@@ -2554,13 +2577,16 @@
               </a:spcAft>
               <a:buNone/>
             </a:pPr>
+            <a:endParaRPr/>
           </a:p>
         </p:txBody>
       </p:sp>
       <p:sp>
         <p:nvSpPr>
           <p:cNvPr id="254" name="Google Shape;254;p13:notes"/>
-          <p:cNvSpPr/>
+          <p:cNvSpPr>
+            <a:spLocks noGrp="1" noRot="1" noChangeAspect="1"/>
+          </p:cNvSpPr>
           <p:nvPr>
             <p:ph type="sldImg" idx="2"/>
           </p:nvPr>
@@ -2605,11 +2631,11 @@
 </file>
 
 <file path=ppt/notesSlides/notesSlide14.xml><?xml version="1.0" encoding="utf-8"?>
-<p:notes xmlns:a="http://schemas.openxmlformats.org/drawingml/2006/main" xmlns:r="http://schemas.openxmlformats.org/officeDocument/2006/relationships" xmlns:p="http://schemas.openxmlformats.org/presentationml/2006/main" showMasterPhAnim="0" showMasterSp="0">
+<p:notes xmlns:a="http://schemas.openxmlformats.org/drawingml/2006/main" xmlns:r="http://schemas.openxmlformats.org/officeDocument/2006/relationships" xmlns:p="http://schemas.openxmlformats.org/presentationml/2006/main" showMasterSp="0" showMasterPhAnim="0">
   <p:cSld>
     <p:spTree>
       <p:nvGrpSpPr>
-        <p:cNvPr id="263" name="Shape 263"/>
+        <p:cNvPr id="1" name="Shape 263"/>
         <p:cNvGrpSpPr/>
         <p:nvPr/>
       </p:nvGrpSpPr>
@@ -2624,7 +2650,9 @@
       <p:sp>
         <p:nvSpPr>
           <p:cNvPr id="264" name="Google Shape;264;p14:notes"/>
-          <p:cNvSpPr/>
+          <p:cNvSpPr>
+            <a:spLocks noGrp="1" noRot="1" noChangeAspect="1"/>
+          </p:cNvSpPr>
           <p:nvPr>
             <p:ph type="sldImg" idx="2"/>
           </p:nvPr>
@@ -2673,7 +2701,9 @@
       <p:sp>
         <p:nvSpPr>
           <p:cNvPr id="265" name="Google Shape;265;p14:notes"/>
-          <p:cNvSpPr txBox="1"/>
+          <p:cNvSpPr txBox="1">
+            <a:spLocks noGrp="1"/>
+          </p:cNvSpPr>
           <p:nvPr>
             <p:ph type="body" idx="1"/>
           </p:nvPr>
@@ -2730,15 +2760,6 @@
               </a:rPr>
               <a:t>Cutom Widgets</a:t>
             </a:r>
-            <a:endParaRPr lang="en-US" sz="1200" b="1">
-              <a:solidFill>
-                <a:schemeClr val="dk1"/>
-              </a:solidFill>
-              <a:latin typeface="Calibri" panose="020F0502020204030204"/>
-              <a:ea typeface="Calibri" panose="020F0502020204030204"/>
-              <a:cs typeface="Calibri" panose="020F0502020204030204"/>
-              <a:sym typeface="Calibri" panose="020F0502020204030204"/>
-            </a:endParaRPr>
           </a:p>
           <a:p>
             <a:pPr marL="228600" lvl="0" indent="-228600" algn="l" rtl="0">
@@ -2776,12 +2797,6 @@
               </a:rPr>
               <a:t>​</a:t>
             </a:r>
-            <a:endParaRPr lang="en-US" sz="1200">
-              <a:latin typeface="Calibri" panose="020F0502020204030204"/>
-              <a:ea typeface="Calibri" panose="020F0502020204030204"/>
-              <a:cs typeface="Calibri" panose="020F0502020204030204"/>
-              <a:sym typeface="Calibri" panose="020F0502020204030204"/>
-            </a:endParaRPr>
           </a:p>
           <a:p>
             <a:pPr marL="228600" lvl="0" indent="-152400" algn="l" rtl="0">
@@ -2844,12 +2859,6 @@
               </a:rPr>
               <a:t>​</a:t>
             </a:r>
-            <a:endParaRPr lang="en-US" sz="1200">
-              <a:latin typeface="Calibri" panose="020F0502020204030204"/>
-              <a:ea typeface="Calibri" panose="020F0502020204030204"/>
-              <a:cs typeface="Calibri" panose="020F0502020204030204"/>
-              <a:sym typeface="Calibri" panose="020F0502020204030204"/>
-            </a:endParaRPr>
           </a:p>
           <a:p>
             <a:pPr marL="228600" lvl="0" indent="-152400" algn="l" rtl="0">
@@ -2899,7 +2908,6 @@
               <a:rPr lang="en-US" b="1"/>
               <a:t>Benefits of using custom widgets:</a:t>
             </a:r>
-            <a:endParaRPr lang="en-US" b="1"/>
           </a:p>
           <a:p>
             <a:pPr marL="285750" lvl="0" indent="-285750" algn="l" rtl="0">
@@ -2924,7 +2932,6 @@
               <a:rPr lang="en-US"/>
               <a:t> Reduce code duplication by creating a single widget that can be used multiple times.</a:t>
             </a:r>
-            <a:endParaRPr lang="en-US"/>
           </a:p>
           <a:p>
             <a:pPr marL="285750" lvl="0" indent="-285750" algn="l" rtl="0">
@@ -2949,7 +2956,6 @@
               <a:rPr lang="en-US"/>
               <a:t> Easier to update and maintain your UI if changes are needed in a single location (the custom widget).</a:t>
             </a:r>
-            <a:endParaRPr lang="en-US"/>
           </a:p>
           <a:p>
             <a:pPr marL="285750" lvl="0" indent="-285750" algn="l" rtl="0">
@@ -2974,7 +2980,6 @@
               <a:rPr lang="en-US"/>
               <a:t> Enforce a consistent design language throughout your app by controlling the look and feel of each element through custom widgets.</a:t>
             </a:r>
-            <a:endParaRPr lang="en-US"/>
           </a:p>
           <a:p>
             <a:pPr marL="285750" lvl="0" indent="-285750" algn="l" rtl="0">
@@ -2999,7 +3004,6 @@
               <a:rPr lang="en-US"/>
               <a:t> Break down your UI into smaller, independent components, making it easier to understand and manage.</a:t>
             </a:r>
-            <a:endParaRPr lang="en-US"/>
           </a:p>
           <a:p>
             <a:pPr marL="285750" lvl="0" indent="-285750" algn="l" rtl="0">
@@ -3024,7 +3028,6 @@
               <a:rPr lang="en-US"/>
               <a:t> Customize the behavior and appearance of your UI elements to meet your specific needs.</a:t>
             </a:r>
-            <a:endParaRPr lang="en-US"/>
           </a:p>
           <a:p>
             <a:pPr marL="0" lvl="0" indent="0" algn="l" rtl="0">
@@ -3040,7 +3043,6 @@
               <a:rPr lang="en-US" b="1"/>
               <a:t>What defines a custom widget:</a:t>
             </a:r>
-            <a:endParaRPr lang="en-US" b="1"/>
           </a:p>
           <a:p>
             <a:pPr marL="285750" lvl="0" indent="-285750" algn="l" rtl="0">
@@ -3065,7 +3067,6 @@
               <a:rPr lang="en-US"/>
               <a:t> Custom widgets are typically defined in separate Dart files, allowing for better organization and maintainability.</a:t>
             </a:r>
-            <a:endParaRPr lang="en-US"/>
           </a:p>
           <a:p>
             <a:pPr marL="285750" lvl="0" indent="-285750" algn="l" rtl="0">
@@ -3090,7 +3091,6 @@
               <a:rPr lang="en-US"/>
               <a:t> This defines the parameters (inputs) your widget requires to function.</a:t>
             </a:r>
-            <a:endParaRPr lang="en-US"/>
           </a:p>
           <a:p>
             <a:pPr marL="285750" lvl="0" indent="-285750" algn="l" rtl="0">
@@ -3115,7 +3115,6 @@
               <a:rPr lang="en-US"/>
               <a:t> This method describes how the widget's UI is constructed based on its parameters and state.</a:t>
             </a:r>
-            <a:endParaRPr lang="en-US"/>
           </a:p>
           <a:p>
             <a:pPr marL="285750" lvl="0" indent="-285750" algn="l" rtl="0">
@@ -3140,7 +3139,6 @@
               <a:rPr lang="en-US"/>
               <a:t> Some custom widgets may need to manage their own internal state, making them more complex.</a:t>
             </a:r>
-            <a:endParaRPr lang="en-US"/>
           </a:p>
           <a:p>
             <a:pPr marL="0" lvl="0" indent="0" algn="l" rtl="0">
@@ -3152,13 +3150,16 @@
               </a:spcAft>
               <a:buNone/>
             </a:pPr>
+            <a:endParaRPr/>
           </a:p>
         </p:txBody>
       </p:sp>
       <p:sp>
         <p:nvSpPr>
           <p:cNvPr id="266" name="Google Shape;266;p14:notes"/>
-          <p:cNvSpPr txBox="1"/>
+          <p:cNvSpPr txBox="1">
+            <a:spLocks noGrp="1"/>
+          </p:cNvSpPr>
           <p:nvPr>
             <p:ph type="sldNum" idx="12"/>
           </p:nvPr>
@@ -3193,6 +3194,16 @@
             </a:pPr>
             <a:fld id="{00000000-1234-1234-1234-123412341234}" type="slidenum">
               <a:rPr lang="en-US"/>
+              <a:pPr marL="0" lvl="0" indent="0" algn="r" rtl="0">
+                <a:spcBef>
+                  <a:spcPts val="0"/>
+                </a:spcBef>
+                <a:spcAft>
+                  <a:spcPts val="0"/>
+                </a:spcAft>
+                <a:buNone/>
+              </a:pPr>
+              <a:t>14</a:t>
             </a:fld>
             <a:endParaRPr lang="en-US"/>
           </a:p>
@@ -3207,11 +3218,11 @@
 </file>
 
 <file path=ppt/notesSlides/notesSlide15.xml><?xml version="1.0" encoding="utf-8"?>
-<p:notes xmlns:a="http://schemas.openxmlformats.org/drawingml/2006/main" xmlns:r="http://schemas.openxmlformats.org/officeDocument/2006/relationships" xmlns:p="http://schemas.openxmlformats.org/presentationml/2006/main" showMasterPhAnim="0" showMasterSp="0">
+<p:notes xmlns:a="http://schemas.openxmlformats.org/drawingml/2006/main" xmlns:r="http://schemas.openxmlformats.org/officeDocument/2006/relationships" xmlns:p="http://schemas.openxmlformats.org/presentationml/2006/main" showMasterSp="0" showMasterPhAnim="0">
   <p:cSld>
     <p:spTree>
       <p:nvGrpSpPr>
-        <p:cNvPr id="273" name="Shape 273"/>
+        <p:cNvPr id="1" name="Shape 273"/>
         <p:cNvGrpSpPr/>
         <p:nvPr/>
       </p:nvGrpSpPr>
@@ -3226,7 +3237,9 @@
       <p:sp>
         <p:nvSpPr>
           <p:cNvPr id="274" name="Google Shape;274;p15:notes"/>
-          <p:cNvSpPr/>
+          <p:cNvSpPr>
+            <a:spLocks noGrp="1" noRot="1" noChangeAspect="1"/>
+          </p:cNvSpPr>
           <p:nvPr>
             <p:ph type="sldImg" idx="2"/>
           </p:nvPr>
@@ -3275,7 +3288,9 @@
       <p:sp>
         <p:nvSpPr>
           <p:cNvPr id="275" name="Google Shape;275;p15:notes"/>
-          <p:cNvSpPr txBox="1"/>
+          <p:cNvSpPr txBox="1">
+            <a:spLocks noGrp="1"/>
+          </p:cNvSpPr>
           <p:nvPr>
             <p:ph type="body" idx="1"/>
           </p:nvPr>
@@ -3321,7 +3336,6 @@
               <a:rPr lang="en-US"/>
               <a:t> Crafting layouts that adapt seamlessly to different devices and screen orientations, ensuring optimal user experience</a:t>
             </a:r>
-            <a:endParaRPr lang="en-US"/>
           </a:p>
           <a:p>
             <a:pPr marL="0" lvl="0" indent="0" algn="l" rtl="0">
@@ -3333,6 +3347,10 @@
               </a:spcAft>
               <a:buNone/>
             </a:pPr>
+            <a:r>
+              <a:rPr lang="en-US"/>
+              <a:t/>
+            </a:r>
             <a:br>
               <a:rPr lang="en-US"/>
             </a:br>
@@ -3361,7 +3379,6 @@
               <a:rPr lang="en-US"/>
               <a:t> Employing layout managers and techniques to achieve organized and structured UI layouts, catering to different user interactions</a:t>
             </a:r>
-            <a:endParaRPr lang="en-US"/>
           </a:p>
           <a:p>
             <a:pPr marL="0" lvl="0" indent="0" algn="l" rtl="0">
@@ -3373,6 +3390,10 @@
               </a:spcAft>
               <a:buNone/>
             </a:pPr>
+            <a:r>
+              <a:rPr lang="en-US"/>
+              <a:t/>
+            </a:r>
             <a:br>
               <a:rPr lang="en-US"/>
             </a:br>
@@ -3401,7 +3422,6 @@
               <a:rPr lang="en-US"/>
               <a:t> Embracing responsive design principles to dynamically adjust UI layouts based on screen size, ensuring consistent user experience across devices</a:t>
             </a:r>
-            <a:endParaRPr lang="en-US"/>
           </a:p>
           <a:p>
             <a:pPr marL="0" lvl="0" indent="0" algn="l" rtl="0">
@@ -3413,6 +3433,10 @@
               </a:spcAft>
               <a:buNone/>
             </a:pPr>
+            <a:r>
+              <a:rPr lang="en-US"/>
+              <a:t/>
+            </a:r>
             <a:br>
               <a:rPr lang="en-US"/>
             </a:br>
@@ -3423,7 +3447,9 @@
       <p:sp>
         <p:nvSpPr>
           <p:cNvPr id="276" name="Google Shape;276;p15:notes"/>
-          <p:cNvSpPr txBox="1"/>
+          <p:cNvSpPr txBox="1">
+            <a:spLocks noGrp="1"/>
+          </p:cNvSpPr>
           <p:nvPr>
             <p:ph type="sldNum" idx="12"/>
           </p:nvPr>
@@ -3458,6 +3484,16 @@
             </a:pPr>
             <a:fld id="{00000000-1234-1234-1234-123412341234}" type="slidenum">
               <a:rPr lang="en-US" sz="1200"/>
+              <a:pPr marL="0" lvl="0" indent="0" algn="r" rtl="0">
+                <a:spcBef>
+                  <a:spcPts val="0"/>
+                </a:spcBef>
+                <a:spcAft>
+                  <a:spcPts val="0"/>
+                </a:spcAft>
+                <a:buNone/>
+              </a:pPr>
+              <a:t>15</a:t>
             </a:fld>
             <a:endParaRPr lang="en-US" sz="1200"/>
           </a:p>
@@ -3472,11 +3508,11 @@
 </file>
 
 <file path=ppt/notesSlides/notesSlide16.xml><?xml version="1.0" encoding="utf-8"?>
-<p:notes xmlns:a="http://schemas.openxmlformats.org/drawingml/2006/main" xmlns:r="http://schemas.openxmlformats.org/officeDocument/2006/relationships" xmlns:p="http://schemas.openxmlformats.org/presentationml/2006/main" showMasterPhAnim="0" showMasterSp="0">
+<p:notes xmlns:a="http://schemas.openxmlformats.org/drawingml/2006/main" xmlns:r="http://schemas.openxmlformats.org/officeDocument/2006/relationships" xmlns:p="http://schemas.openxmlformats.org/presentationml/2006/main" showMasterSp="0" showMasterPhAnim="0">
   <p:cSld>
     <p:spTree>
       <p:nvGrpSpPr>
-        <p:cNvPr id="282" name="Shape 282"/>
+        <p:cNvPr id="1" name="Shape 282"/>
         <p:cNvGrpSpPr/>
         <p:nvPr/>
       </p:nvGrpSpPr>
@@ -3491,7 +3527,9 @@
       <p:sp>
         <p:nvSpPr>
           <p:cNvPr id="283" name="Google Shape;283;p16:notes"/>
-          <p:cNvSpPr txBox="1"/>
+          <p:cNvSpPr txBox="1">
+            <a:spLocks noGrp="1"/>
+          </p:cNvSpPr>
           <p:nvPr>
             <p:ph type="body" idx="1"/>
           </p:nvPr>
@@ -3520,13 +3558,16 @@
               </a:spcAft>
               <a:buNone/>
             </a:pPr>
+            <a:endParaRPr/>
           </a:p>
         </p:txBody>
       </p:sp>
       <p:sp>
         <p:nvSpPr>
           <p:cNvPr id="284" name="Google Shape;284;p16:notes"/>
-          <p:cNvSpPr/>
+          <p:cNvSpPr>
+            <a:spLocks noGrp="1" noRot="1" noChangeAspect="1"/>
+          </p:cNvSpPr>
           <p:nvPr>
             <p:ph type="sldImg" idx="2"/>
           </p:nvPr>
@@ -3571,11 +3612,11 @@
 </file>
 
 <file path=ppt/notesSlides/notesSlide17.xml><?xml version="1.0" encoding="utf-8"?>
-<p:notes xmlns:a="http://schemas.openxmlformats.org/drawingml/2006/main" xmlns:r="http://schemas.openxmlformats.org/officeDocument/2006/relationships" xmlns:p="http://schemas.openxmlformats.org/presentationml/2006/main" showMasterPhAnim="0" showMasterSp="0">
+<p:notes xmlns:a="http://schemas.openxmlformats.org/drawingml/2006/main" xmlns:r="http://schemas.openxmlformats.org/officeDocument/2006/relationships" xmlns:p="http://schemas.openxmlformats.org/presentationml/2006/main" showMasterSp="0" showMasterPhAnim="0">
   <p:cSld>
     <p:spTree>
       <p:nvGrpSpPr>
-        <p:cNvPr id="289" name="Shape 289"/>
+        <p:cNvPr id="1" name="Shape 289"/>
         <p:cNvGrpSpPr/>
         <p:nvPr/>
       </p:nvGrpSpPr>
@@ -3590,7 +3631,9 @@
       <p:sp>
         <p:nvSpPr>
           <p:cNvPr id="290" name="Google Shape;290;p17:notes"/>
-          <p:cNvSpPr/>
+          <p:cNvSpPr>
+            <a:spLocks noGrp="1" noRot="1" noChangeAspect="1"/>
+          </p:cNvSpPr>
           <p:nvPr>
             <p:ph type="sldImg" idx="2"/>
           </p:nvPr>
@@ -3639,7 +3682,9 @@
       <p:sp>
         <p:nvSpPr>
           <p:cNvPr id="291" name="Google Shape;291;p17:notes"/>
-          <p:cNvSpPr txBox="1"/>
+          <p:cNvSpPr txBox="1">
+            <a:spLocks noGrp="1"/>
+          </p:cNvSpPr>
           <p:nvPr>
             <p:ph type="body" idx="1"/>
           </p:nvPr>
@@ -3685,7 +3730,6 @@
               <a:rPr lang="en-US"/>
               <a:t> Enhancing UI interactivity and engagement through advanced animation techniques, such as physics-based animations and transitions</a:t>
             </a:r>
-            <a:endParaRPr lang="en-US"/>
           </a:p>
           <a:p>
             <a:pPr marL="0" lvl="0" indent="0" algn="l" rtl="0">
@@ -3697,6 +3741,10 @@
               </a:spcAft>
               <a:buNone/>
             </a:pPr>
+            <a:r>
+              <a:rPr lang="en-US"/>
+              <a:t/>
+            </a:r>
             <a:br>
               <a:rPr lang="en-US"/>
             </a:br>
@@ -3725,7 +3773,6 @@
               <a:rPr lang="en-US"/>
               <a:t> Applying motion design principles to create visually appealing and intuitive user experiences, guiding users through interactions</a:t>
             </a:r>
-            <a:endParaRPr lang="en-US"/>
           </a:p>
           <a:p>
             <a:pPr marL="0" lvl="0" indent="0" algn="l" rtl="0">
@@ -3737,6 +3784,10 @@
               </a:spcAft>
               <a:buNone/>
             </a:pPr>
+            <a:r>
+              <a:rPr lang="en-US"/>
+              <a:t/>
+            </a:r>
             <a:br>
               <a:rPr lang="en-US"/>
             </a:br>
@@ -3765,7 +3816,6 @@
               <a:rPr lang="en-US"/>
               <a:t> Leveraging animation libraries and frameworks to simplify animation implementation, streamline workflows, and access a range of animation effects</a:t>
             </a:r>
-            <a:endParaRPr lang="en-US"/>
           </a:p>
           <a:p>
             <a:pPr marL="0" lvl="0" indent="0" algn="l" rtl="0">
@@ -3777,13 +3827,16 @@
               </a:spcAft>
               <a:buNone/>
             </a:pPr>
+            <a:endParaRPr/>
           </a:p>
         </p:txBody>
       </p:sp>
       <p:sp>
         <p:nvSpPr>
           <p:cNvPr id="292" name="Google Shape;292;p17:notes"/>
-          <p:cNvSpPr txBox="1"/>
+          <p:cNvSpPr txBox="1">
+            <a:spLocks noGrp="1"/>
+          </p:cNvSpPr>
           <p:nvPr>
             <p:ph type="sldNum" idx="12"/>
           </p:nvPr>
@@ -3818,6 +3871,16 @@
             </a:pPr>
             <a:fld id="{00000000-1234-1234-1234-123412341234}" type="slidenum">
               <a:rPr lang="en-US" sz="1200"/>
+              <a:pPr marL="0" lvl="0" indent="0" algn="r" rtl="0">
+                <a:spcBef>
+                  <a:spcPts val="0"/>
+                </a:spcBef>
+                <a:spcAft>
+                  <a:spcPts val="0"/>
+                </a:spcAft>
+                <a:buNone/>
+              </a:pPr>
+              <a:t>17</a:t>
             </a:fld>
             <a:endParaRPr lang="en-US" sz="1200"/>
           </a:p>
@@ -3832,11 +3895,11 @@
 </file>
 
 <file path=ppt/notesSlides/notesSlide18.xml><?xml version="1.0" encoding="utf-8"?>
-<p:notes xmlns:a="http://schemas.openxmlformats.org/drawingml/2006/main" xmlns:r="http://schemas.openxmlformats.org/officeDocument/2006/relationships" xmlns:p="http://schemas.openxmlformats.org/presentationml/2006/main" showMasterPhAnim="0" showMasterSp="0">
+<p:notes xmlns:a="http://schemas.openxmlformats.org/drawingml/2006/main" xmlns:r="http://schemas.openxmlformats.org/officeDocument/2006/relationships" xmlns:p="http://schemas.openxmlformats.org/presentationml/2006/main" showMasterSp="0" showMasterPhAnim="0">
   <p:cSld>
     <p:spTree>
       <p:nvGrpSpPr>
-        <p:cNvPr id="301" name="Shape 301"/>
+        <p:cNvPr id="1" name="Shape 301"/>
         <p:cNvGrpSpPr/>
         <p:nvPr/>
       </p:nvGrpSpPr>
@@ -3851,7 +3914,9 @@
       <p:sp>
         <p:nvSpPr>
           <p:cNvPr id="302" name="Google Shape;302;p18:notes"/>
-          <p:cNvSpPr txBox="1"/>
+          <p:cNvSpPr txBox="1">
+            <a:spLocks noGrp="1"/>
+          </p:cNvSpPr>
           <p:nvPr>
             <p:ph type="body" idx="1"/>
           </p:nvPr>
@@ -3880,13 +3945,16 @@
               </a:spcAft>
               <a:buNone/>
             </a:pPr>
+            <a:endParaRPr/>
           </a:p>
         </p:txBody>
       </p:sp>
       <p:sp>
         <p:nvSpPr>
           <p:cNvPr id="303" name="Google Shape;303;p18:notes"/>
-          <p:cNvSpPr/>
+          <p:cNvSpPr>
+            <a:spLocks noGrp="1" noRot="1" noChangeAspect="1"/>
+          </p:cNvSpPr>
           <p:nvPr>
             <p:ph type="sldImg" idx="2"/>
           </p:nvPr>
@@ -3931,11 +3999,11 @@
 </file>
 
 <file path=ppt/notesSlides/notesSlide19.xml><?xml version="1.0" encoding="utf-8"?>
-<p:notes xmlns:a="http://schemas.openxmlformats.org/drawingml/2006/main" xmlns:r="http://schemas.openxmlformats.org/officeDocument/2006/relationships" xmlns:p="http://schemas.openxmlformats.org/presentationml/2006/main" showMasterPhAnim="0" showMasterSp="0">
+<p:notes xmlns:a="http://schemas.openxmlformats.org/drawingml/2006/main" xmlns:r="http://schemas.openxmlformats.org/officeDocument/2006/relationships" xmlns:p="http://schemas.openxmlformats.org/presentationml/2006/main" showMasterSp="0" showMasterPhAnim="0">
   <p:cSld>
     <p:spTree>
       <p:nvGrpSpPr>
-        <p:cNvPr id="308" name="Shape 308"/>
+        <p:cNvPr id="1" name="Shape 308"/>
         <p:cNvGrpSpPr/>
         <p:nvPr/>
       </p:nvGrpSpPr>
@@ -3950,7 +4018,9 @@
       <p:sp>
         <p:nvSpPr>
           <p:cNvPr id="309" name="Google Shape;309;p19:notes"/>
-          <p:cNvSpPr txBox="1"/>
+          <p:cNvSpPr txBox="1">
+            <a:spLocks noGrp="1"/>
+          </p:cNvSpPr>
           <p:nvPr>
             <p:ph type="body" idx="1"/>
           </p:nvPr>
@@ -3979,13 +4049,16 @@
               </a:spcAft>
               <a:buNone/>
             </a:pPr>
+            <a:endParaRPr/>
           </a:p>
         </p:txBody>
       </p:sp>
       <p:sp>
         <p:nvSpPr>
           <p:cNvPr id="310" name="Google Shape;310;p19:notes"/>
-          <p:cNvSpPr/>
+          <p:cNvSpPr>
+            <a:spLocks noGrp="1" noRot="1" noChangeAspect="1"/>
+          </p:cNvSpPr>
           <p:nvPr>
             <p:ph type="sldImg" idx="2"/>
           </p:nvPr>
@@ -4030,11 +4103,11 @@
 </file>
 
 <file path=ppt/notesSlides/notesSlide2.xml><?xml version="1.0" encoding="utf-8"?>
-<p:notes xmlns:a="http://schemas.openxmlformats.org/drawingml/2006/main" xmlns:r="http://schemas.openxmlformats.org/officeDocument/2006/relationships" xmlns:p="http://schemas.openxmlformats.org/presentationml/2006/main" showMasterPhAnim="0" showMasterSp="0">
+<p:notes xmlns:a="http://schemas.openxmlformats.org/drawingml/2006/main" xmlns:r="http://schemas.openxmlformats.org/officeDocument/2006/relationships" xmlns:p="http://schemas.openxmlformats.org/presentationml/2006/main" showMasterSp="0" showMasterPhAnim="0">
   <p:cSld>
     <p:spTree>
       <p:nvGrpSpPr>
-        <p:cNvPr id="150" name="Shape 150"/>
+        <p:cNvPr id="1" name="Shape 150"/>
         <p:cNvGrpSpPr/>
         <p:nvPr/>
       </p:nvGrpSpPr>
@@ -4049,7 +4122,9 @@
       <p:sp>
         <p:nvSpPr>
           <p:cNvPr id="151" name="Google Shape;151;p2:notes"/>
-          <p:cNvSpPr txBox="1"/>
+          <p:cNvSpPr txBox="1">
+            <a:spLocks noGrp="1"/>
+          </p:cNvSpPr>
           <p:nvPr>
             <p:ph type="body" idx="1"/>
           </p:nvPr>
@@ -4095,15 +4170,6 @@
               </a:rPr>
               <a:t>UI design in Flutter involves utilizing its framework and tools to create visually appealing and user-friendly interfaces for mobile applications.</a:t>
             </a:r>
-            <a:endParaRPr lang="en-US" sz="1100">
-              <a:solidFill>
-                <a:srgbClr val="1F1F1F"/>
-              </a:solidFill>
-              <a:latin typeface="Arial" panose="020B0604020202020204"/>
-              <a:ea typeface="Arial" panose="020B0604020202020204"/>
-              <a:cs typeface="Arial" panose="020B0604020202020204"/>
-              <a:sym typeface="Arial" panose="020B0604020202020204"/>
-            </a:endParaRPr>
           </a:p>
           <a:p>
             <a:pPr marL="285750" lvl="0" indent="-247650" algn="l" rtl="0">
@@ -4146,6 +4212,7 @@
               <a:buFont typeface="Arial" panose="020B0604020202020204"/>
               <a:buNone/>
             </a:pPr>
+            <a:endParaRPr/>
           </a:p>
           <a:p>
             <a:pPr marL="0" lvl="0" indent="0" algn="l" rtl="0">
@@ -4214,6 +4281,7 @@
               <a:buFont typeface="Arial" panose="020B0604020202020204"/>
               <a:buNone/>
             </a:pPr>
+            <a:endParaRPr/>
           </a:p>
           <a:p>
             <a:pPr marL="0" lvl="0" indent="0" algn="l" rtl="0">
@@ -4225,13 +4293,16 @@
               </a:spcAft>
               <a:buNone/>
             </a:pPr>
+            <a:endParaRPr/>
           </a:p>
         </p:txBody>
       </p:sp>
       <p:sp>
         <p:nvSpPr>
           <p:cNvPr id="152" name="Google Shape;152;p2:notes"/>
-          <p:cNvSpPr/>
+          <p:cNvSpPr>
+            <a:spLocks noGrp="1" noRot="1" noChangeAspect="1"/>
+          </p:cNvSpPr>
           <p:nvPr>
             <p:ph type="sldImg" idx="2"/>
           </p:nvPr>
@@ -4276,11 +4347,11 @@
 </file>
 
 <file path=ppt/notesSlides/notesSlide20.xml><?xml version="1.0" encoding="utf-8"?>
-<p:notes xmlns:a="http://schemas.openxmlformats.org/drawingml/2006/main" xmlns:r="http://schemas.openxmlformats.org/officeDocument/2006/relationships" xmlns:p="http://schemas.openxmlformats.org/presentationml/2006/main" showMasterPhAnim="0" showMasterSp="0">
+<p:notes xmlns:a="http://schemas.openxmlformats.org/drawingml/2006/main" xmlns:r="http://schemas.openxmlformats.org/officeDocument/2006/relationships" xmlns:p="http://schemas.openxmlformats.org/presentationml/2006/main" showMasterSp="0" showMasterPhAnim="0">
   <p:cSld>
     <p:spTree>
       <p:nvGrpSpPr>
-        <p:cNvPr id="322" name="Shape 322"/>
+        <p:cNvPr id="1" name="Shape 322"/>
         <p:cNvGrpSpPr/>
         <p:nvPr/>
       </p:nvGrpSpPr>
@@ -4295,7 +4366,9 @@
       <p:sp>
         <p:nvSpPr>
           <p:cNvPr id="323" name="Google Shape;323;p20:notes"/>
-          <p:cNvSpPr/>
+          <p:cNvSpPr>
+            <a:spLocks noGrp="1" noRot="1" noChangeAspect="1"/>
+          </p:cNvSpPr>
           <p:nvPr>
             <p:ph type="sldImg" idx="2"/>
           </p:nvPr>
@@ -4344,7 +4417,9 @@
       <p:sp>
         <p:nvSpPr>
           <p:cNvPr id="324" name="Google Shape;324;p20:notes"/>
-          <p:cNvSpPr txBox="1"/>
+          <p:cNvSpPr txBox="1">
+            <a:spLocks noGrp="1"/>
+          </p:cNvSpPr>
           <p:nvPr>
             <p:ph type="body" idx="1"/>
           </p:nvPr>
@@ -4390,7 +4465,6 @@
               <a:rPr lang="en-US"/>
               <a:t> Addressing the complexities of state management in large applications, ensuring data consistency and synchronization across multiple UI components</a:t>
             </a:r>
-            <a:endParaRPr lang="en-US"/>
           </a:p>
           <a:p>
             <a:pPr marL="0" lvl="0" indent="0" algn="l" rtl="0">
@@ -4402,6 +4476,10 @@
               </a:spcAft>
               <a:buNone/>
             </a:pPr>
+            <a:r>
+              <a:rPr lang="en-US"/>
+              <a:t/>
+            </a:r>
             <a:br>
               <a:rPr lang="en-US"/>
             </a:br>
@@ -4430,7 +4508,6 @@
               <a:rPr lang="en-US"/>
               <a:t> Employing state management libraries and frameworks to streamline state management, implement state change notifications, and handle complexity efficiently</a:t>
             </a:r>
-            <a:endParaRPr lang="en-US"/>
           </a:p>
           <a:p>
             <a:pPr marL="0" lvl="0" indent="0" algn="l" rtl="0">
@@ -4442,6 +4519,10 @@
               </a:spcAft>
               <a:buNone/>
             </a:pPr>
+            <a:r>
+              <a:rPr lang="en-US"/>
+              <a:t/>
+            </a:r>
             <a:br>
               <a:rPr lang="en-US"/>
             </a:br>
@@ -4470,7 +4551,6 @@
               <a:rPr lang="en-US"/>
               <a:t> Implementing strategies to optimize state management performance, minimize performance bottlenecks, and handle large amounts of data</a:t>
             </a:r>
-            <a:endParaRPr lang="en-US"/>
           </a:p>
           <a:p>
             <a:pPr marL="0" lvl="0" indent="0" algn="l" rtl="0">
@@ -4482,6 +4562,10 @@
               </a:spcAft>
               <a:buNone/>
             </a:pPr>
+            <a:r>
+              <a:rPr lang="en-US"/>
+              <a:t/>
+            </a:r>
             <a:br>
               <a:rPr lang="en-US"/>
             </a:br>
@@ -4492,7 +4576,9 @@
       <p:sp>
         <p:nvSpPr>
           <p:cNvPr id="325" name="Google Shape;325;p20:notes"/>
-          <p:cNvSpPr txBox="1"/>
+          <p:cNvSpPr txBox="1">
+            <a:spLocks noGrp="1"/>
+          </p:cNvSpPr>
           <p:nvPr>
             <p:ph type="sldNum" idx="12"/>
           </p:nvPr>
@@ -4527,6 +4613,16 @@
             </a:pPr>
             <a:fld id="{00000000-1234-1234-1234-123412341234}" type="slidenum">
               <a:rPr lang="en-US" sz="1200"/>
+              <a:pPr marL="0" lvl="0" indent="0" algn="r" rtl="0">
+                <a:spcBef>
+                  <a:spcPts val="0"/>
+                </a:spcBef>
+                <a:spcAft>
+                  <a:spcPts val="0"/>
+                </a:spcAft>
+                <a:buNone/>
+              </a:pPr>
+              <a:t>20</a:t>
             </a:fld>
             <a:endParaRPr lang="en-US" sz="1200"/>
           </a:p>
@@ -4541,11 +4637,11 @@
 </file>
 
 <file path=ppt/notesSlides/notesSlide21.xml><?xml version="1.0" encoding="utf-8"?>
-<p:notes xmlns:a="http://schemas.openxmlformats.org/drawingml/2006/main" xmlns:r="http://schemas.openxmlformats.org/officeDocument/2006/relationships" xmlns:p="http://schemas.openxmlformats.org/presentationml/2006/main" showMasterPhAnim="0" showMasterSp="0">
+<p:notes xmlns:a="http://schemas.openxmlformats.org/drawingml/2006/main" xmlns:r="http://schemas.openxmlformats.org/officeDocument/2006/relationships" xmlns:p="http://schemas.openxmlformats.org/presentationml/2006/main" showMasterSp="0" showMasterPhAnim="0">
   <p:cSld>
     <p:spTree>
       <p:nvGrpSpPr>
-        <p:cNvPr id="331" name="Shape 331"/>
+        <p:cNvPr id="1" name="Shape 331"/>
         <p:cNvGrpSpPr/>
         <p:nvPr/>
       </p:nvGrpSpPr>
@@ -4560,7 +4656,9 @@
       <p:sp>
         <p:nvSpPr>
           <p:cNvPr id="332" name="Google Shape;332;p21:notes"/>
-          <p:cNvSpPr/>
+          <p:cNvSpPr>
+            <a:spLocks noGrp="1" noRot="1" noChangeAspect="1"/>
+          </p:cNvSpPr>
           <p:nvPr>
             <p:ph type="sldImg" idx="2"/>
           </p:nvPr>
@@ -4609,7 +4707,9 @@
       <p:sp>
         <p:nvSpPr>
           <p:cNvPr id="333" name="Google Shape;333;p21:notes"/>
-          <p:cNvSpPr txBox="1"/>
+          <p:cNvSpPr txBox="1">
+            <a:spLocks noGrp="1"/>
+          </p:cNvSpPr>
           <p:nvPr>
             <p:ph type="body" idx="1"/>
           </p:nvPr>
@@ -4655,7 +4755,6 @@
               <a:rPr lang="en-US"/>
               <a:t> Establishing seamless communication between UI components and backend services, enabling data retrieval and manipulation</a:t>
             </a:r>
-            <a:endParaRPr lang="en-US"/>
           </a:p>
           <a:p>
             <a:pPr marL="342900" lvl="0" indent="0" algn="l" rtl="0">
@@ -4667,6 +4766,10 @@
               </a:spcAft>
               <a:buNone/>
             </a:pPr>
+            <a:r>
+              <a:rPr lang="en-US"/>
+              <a:t/>
+            </a:r>
             <a:br>
               <a:rPr lang="en-US"/>
             </a:br>
@@ -4695,7 +4798,6 @@
               <a:rPr lang="en-US"/>
               <a:t> Optimizing data fetching strategies to minimize network requests and improve performance, utilizing caching mechanisms for efficient data retrieval</a:t>
             </a:r>
-            <a:endParaRPr lang="en-US"/>
           </a:p>
           <a:p>
             <a:pPr marL="342900" lvl="0" indent="0" algn="l" rtl="0">
@@ -4707,6 +4809,10 @@
               </a:spcAft>
               <a:buNone/>
             </a:pPr>
+            <a:r>
+              <a:rPr lang="en-US"/>
+              <a:t/>
+            </a:r>
             <a:br>
               <a:rPr lang="en-US"/>
             </a:br>
@@ -4735,7 +4841,6 @@
               <a:rPr lang="en-US"/>
               <a:t> Implementing robust error handling mechanisms to gracefully handle network errors and provide informative feedback to users</a:t>
             </a:r>
-            <a:endParaRPr lang="en-US"/>
           </a:p>
           <a:p>
             <a:pPr marL="0" lvl="0" indent="0" algn="l" rtl="0">
@@ -4747,6 +4852,10 @@
               </a:spcAft>
               <a:buNone/>
             </a:pPr>
+            <a:r>
+              <a:rPr lang="en-US"/>
+              <a:t/>
+            </a:r>
             <a:br>
               <a:rPr lang="en-US"/>
             </a:br>
@@ -4762,13 +4871,16 @@
               </a:spcAft>
               <a:buNone/>
             </a:pPr>
+            <a:endParaRPr/>
           </a:p>
         </p:txBody>
       </p:sp>
       <p:sp>
         <p:nvSpPr>
           <p:cNvPr id="334" name="Google Shape;334;p21:notes"/>
-          <p:cNvSpPr txBox="1"/>
+          <p:cNvSpPr txBox="1">
+            <a:spLocks noGrp="1"/>
+          </p:cNvSpPr>
           <p:nvPr>
             <p:ph type="sldNum" idx="12"/>
           </p:nvPr>
@@ -4803,6 +4915,16 @@
             </a:pPr>
             <a:fld id="{00000000-1234-1234-1234-123412341234}" type="slidenum">
               <a:rPr lang="en-US" sz="1200"/>
+              <a:pPr marL="0" lvl="0" indent="0" algn="r" rtl="0">
+                <a:spcBef>
+                  <a:spcPts val="0"/>
+                </a:spcBef>
+                <a:spcAft>
+                  <a:spcPts val="0"/>
+                </a:spcAft>
+                <a:buNone/>
+              </a:pPr>
+              <a:t>21</a:t>
             </a:fld>
             <a:endParaRPr lang="en-US" sz="1200"/>
           </a:p>
@@ -4817,11 +4939,11 @@
 </file>
 
 <file path=ppt/notesSlides/notesSlide22.xml><?xml version="1.0" encoding="utf-8"?>
-<p:notes xmlns:a="http://schemas.openxmlformats.org/drawingml/2006/main" xmlns:r="http://schemas.openxmlformats.org/officeDocument/2006/relationships" xmlns:p="http://schemas.openxmlformats.org/presentationml/2006/main" showMasterPhAnim="0" showMasterSp="0">
+<p:notes xmlns:a="http://schemas.openxmlformats.org/drawingml/2006/main" xmlns:r="http://schemas.openxmlformats.org/officeDocument/2006/relationships" xmlns:p="http://schemas.openxmlformats.org/presentationml/2006/main" showMasterSp="0" showMasterPhAnim="0">
   <p:cSld>
     <p:spTree>
       <p:nvGrpSpPr>
-        <p:cNvPr id="342" name="Shape 342"/>
+        <p:cNvPr id="1" name="Shape 342"/>
         <p:cNvGrpSpPr/>
         <p:nvPr/>
       </p:nvGrpSpPr>
@@ -4836,7 +4958,9 @@
       <p:sp>
         <p:nvSpPr>
           <p:cNvPr id="343" name="Google Shape;343;p22:notes"/>
-          <p:cNvSpPr/>
+          <p:cNvSpPr>
+            <a:spLocks noGrp="1" noRot="1" noChangeAspect="1"/>
+          </p:cNvSpPr>
           <p:nvPr>
             <p:ph type="sldImg" idx="2"/>
           </p:nvPr>
@@ -4885,7 +5009,9 @@
       <p:sp>
         <p:nvSpPr>
           <p:cNvPr id="344" name="Google Shape;344;p22:notes"/>
-          <p:cNvSpPr txBox="1"/>
+          <p:cNvSpPr txBox="1">
+            <a:spLocks noGrp="1"/>
+          </p:cNvSpPr>
           <p:nvPr>
             <p:ph type="body" idx="1"/>
           </p:nvPr>
@@ -4931,7 +5057,6 @@
               <a:rPr lang="en-US"/>
               <a:t> Summarizing the essential concepts and techniques covered in the presentation</a:t>
             </a:r>
-            <a:endParaRPr lang="en-US"/>
           </a:p>
           <a:p>
             <a:pPr marL="0" lvl="0" indent="0" algn="l" rtl="0">
@@ -4943,6 +5068,10 @@
               </a:spcAft>
               <a:buNone/>
             </a:pPr>
+            <a:r>
+              <a:rPr lang="en-US"/>
+              <a:t/>
+            </a:r>
             <a:br>
               <a:rPr lang="en-US"/>
             </a:br>
@@ -4971,7 +5100,6 @@
               <a:rPr lang="en-US"/>
               <a:t> Reinforcing the importance of mastering advanced UI development techniques to create exceptional user experiences</a:t>
             </a:r>
-            <a:endParaRPr lang="en-US"/>
           </a:p>
           <a:p>
             <a:pPr marL="0" lvl="0" indent="0" algn="l" rtl="0">
@@ -4983,6 +5111,10 @@
               </a:spcAft>
               <a:buNone/>
             </a:pPr>
+            <a:r>
+              <a:rPr lang="en-US"/>
+              <a:t/>
+            </a:r>
             <a:br>
               <a:rPr lang="en-US"/>
             </a:br>
@@ -5011,7 +5143,6 @@
               <a:rPr lang="en-US"/>
               <a:t> Fostering a culture of continuous learning and experimentation to stay at the forefront of UI development</a:t>
             </a:r>
-            <a:endParaRPr lang="en-US"/>
           </a:p>
           <a:p>
             <a:pPr marL="0" lvl="0" indent="0" algn="l" rtl="0">
@@ -5023,13 +5154,16 @@
               </a:spcAft>
               <a:buNone/>
             </a:pPr>
+            <a:endParaRPr/>
           </a:p>
         </p:txBody>
       </p:sp>
       <p:sp>
         <p:nvSpPr>
           <p:cNvPr id="345" name="Google Shape;345;p22:notes"/>
-          <p:cNvSpPr txBox="1"/>
+          <p:cNvSpPr txBox="1">
+            <a:spLocks noGrp="1"/>
+          </p:cNvSpPr>
           <p:nvPr>
             <p:ph type="sldNum" idx="12"/>
           </p:nvPr>
@@ -5064,6 +5198,16 @@
             </a:pPr>
             <a:fld id="{00000000-1234-1234-1234-123412341234}" type="slidenum">
               <a:rPr lang="en-US" sz="1200"/>
+              <a:pPr marL="0" lvl="0" indent="0" algn="r" rtl="0">
+                <a:spcBef>
+                  <a:spcPts val="0"/>
+                </a:spcBef>
+                <a:spcAft>
+                  <a:spcPts val="0"/>
+                </a:spcAft>
+                <a:buNone/>
+              </a:pPr>
+              <a:t>22</a:t>
             </a:fld>
             <a:endParaRPr lang="en-US" sz="1200"/>
           </a:p>
@@ -5078,11 +5222,11 @@
 </file>
 
 <file path=ppt/notesSlides/notesSlide3.xml><?xml version="1.0" encoding="utf-8"?>
-<p:notes xmlns:a="http://schemas.openxmlformats.org/drawingml/2006/main" xmlns:r="http://schemas.openxmlformats.org/officeDocument/2006/relationships" xmlns:p="http://schemas.openxmlformats.org/presentationml/2006/main" showMasterPhAnim="0" showMasterSp="0">
+<p:notes xmlns:a="http://schemas.openxmlformats.org/drawingml/2006/main" xmlns:r="http://schemas.openxmlformats.org/officeDocument/2006/relationships" xmlns:p="http://schemas.openxmlformats.org/presentationml/2006/main" showMasterSp="0" showMasterPhAnim="0">
   <p:cSld>
     <p:spTree>
       <p:nvGrpSpPr>
-        <p:cNvPr id="159" name="Shape 159"/>
+        <p:cNvPr id="1" name="Shape 159"/>
         <p:cNvGrpSpPr/>
         <p:nvPr/>
       </p:nvGrpSpPr>
@@ -5097,7 +5241,9 @@
       <p:sp>
         <p:nvSpPr>
           <p:cNvPr id="160" name="Google Shape;160;p3:notes"/>
-          <p:cNvSpPr/>
+          <p:cNvSpPr>
+            <a:spLocks noGrp="1" noRot="1" noChangeAspect="1"/>
+          </p:cNvSpPr>
           <p:nvPr>
             <p:ph type="sldImg" idx="2"/>
           </p:nvPr>
@@ -5146,7 +5292,9 @@
       <p:sp>
         <p:nvSpPr>
           <p:cNvPr id="161" name="Google Shape;161;p3:notes"/>
-          <p:cNvSpPr txBox="1"/>
+          <p:cNvSpPr txBox="1">
+            <a:spLocks noGrp="1"/>
+          </p:cNvSpPr>
           <p:nvPr>
             <p:ph type="body" idx="1"/>
           </p:nvPr>
@@ -5192,7 +5340,6 @@
               <a:rPr lang="en-US"/>
               <a:t> Unleashing the hidden capabilities of existing widgets to achieve sophisticated UI elements</a:t>
             </a:r>
-            <a:endParaRPr lang="en-US"/>
           </a:p>
           <a:p>
             <a:pPr marL="0" lvl="0" indent="0" algn="l" rtl="0">
@@ -5204,6 +5351,10 @@
               </a:spcAft>
               <a:buNone/>
             </a:pPr>
+            <a:r>
+              <a:rPr lang="en-US"/>
+              <a:t/>
+            </a:r>
             <a:br>
               <a:rPr lang="en-US"/>
             </a:br>
@@ -5232,7 +5383,6 @@
               <a:rPr lang="en-US"/>
               <a:t> Designing reusable and customizable widgets to encapsulate UI logic and styling, enhancing maintainability and consistency</a:t>
             </a:r>
-            <a:endParaRPr lang="en-US"/>
           </a:p>
           <a:p>
             <a:pPr marL="0" lvl="0" indent="0" algn="l" rtl="0">
@@ -5244,6 +5394,10 @@
               </a:spcAft>
               <a:buNone/>
             </a:pPr>
+            <a:r>
+              <a:rPr lang="en-US"/>
+              <a:t/>
+            </a:r>
             <a:br>
               <a:rPr lang="en-US"/>
             </a:br>
@@ -5272,7 +5426,6 @@
               <a:rPr lang="en-US"/>
               <a:t> Utilizing pre-built widget libraries and frameworks to streamline development and access a wealth of UI components</a:t>
             </a:r>
-            <a:endParaRPr lang="en-US"/>
           </a:p>
           <a:p>
             <a:pPr marL="0" lvl="0" indent="0" algn="l" rtl="0">
@@ -5284,13 +5437,16 @@
               </a:spcAft>
               <a:buNone/>
             </a:pPr>
+            <a:endParaRPr/>
           </a:p>
         </p:txBody>
       </p:sp>
       <p:sp>
         <p:nvSpPr>
           <p:cNvPr id="162" name="Google Shape;162;p3:notes"/>
-          <p:cNvSpPr txBox="1"/>
+          <p:cNvSpPr txBox="1">
+            <a:spLocks noGrp="1"/>
+          </p:cNvSpPr>
           <p:nvPr>
             <p:ph type="sldNum" idx="12"/>
           </p:nvPr>
@@ -5325,6 +5481,16 @@
             </a:pPr>
             <a:fld id="{00000000-1234-1234-1234-123412341234}" type="slidenum">
               <a:rPr lang="en-US" sz="1200"/>
+              <a:pPr marL="0" lvl="0" indent="0" algn="r" rtl="0">
+                <a:spcBef>
+                  <a:spcPts val="0"/>
+                </a:spcBef>
+                <a:spcAft>
+                  <a:spcPts val="0"/>
+                </a:spcAft>
+                <a:buNone/>
+              </a:pPr>
+              <a:t>3</a:t>
             </a:fld>
             <a:endParaRPr lang="en-US" sz="1200"/>
           </a:p>
@@ -5339,11 +5505,11 @@
 </file>
 
 <file path=ppt/notesSlides/notesSlide4.xml><?xml version="1.0" encoding="utf-8"?>
-<p:notes xmlns:a="http://schemas.openxmlformats.org/drawingml/2006/main" xmlns:r="http://schemas.openxmlformats.org/officeDocument/2006/relationships" xmlns:p="http://schemas.openxmlformats.org/presentationml/2006/main" showMasterPhAnim="0" showMasterSp="0">
+<p:notes xmlns:a="http://schemas.openxmlformats.org/drawingml/2006/main" xmlns:r="http://schemas.openxmlformats.org/officeDocument/2006/relationships" xmlns:p="http://schemas.openxmlformats.org/presentationml/2006/main" showMasterSp="0" showMasterPhAnim="0">
   <p:cSld>
     <p:spTree>
       <p:nvGrpSpPr>
-        <p:cNvPr id="172" name="Shape 172"/>
+        <p:cNvPr id="1" name="Shape 172"/>
         <p:cNvGrpSpPr/>
         <p:nvPr/>
       </p:nvGrpSpPr>
@@ -5358,7 +5524,9 @@
       <p:sp>
         <p:nvSpPr>
           <p:cNvPr id="173" name="Google Shape;173;p4:notes"/>
-          <p:cNvSpPr/>
+          <p:cNvSpPr>
+            <a:spLocks noGrp="1" noRot="1" noChangeAspect="1"/>
+          </p:cNvSpPr>
           <p:nvPr>
             <p:ph type="sldImg" idx="2"/>
           </p:nvPr>
@@ -5407,7 +5575,9 @@
       <p:sp>
         <p:nvSpPr>
           <p:cNvPr id="174" name="Google Shape;174;p4:notes"/>
-          <p:cNvSpPr txBox="1"/>
+          <p:cNvSpPr txBox="1">
+            <a:spLocks noGrp="1"/>
+          </p:cNvSpPr>
           <p:nvPr>
             <p:ph type="body" idx="1"/>
           </p:nvPr>
@@ -5466,12 +5636,6 @@
               </a:rPr>
               <a:t>​</a:t>
             </a:r>
-            <a:endParaRPr lang="en-US" sz="1200">
-              <a:latin typeface="Calibri" panose="020F0502020204030204"/>
-              <a:ea typeface="Calibri" panose="020F0502020204030204"/>
-              <a:cs typeface="Calibri" panose="020F0502020204030204"/>
-              <a:sym typeface="Calibri" panose="020F0502020204030204"/>
-            </a:endParaRPr>
           </a:p>
           <a:p>
             <a:pPr marL="285750" lvl="0" indent="-209550" algn="l" rtl="0">
@@ -5558,12 +5722,6 @@
               </a:rPr>
               <a:t>​</a:t>
             </a:r>
-            <a:endParaRPr lang="en-US" sz="1200">
-              <a:latin typeface="Calibri" panose="020F0502020204030204"/>
-              <a:ea typeface="Calibri" panose="020F0502020204030204"/>
-              <a:cs typeface="Calibri" panose="020F0502020204030204"/>
-              <a:sym typeface="Calibri" panose="020F0502020204030204"/>
-            </a:endParaRPr>
           </a:p>
           <a:p>
             <a:pPr marL="285750" lvl="0" indent="-209550" algn="l" rtl="0">
@@ -5697,12 +5855,6 @@
               </a:rPr>
               <a:t>​</a:t>
             </a:r>
-            <a:endParaRPr lang="en-US" sz="1200">
-              <a:latin typeface="Calibri" panose="020F0502020204030204"/>
-              <a:ea typeface="Calibri" panose="020F0502020204030204"/>
-              <a:cs typeface="Calibri" panose="020F0502020204030204"/>
-              <a:sym typeface="Calibri" panose="020F0502020204030204"/>
-            </a:endParaRPr>
           </a:p>
           <a:p>
             <a:pPr marL="285750" lvl="0" indent="-209550" algn="l" rtl="0">
@@ -5765,12 +5917,6 @@
               </a:rPr>
               <a:t>​</a:t>
             </a:r>
-            <a:endParaRPr lang="en-US" sz="1200">
-              <a:latin typeface="Calibri" panose="020F0502020204030204"/>
-              <a:ea typeface="Calibri" panose="020F0502020204030204"/>
-              <a:cs typeface="Calibri" panose="020F0502020204030204"/>
-              <a:sym typeface="Calibri" panose="020F0502020204030204"/>
-            </a:endParaRPr>
           </a:p>
           <a:p>
             <a:pPr marL="285750" lvl="0" indent="-209550" algn="l" rtl="0">
@@ -5833,12 +5979,6 @@
               </a:rPr>
               <a:t>​</a:t>
             </a:r>
-            <a:endParaRPr lang="en-US" sz="1200">
-              <a:latin typeface="Calibri" panose="020F0502020204030204"/>
-              <a:ea typeface="Calibri" panose="020F0502020204030204"/>
-              <a:cs typeface="Calibri" panose="020F0502020204030204"/>
-              <a:sym typeface="Calibri" panose="020F0502020204030204"/>
-            </a:endParaRPr>
           </a:p>
           <a:p>
             <a:pPr marL="285750" lvl="0" indent="-209550" algn="l" rtl="0">
@@ -5901,12 +6041,6 @@
               </a:rPr>
               <a:t>​</a:t>
             </a:r>
-            <a:endParaRPr lang="en-US" sz="1200">
-              <a:latin typeface="Calibri" panose="020F0502020204030204"/>
-              <a:ea typeface="Calibri" panose="020F0502020204030204"/>
-              <a:cs typeface="Calibri" panose="020F0502020204030204"/>
-              <a:sym typeface="Calibri" panose="020F0502020204030204"/>
-            </a:endParaRPr>
           </a:p>
           <a:p>
             <a:pPr marL="285750" lvl="0" indent="-209550" algn="l" rtl="0">
@@ -5923,6 +6057,7 @@
               <a:buFont typeface="Arial" panose="020B0604020202020204"/>
               <a:buNone/>
             </a:pPr>
+            <a:endParaRPr/>
           </a:p>
           <a:p>
             <a:pPr marL="0" lvl="0" indent="0" algn="l" rtl="0">
@@ -5934,13 +6069,16 @@
               </a:spcAft>
               <a:buNone/>
             </a:pPr>
+            <a:endParaRPr/>
           </a:p>
         </p:txBody>
       </p:sp>
       <p:sp>
         <p:nvSpPr>
           <p:cNvPr id="175" name="Google Shape;175;p4:notes"/>
-          <p:cNvSpPr txBox="1"/>
+          <p:cNvSpPr txBox="1">
+            <a:spLocks noGrp="1"/>
+          </p:cNvSpPr>
           <p:nvPr>
             <p:ph type="sldNum" idx="12"/>
           </p:nvPr>
@@ -5975,6 +6113,16 @@
             </a:pPr>
             <a:fld id="{00000000-1234-1234-1234-123412341234}" type="slidenum">
               <a:rPr lang="en-US"/>
+              <a:pPr marL="0" lvl="0" indent="0" algn="r" rtl="0">
+                <a:spcBef>
+                  <a:spcPts val="0"/>
+                </a:spcBef>
+                <a:spcAft>
+                  <a:spcPts val="0"/>
+                </a:spcAft>
+                <a:buNone/>
+              </a:pPr>
+              <a:t>4</a:t>
             </a:fld>
             <a:endParaRPr lang="en-US"/>
           </a:p>
@@ -5989,11 +6137,11 @@
 </file>
 
 <file path=ppt/notesSlides/notesSlide5.xml><?xml version="1.0" encoding="utf-8"?>
-<p:notes xmlns:a="http://schemas.openxmlformats.org/drawingml/2006/main" xmlns:r="http://schemas.openxmlformats.org/officeDocument/2006/relationships" xmlns:p="http://schemas.openxmlformats.org/presentationml/2006/main" showMasterPhAnim="0" showMasterSp="0">
+<p:notes xmlns:a="http://schemas.openxmlformats.org/drawingml/2006/main" xmlns:r="http://schemas.openxmlformats.org/officeDocument/2006/relationships" xmlns:p="http://schemas.openxmlformats.org/presentationml/2006/main" showMasterSp="0" showMasterPhAnim="0">
   <p:cSld>
     <p:spTree>
       <p:nvGrpSpPr>
-        <p:cNvPr id="180" name="Shape 180"/>
+        <p:cNvPr id="1" name="Shape 180"/>
         <p:cNvGrpSpPr/>
         <p:nvPr/>
       </p:nvGrpSpPr>
@@ -6008,7 +6156,9 @@
       <p:sp>
         <p:nvSpPr>
           <p:cNvPr id="181" name="Google Shape;181;p5:notes"/>
-          <p:cNvSpPr txBox="1"/>
+          <p:cNvSpPr txBox="1">
+            <a:spLocks noGrp="1"/>
+          </p:cNvSpPr>
           <p:nvPr>
             <p:ph type="body" idx="1"/>
           </p:nvPr>
@@ -6037,13 +6187,16 @@
               </a:spcAft>
               <a:buNone/>
             </a:pPr>
+            <a:endParaRPr/>
           </a:p>
         </p:txBody>
       </p:sp>
       <p:sp>
         <p:nvSpPr>
           <p:cNvPr id="182" name="Google Shape;182;p5:notes"/>
-          <p:cNvSpPr/>
+          <p:cNvSpPr>
+            <a:spLocks noGrp="1" noRot="1" noChangeAspect="1"/>
+          </p:cNvSpPr>
           <p:nvPr>
             <p:ph type="sldImg" idx="2"/>
           </p:nvPr>
@@ -6088,11 +6241,11 @@
 </file>
 
 <file path=ppt/notesSlides/notesSlide6.xml><?xml version="1.0" encoding="utf-8"?>
-<p:notes xmlns:a="http://schemas.openxmlformats.org/drawingml/2006/main" xmlns:r="http://schemas.openxmlformats.org/officeDocument/2006/relationships" xmlns:p="http://schemas.openxmlformats.org/presentationml/2006/main" showMasterPhAnim="0" showMasterSp="0">
+<p:notes xmlns:a="http://schemas.openxmlformats.org/drawingml/2006/main" xmlns:r="http://schemas.openxmlformats.org/officeDocument/2006/relationships" xmlns:p="http://schemas.openxmlformats.org/presentationml/2006/main" showMasterSp="0" showMasterPhAnim="0">
   <p:cSld>
     <p:spTree>
       <p:nvGrpSpPr>
-        <p:cNvPr id="189" name="Shape 189"/>
+        <p:cNvPr id="1" name="Shape 189"/>
         <p:cNvGrpSpPr/>
         <p:nvPr/>
       </p:nvGrpSpPr>
@@ -6107,7 +6260,9 @@
       <p:sp>
         <p:nvSpPr>
           <p:cNvPr id="190" name="Google Shape;190;p6:notes"/>
-          <p:cNvSpPr/>
+          <p:cNvSpPr>
+            <a:spLocks noGrp="1" noRot="1" noChangeAspect="1"/>
+          </p:cNvSpPr>
           <p:nvPr>
             <p:ph type="sldImg" idx="2"/>
           </p:nvPr>
@@ -6156,7 +6311,9 @@
       <p:sp>
         <p:nvSpPr>
           <p:cNvPr id="191" name="Google Shape;191;p6:notes"/>
-          <p:cNvSpPr txBox="1"/>
+          <p:cNvSpPr txBox="1">
+            <a:spLocks noGrp="1"/>
+          </p:cNvSpPr>
           <p:nvPr>
             <p:ph type="body" idx="1"/>
           </p:nvPr>
@@ -6472,13 +6629,16 @@
               </a:spcAft>
               <a:buNone/>
             </a:pPr>
+            <a:endParaRPr/>
           </a:p>
         </p:txBody>
       </p:sp>
       <p:sp>
         <p:nvSpPr>
           <p:cNvPr id="192" name="Google Shape;192;p6:notes"/>
-          <p:cNvSpPr txBox="1"/>
+          <p:cNvSpPr txBox="1">
+            <a:spLocks noGrp="1"/>
+          </p:cNvSpPr>
           <p:nvPr>
             <p:ph type="sldNum" idx="12"/>
           </p:nvPr>
@@ -6513,6 +6673,16 @@
             </a:pPr>
             <a:fld id="{00000000-1234-1234-1234-123412341234}" type="slidenum">
               <a:rPr lang="en-US"/>
+              <a:pPr marL="0" lvl="0" indent="0" algn="r" rtl="0">
+                <a:spcBef>
+                  <a:spcPts val="0"/>
+                </a:spcBef>
+                <a:spcAft>
+                  <a:spcPts val="0"/>
+                </a:spcAft>
+                <a:buNone/>
+              </a:pPr>
+              <a:t>6</a:t>
             </a:fld>
             <a:endParaRPr lang="en-US"/>
           </a:p>
@@ -6527,11 +6697,11 @@
 </file>
 
 <file path=ppt/notesSlides/notesSlide7.xml><?xml version="1.0" encoding="utf-8"?>
-<p:notes xmlns:a="http://schemas.openxmlformats.org/drawingml/2006/main" xmlns:r="http://schemas.openxmlformats.org/officeDocument/2006/relationships" xmlns:p="http://schemas.openxmlformats.org/presentationml/2006/main" showMasterPhAnim="0" showMasterSp="0">
+<p:notes xmlns:a="http://schemas.openxmlformats.org/drawingml/2006/main" xmlns:r="http://schemas.openxmlformats.org/officeDocument/2006/relationships" xmlns:p="http://schemas.openxmlformats.org/presentationml/2006/main" showMasterSp="0" showMasterPhAnim="0">
   <p:cSld>
     <p:spTree>
       <p:nvGrpSpPr>
-        <p:cNvPr id="197" name="Shape 197"/>
+        <p:cNvPr id="1" name="Shape 197"/>
         <p:cNvGrpSpPr/>
         <p:nvPr/>
       </p:nvGrpSpPr>
@@ -6546,7 +6716,9 @@
       <p:sp>
         <p:nvSpPr>
           <p:cNvPr id="198" name="Google Shape;198;p7:notes"/>
-          <p:cNvSpPr txBox="1"/>
+          <p:cNvSpPr txBox="1">
+            <a:spLocks noGrp="1"/>
+          </p:cNvSpPr>
           <p:nvPr>
             <p:ph type="body" idx="1"/>
           </p:nvPr>
@@ -6575,13 +6747,16 @@
               </a:spcAft>
               <a:buNone/>
             </a:pPr>
+            <a:endParaRPr/>
           </a:p>
         </p:txBody>
       </p:sp>
       <p:sp>
         <p:nvSpPr>
           <p:cNvPr id="199" name="Google Shape;199;p7:notes"/>
-          <p:cNvSpPr/>
+          <p:cNvSpPr>
+            <a:spLocks noGrp="1" noRot="1" noChangeAspect="1"/>
+          </p:cNvSpPr>
           <p:nvPr>
             <p:ph type="sldImg" idx="2"/>
           </p:nvPr>
@@ -6626,11 +6801,11 @@
 </file>
 
 <file path=ppt/notesSlides/notesSlide8.xml><?xml version="1.0" encoding="utf-8"?>
-<p:notes xmlns:a="http://schemas.openxmlformats.org/drawingml/2006/main" xmlns:r="http://schemas.openxmlformats.org/officeDocument/2006/relationships" xmlns:p="http://schemas.openxmlformats.org/presentationml/2006/main" showMasterPhAnim="0" showMasterSp="0">
+<p:notes xmlns:a="http://schemas.openxmlformats.org/drawingml/2006/main" xmlns:r="http://schemas.openxmlformats.org/officeDocument/2006/relationships" xmlns:p="http://schemas.openxmlformats.org/presentationml/2006/main" showMasterSp="0" showMasterPhAnim="0">
   <p:cSld>
     <p:spTree>
       <p:nvGrpSpPr>
-        <p:cNvPr id="206" name="Shape 206"/>
+        <p:cNvPr id="1" name="Shape 206"/>
         <p:cNvGrpSpPr/>
         <p:nvPr/>
       </p:nvGrpSpPr>
@@ -6645,7 +6820,9 @@
       <p:sp>
         <p:nvSpPr>
           <p:cNvPr id="207" name="Google Shape;207;p8:notes"/>
-          <p:cNvSpPr/>
+          <p:cNvSpPr>
+            <a:spLocks noGrp="1" noRot="1" noChangeAspect="1"/>
+          </p:cNvSpPr>
           <p:nvPr>
             <p:ph type="sldImg" idx="2"/>
           </p:nvPr>
@@ -6694,7 +6871,9 @@
       <p:sp>
         <p:nvSpPr>
           <p:cNvPr id="208" name="Google Shape;208;p8:notes"/>
-          <p:cNvSpPr txBox="1"/>
+          <p:cNvSpPr txBox="1">
+            <a:spLocks noGrp="1"/>
+          </p:cNvSpPr>
           <p:nvPr>
             <p:ph type="body" idx="1"/>
           </p:nvPr>
@@ -6744,15 +6923,6 @@
               </a:rPr>
               <a:t>Working with tabs is a common pattern in apps that follow the Material Design guidelines. </a:t>
             </a:r>
-            <a:endParaRPr lang="en-US" sz="1200">
-              <a:solidFill>
-                <a:srgbClr val="212121"/>
-              </a:solidFill>
-              <a:latin typeface="Calibri" panose="020F0502020204030204"/>
-              <a:ea typeface="Calibri" panose="020F0502020204030204"/>
-              <a:cs typeface="Calibri" panose="020F0502020204030204"/>
-              <a:sym typeface="Calibri" panose="020F0502020204030204"/>
-            </a:endParaRPr>
           </a:p>
           <a:p>
             <a:pPr marL="0" lvl="0" indent="0" algn="l" rtl="0">
@@ -6810,12 +6980,6 @@
               </a:rPr>
               <a:t>​</a:t>
             </a:r>
-            <a:endParaRPr lang="en-US" sz="1200">
-              <a:latin typeface="Calibri" panose="020F0502020204030204"/>
-              <a:ea typeface="Calibri" panose="020F0502020204030204"/>
-              <a:cs typeface="Calibri" panose="020F0502020204030204"/>
-              <a:sym typeface="Calibri" panose="020F0502020204030204"/>
-            </a:endParaRPr>
           </a:p>
           <a:p>
             <a:pPr marL="228600" lvl="0" indent="-152400" algn="l" rtl="0">
@@ -6949,12 +7113,6 @@
               </a:rPr>
               <a:t>​</a:t>
             </a:r>
-            <a:endParaRPr lang="en-US" sz="1200">
-              <a:latin typeface="Calibri" panose="020F0502020204030204"/>
-              <a:ea typeface="Calibri" panose="020F0502020204030204"/>
-              <a:cs typeface="Calibri" panose="020F0502020204030204"/>
-              <a:sym typeface="Calibri" panose="020F0502020204030204"/>
-            </a:endParaRPr>
           </a:p>
           <a:p>
             <a:pPr marL="228600" lvl="0" indent="-152400" algn="l" rtl="0">
@@ -7017,12 +7175,6 @@
               </a:rPr>
               <a:t>​</a:t>
             </a:r>
-            <a:endParaRPr lang="en-US" sz="1200">
-              <a:latin typeface="Calibri" panose="020F0502020204030204"/>
-              <a:ea typeface="Calibri" panose="020F0502020204030204"/>
-              <a:cs typeface="Calibri" panose="020F0502020204030204"/>
-              <a:sym typeface="Calibri" panose="020F0502020204030204"/>
-            </a:endParaRPr>
           </a:p>
           <a:p>
             <a:pPr marL="228600" lvl="0" indent="-152400" algn="l" rtl="0">
@@ -7085,12 +7237,6 @@
               </a:rPr>
               <a:t>​</a:t>
             </a:r>
-            <a:endParaRPr lang="en-US" sz="1200">
-              <a:latin typeface="Calibri" panose="020F0502020204030204"/>
-              <a:ea typeface="Calibri" panose="020F0502020204030204"/>
-              <a:cs typeface="Calibri" panose="020F0502020204030204"/>
-              <a:sym typeface="Calibri" panose="020F0502020204030204"/>
-            </a:endParaRPr>
           </a:p>
           <a:p>
             <a:pPr marL="0" lvl="0" indent="0" algn="l" rtl="0">
@@ -7102,13 +7248,16 @@
               </a:spcAft>
               <a:buNone/>
             </a:pPr>
+            <a:endParaRPr/>
           </a:p>
         </p:txBody>
       </p:sp>
       <p:sp>
         <p:nvSpPr>
           <p:cNvPr id="209" name="Google Shape;209;p8:notes"/>
-          <p:cNvSpPr txBox="1"/>
+          <p:cNvSpPr txBox="1">
+            <a:spLocks noGrp="1"/>
+          </p:cNvSpPr>
           <p:nvPr>
             <p:ph type="sldNum" idx="12"/>
           </p:nvPr>
@@ -7143,6 +7292,16 @@
             </a:pPr>
             <a:fld id="{00000000-1234-1234-1234-123412341234}" type="slidenum">
               <a:rPr lang="en-US"/>
+              <a:pPr marL="0" lvl="0" indent="0" algn="r" rtl="0">
+                <a:spcBef>
+                  <a:spcPts val="0"/>
+                </a:spcBef>
+                <a:spcAft>
+                  <a:spcPts val="0"/>
+                </a:spcAft>
+                <a:buNone/>
+              </a:pPr>
+              <a:t>8</a:t>
             </a:fld>
             <a:endParaRPr lang="en-US"/>
           </a:p>
@@ -7157,11 +7316,11 @@
 </file>
 
 <file path=ppt/notesSlides/notesSlide9.xml><?xml version="1.0" encoding="utf-8"?>
-<p:notes xmlns:a="http://schemas.openxmlformats.org/drawingml/2006/main" xmlns:r="http://schemas.openxmlformats.org/officeDocument/2006/relationships" xmlns:p="http://schemas.openxmlformats.org/presentationml/2006/main" showMasterPhAnim="0" showMasterSp="0">
+<p:notes xmlns:a="http://schemas.openxmlformats.org/drawingml/2006/main" xmlns:r="http://schemas.openxmlformats.org/officeDocument/2006/relationships" xmlns:p="http://schemas.openxmlformats.org/presentationml/2006/main" showMasterSp="0" showMasterPhAnim="0">
   <p:cSld>
     <p:spTree>
       <p:nvGrpSpPr>
-        <p:cNvPr id="214" name="Shape 214"/>
+        <p:cNvPr id="1" name="Shape 214"/>
         <p:cNvGrpSpPr/>
         <p:nvPr/>
       </p:nvGrpSpPr>
@@ -7176,7 +7335,9 @@
       <p:sp>
         <p:nvSpPr>
           <p:cNvPr id="215" name="Google Shape;215;p9:notes"/>
-          <p:cNvSpPr txBox="1"/>
+          <p:cNvSpPr txBox="1">
+            <a:spLocks noGrp="1"/>
+          </p:cNvSpPr>
           <p:nvPr>
             <p:ph type="body" idx="1"/>
           </p:nvPr>
@@ -7205,13 +7366,16 @@
               </a:spcAft>
               <a:buNone/>
             </a:pPr>
+            <a:endParaRPr/>
           </a:p>
         </p:txBody>
       </p:sp>
       <p:sp>
         <p:nvSpPr>
           <p:cNvPr id="216" name="Google Shape;216;p9:notes"/>
-          <p:cNvSpPr/>
+          <p:cNvSpPr>
+            <a:spLocks noGrp="1" noRot="1" noChangeAspect="1"/>
+          </p:cNvSpPr>
           <p:nvPr>
             <p:ph type="sldImg" idx="2"/>
           </p:nvPr>
@@ -7256,11 +7420,11 @@
 </file>
 
 <file path=ppt/slideLayouts/slideLayout1.xml><?xml version="1.0" encoding="utf-8"?>
-<p:sldLayout xmlns:a="http://schemas.openxmlformats.org/drawingml/2006/main" xmlns:r="http://schemas.openxmlformats.org/officeDocument/2006/relationships" xmlns:p="http://schemas.openxmlformats.org/presentationml/2006/main" type="title" showMasterSp="0" matchingName="Title Slide">
+<p:sldLayout xmlns:a="http://schemas.openxmlformats.org/drawingml/2006/main" xmlns:r="http://schemas.openxmlformats.org/officeDocument/2006/relationships" xmlns:p="http://schemas.openxmlformats.org/presentationml/2006/main" showMasterSp="0" matchingName="Title Slide" type="title">
   <p:cSld name="TITLE">
     <p:spTree>
       <p:nvGrpSpPr>
-        <p:cNvPr id="26" name="Shape 26"/>
+        <p:cNvPr id="1" name="Shape 26"/>
         <p:cNvGrpSpPr/>
         <p:nvPr/>
       </p:nvGrpSpPr>
@@ -7526,6 +7690,7 @@
                 </a:spcAft>
                 <a:buNone/>
               </a:pPr>
+              <a:endParaRPr/>
             </a:p>
           </p:txBody>
         </p:sp>
@@ -7713,6 +7878,7 @@
                 </a:spcAft>
                 <a:buNone/>
               </a:pPr>
+              <a:endParaRPr/>
             </a:p>
           </p:txBody>
         </p:sp>
@@ -7720,7 +7886,9 @@
       <p:sp>
         <p:nvSpPr>
           <p:cNvPr id="38" name="Google Shape;38;p24"/>
-          <p:cNvSpPr txBox="1"/>
+          <p:cNvSpPr txBox="1">
+            <a:spLocks noGrp="1"/>
+          </p:cNvSpPr>
           <p:nvPr>
             <p:ph type="ctrTitle"/>
           </p:nvPr>
@@ -7851,13 +8019,17 @@
               <a:defRPr/>
             </a:lvl9pPr>
           </a:lstStyle>
-          <a:p/>
+          <a:p>
+            <a:endParaRPr/>
+          </a:p>
         </p:txBody>
       </p:sp>
       <p:sp>
         <p:nvSpPr>
           <p:cNvPr id="39" name="Google Shape;39;p24"/>
-          <p:cNvSpPr txBox="1"/>
+          <p:cNvSpPr txBox="1">
+            <a:spLocks noGrp="1"/>
+          </p:cNvSpPr>
           <p:nvPr>
             <p:ph type="subTitle" idx="1"/>
           </p:nvPr>
@@ -8016,13 +8188,17 @@
               </a:defRPr>
             </a:lvl9pPr>
           </a:lstStyle>
-          <a:p/>
+          <a:p>
+            <a:endParaRPr/>
+          </a:p>
         </p:txBody>
       </p:sp>
       <p:sp>
         <p:nvSpPr>
           <p:cNvPr id="40" name="Google Shape;40;p24"/>
-          <p:cNvSpPr txBox="1"/>
+          <p:cNvSpPr txBox="1">
+            <a:spLocks noGrp="1"/>
+          </p:cNvSpPr>
           <p:nvPr>
             <p:ph type="dt" idx="10"/>
           </p:nvPr>
@@ -8145,13 +8321,17 @@
               <a:defRPr/>
             </a:lvl9pPr>
           </a:lstStyle>
-          <a:p/>
+          <a:p>
+            <a:endParaRPr/>
+          </a:p>
         </p:txBody>
       </p:sp>
       <p:sp>
         <p:nvSpPr>
           <p:cNvPr id="41" name="Google Shape;41;p24"/>
-          <p:cNvSpPr txBox="1"/>
+          <p:cNvSpPr txBox="1">
+            <a:spLocks noGrp="1"/>
+          </p:cNvSpPr>
           <p:nvPr>
             <p:ph type="ftr" idx="11"/>
           </p:nvPr>
@@ -8274,13 +8454,17 @@
               <a:defRPr/>
             </a:lvl9pPr>
           </a:lstStyle>
-          <a:p/>
+          <a:p>
+            <a:endParaRPr/>
+          </a:p>
         </p:txBody>
       </p:sp>
       <p:sp>
         <p:nvSpPr>
           <p:cNvPr id="42" name="Google Shape;42;p24"/>
-          <p:cNvSpPr txBox="1"/>
+          <p:cNvSpPr txBox="1">
+            <a:spLocks noGrp="1"/>
+          </p:cNvSpPr>
           <p:nvPr>
             <p:ph type="sldNum" idx="12"/>
           </p:nvPr>
@@ -8379,6 +8563,16 @@
             </a:pPr>
             <a:fld id="{00000000-1234-1234-1234-123412341234}" type="slidenum">
               <a:rPr lang="en-US"/>
+              <a:pPr marL="0" lvl="0" indent="0" algn="r" rtl="0">
+                <a:spcBef>
+                  <a:spcPts val="0"/>
+                </a:spcBef>
+                <a:spcAft>
+                  <a:spcPts val="0"/>
+                </a:spcAft>
+                <a:buNone/>
+              </a:pPr>
+              <a:t>‹#›</a:t>
             </a:fld>
             <a:endParaRPr lang="en-US"/>
           </a:p>
@@ -8397,7 +8591,7 @@
   <p:cSld name="Title and Caption">
     <p:spTree>
       <p:nvGrpSpPr>
-        <p:cNvPr id="94" name="Shape 94"/>
+        <p:cNvPr id="1" name="Shape 94"/>
         <p:cNvGrpSpPr/>
         <p:nvPr/>
       </p:nvGrpSpPr>
@@ -8412,7 +8606,9 @@
       <p:sp>
         <p:nvSpPr>
           <p:cNvPr id="95" name="Google Shape;95;p33"/>
-          <p:cNvSpPr txBox="1"/>
+          <p:cNvSpPr txBox="1">
+            <a:spLocks noGrp="1"/>
+          </p:cNvSpPr>
           <p:nvPr>
             <p:ph type="title"/>
           </p:nvPr>
@@ -8539,13 +8735,17 @@
               <a:defRPr/>
             </a:lvl9pPr>
           </a:lstStyle>
-          <a:p/>
+          <a:p>
+            <a:endParaRPr/>
+          </a:p>
         </p:txBody>
       </p:sp>
       <p:sp>
         <p:nvSpPr>
           <p:cNvPr id="96" name="Google Shape;96;p33"/>
-          <p:cNvSpPr txBox="1"/>
+          <p:cNvSpPr txBox="1">
+            <a:spLocks noGrp="1"/>
+          </p:cNvSpPr>
           <p:nvPr>
             <p:ph type="body" idx="1"/>
           </p:nvPr>
@@ -8704,13 +8904,17 @@
               </a:defRPr>
             </a:lvl9pPr>
           </a:lstStyle>
-          <a:p/>
+          <a:p>
+            <a:endParaRPr/>
+          </a:p>
         </p:txBody>
       </p:sp>
       <p:sp>
         <p:nvSpPr>
           <p:cNvPr id="97" name="Google Shape;97;p33"/>
-          <p:cNvSpPr txBox="1"/>
+          <p:cNvSpPr txBox="1">
+            <a:spLocks noGrp="1"/>
+          </p:cNvSpPr>
           <p:nvPr>
             <p:ph type="dt" idx="10"/>
           </p:nvPr>
@@ -8833,13 +9037,17 @@
               <a:defRPr/>
             </a:lvl9pPr>
           </a:lstStyle>
-          <a:p/>
+          <a:p>
+            <a:endParaRPr/>
+          </a:p>
         </p:txBody>
       </p:sp>
       <p:sp>
         <p:nvSpPr>
           <p:cNvPr id="98" name="Google Shape;98;p33"/>
-          <p:cNvSpPr txBox="1"/>
+          <p:cNvSpPr txBox="1">
+            <a:spLocks noGrp="1"/>
+          </p:cNvSpPr>
           <p:nvPr>
             <p:ph type="ftr" idx="11"/>
           </p:nvPr>
@@ -8962,13 +9170,17 @@
               <a:defRPr/>
             </a:lvl9pPr>
           </a:lstStyle>
-          <a:p/>
+          <a:p>
+            <a:endParaRPr/>
+          </a:p>
         </p:txBody>
       </p:sp>
       <p:sp>
         <p:nvSpPr>
           <p:cNvPr id="99" name="Google Shape;99;p33"/>
-          <p:cNvSpPr txBox="1"/>
+          <p:cNvSpPr txBox="1">
+            <a:spLocks noGrp="1"/>
+          </p:cNvSpPr>
           <p:nvPr>
             <p:ph type="sldNum" idx="12"/>
           </p:nvPr>
@@ -9067,6 +9279,16 @@
             </a:pPr>
             <a:fld id="{00000000-1234-1234-1234-123412341234}" type="slidenum">
               <a:rPr lang="en-US"/>
+              <a:pPr marL="0" lvl="0" indent="0" algn="r" rtl="0">
+                <a:spcBef>
+                  <a:spcPts val="0"/>
+                </a:spcBef>
+                <a:spcAft>
+                  <a:spcPts val="0"/>
+                </a:spcAft>
+                <a:buNone/>
+              </a:pPr>
+              <a:t>‹#›</a:t>
             </a:fld>
             <a:endParaRPr lang="en-US"/>
           </a:p>
@@ -9085,7 +9307,7 @@
   <p:cSld name="Quote with Caption">
     <p:spTree>
       <p:nvGrpSpPr>
-        <p:cNvPr id="100" name="Shape 100"/>
+        <p:cNvPr id="1" name="Shape 100"/>
         <p:cNvGrpSpPr/>
         <p:nvPr/>
       </p:nvGrpSpPr>
@@ -9100,7 +9322,9 @@
       <p:sp>
         <p:nvSpPr>
           <p:cNvPr id="101" name="Google Shape;101;p34"/>
-          <p:cNvSpPr txBox="1"/>
+          <p:cNvSpPr txBox="1">
+            <a:spLocks noGrp="1"/>
+          </p:cNvSpPr>
           <p:nvPr>
             <p:ph type="title"/>
           </p:nvPr>
@@ -9227,13 +9451,17 @@
               <a:defRPr/>
             </a:lvl9pPr>
           </a:lstStyle>
-          <a:p/>
+          <a:p>
+            <a:endParaRPr/>
+          </a:p>
         </p:txBody>
       </p:sp>
       <p:sp>
         <p:nvSpPr>
           <p:cNvPr id="102" name="Google Shape;102;p34"/>
-          <p:cNvSpPr txBox="1"/>
+          <p:cNvSpPr txBox="1">
+            <a:spLocks noGrp="1"/>
+          </p:cNvSpPr>
           <p:nvPr>
             <p:ph type="body" idx="1"/>
           </p:nvPr>
@@ -9365,13 +9593,17 @@
               <a:defRPr/>
             </a:lvl9pPr>
           </a:lstStyle>
-          <a:p/>
+          <a:p>
+            <a:endParaRPr/>
+          </a:p>
         </p:txBody>
       </p:sp>
       <p:sp>
         <p:nvSpPr>
           <p:cNvPr id="103" name="Google Shape;103;p34"/>
-          <p:cNvSpPr txBox="1"/>
+          <p:cNvSpPr txBox="1">
+            <a:spLocks noGrp="1"/>
+          </p:cNvSpPr>
           <p:nvPr>
             <p:ph type="body" idx="2"/>
           </p:nvPr>
@@ -9530,13 +9762,17 @@
               </a:defRPr>
             </a:lvl9pPr>
           </a:lstStyle>
-          <a:p/>
+          <a:p>
+            <a:endParaRPr/>
+          </a:p>
         </p:txBody>
       </p:sp>
       <p:sp>
         <p:nvSpPr>
           <p:cNvPr id="104" name="Google Shape;104;p34"/>
-          <p:cNvSpPr txBox="1"/>
+          <p:cNvSpPr txBox="1">
+            <a:spLocks noGrp="1"/>
+          </p:cNvSpPr>
           <p:nvPr>
             <p:ph type="dt" idx="10"/>
           </p:nvPr>
@@ -9659,13 +9895,17 @@
               <a:defRPr/>
             </a:lvl9pPr>
           </a:lstStyle>
-          <a:p/>
+          <a:p>
+            <a:endParaRPr/>
+          </a:p>
         </p:txBody>
       </p:sp>
       <p:sp>
         <p:nvSpPr>
           <p:cNvPr id="105" name="Google Shape;105;p34"/>
-          <p:cNvSpPr txBox="1"/>
+          <p:cNvSpPr txBox="1">
+            <a:spLocks noGrp="1"/>
+          </p:cNvSpPr>
           <p:nvPr>
             <p:ph type="ftr" idx="11"/>
           </p:nvPr>
@@ -9788,13 +10028,17 @@
               <a:defRPr/>
             </a:lvl9pPr>
           </a:lstStyle>
-          <a:p/>
+          <a:p>
+            <a:endParaRPr/>
+          </a:p>
         </p:txBody>
       </p:sp>
       <p:sp>
         <p:nvSpPr>
           <p:cNvPr id="106" name="Google Shape;106;p34"/>
-          <p:cNvSpPr txBox="1"/>
+          <p:cNvSpPr txBox="1">
+            <a:spLocks noGrp="1"/>
+          </p:cNvSpPr>
           <p:nvPr>
             <p:ph type="sldNum" idx="12"/>
           </p:nvPr>
@@ -9893,6 +10137,16 @@
             </a:pPr>
             <a:fld id="{00000000-1234-1234-1234-123412341234}" type="slidenum">
               <a:rPr lang="en-US"/>
+              <a:pPr marL="0" lvl="0" indent="0" algn="r" rtl="0">
+                <a:spcBef>
+                  <a:spcPts val="0"/>
+                </a:spcBef>
+                <a:spcAft>
+                  <a:spcPts val="0"/>
+                </a:spcAft>
+                <a:buNone/>
+              </a:pPr>
+              <a:t>‹#›</a:t>
             </a:fld>
             <a:endParaRPr lang="en-US"/>
           </a:p>
@@ -9944,15 +10198,6 @@
               </a:rPr>
               <a:t>“</a:t>
             </a:r>
-            <a:endParaRPr lang="en-US" sz="8000">
-              <a:solidFill>
-                <a:srgbClr val="9EDFF5"/>
-              </a:solidFill>
-              <a:latin typeface="Arial" panose="020B0604020202020204"/>
-              <a:ea typeface="Arial" panose="020B0604020202020204"/>
-              <a:cs typeface="Arial" panose="020B0604020202020204"/>
-              <a:sym typeface="Arial" panose="020B0604020202020204"/>
-            </a:endParaRPr>
           </a:p>
         </p:txBody>
       </p:sp>
@@ -10002,15 +10247,6 @@
               </a:rPr>
               <a:t>”</a:t>
             </a:r>
-            <a:endParaRPr lang="en-US" sz="8000">
-              <a:solidFill>
-                <a:srgbClr val="9EDFF5"/>
-              </a:solidFill>
-              <a:latin typeface="Arial" panose="020B0604020202020204"/>
-              <a:ea typeface="Arial" panose="020B0604020202020204"/>
-              <a:cs typeface="Arial" panose="020B0604020202020204"/>
-              <a:sym typeface="Arial" panose="020B0604020202020204"/>
-            </a:endParaRPr>
           </a:p>
         </p:txBody>
       </p:sp>
@@ -10027,7 +10263,7 @@
   <p:cSld name="Name Card">
     <p:spTree>
       <p:nvGrpSpPr>
-        <p:cNvPr id="109" name="Shape 109"/>
+        <p:cNvPr id="1" name="Shape 109"/>
         <p:cNvGrpSpPr/>
         <p:nvPr/>
       </p:nvGrpSpPr>
@@ -10042,7 +10278,9 @@
       <p:sp>
         <p:nvSpPr>
           <p:cNvPr id="110" name="Google Shape;110;p35"/>
-          <p:cNvSpPr txBox="1"/>
+          <p:cNvSpPr txBox="1">
+            <a:spLocks noGrp="1"/>
+          </p:cNvSpPr>
           <p:nvPr>
             <p:ph type="title"/>
           </p:nvPr>
@@ -10169,13 +10407,17 @@
               <a:defRPr/>
             </a:lvl9pPr>
           </a:lstStyle>
-          <a:p/>
+          <a:p>
+            <a:endParaRPr/>
+          </a:p>
         </p:txBody>
       </p:sp>
       <p:sp>
         <p:nvSpPr>
           <p:cNvPr id="111" name="Google Shape;111;p35"/>
-          <p:cNvSpPr txBox="1"/>
+          <p:cNvSpPr txBox="1">
+            <a:spLocks noGrp="1"/>
+          </p:cNvSpPr>
           <p:nvPr>
             <p:ph type="body" idx="1"/>
           </p:nvPr>
@@ -10334,13 +10576,17 @@
               </a:defRPr>
             </a:lvl9pPr>
           </a:lstStyle>
-          <a:p/>
+          <a:p>
+            <a:endParaRPr/>
+          </a:p>
         </p:txBody>
       </p:sp>
       <p:sp>
         <p:nvSpPr>
           <p:cNvPr id="112" name="Google Shape;112;p35"/>
-          <p:cNvSpPr txBox="1"/>
+          <p:cNvSpPr txBox="1">
+            <a:spLocks noGrp="1"/>
+          </p:cNvSpPr>
           <p:nvPr>
             <p:ph type="dt" idx="10"/>
           </p:nvPr>
@@ -10463,13 +10709,17 @@
               <a:defRPr/>
             </a:lvl9pPr>
           </a:lstStyle>
-          <a:p/>
+          <a:p>
+            <a:endParaRPr/>
+          </a:p>
         </p:txBody>
       </p:sp>
       <p:sp>
         <p:nvSpPr>
           <p:cNvPr id="113" name="Google Shape;113;p35"/>
-          <p:cNvSpPr txBox="1"/>
+          <p:cNvSpPr txBox="1">
+            <a:spLocks noGrp="1"/>
+          </p:cNvSpPr>
           <p:nvPr>
             <p:ph type="ftr" idx="11"/>
           </p:nvPr>
@@ -10592,13 +10842,17 @@
               <a:defRPr/>
             </a:lvl9pPr>
           </a:lstStyle>
-          <a:p/>
+          <a:p>
+            <a:endParaRPr/>
+          </a:p>
         </p:txBody>
       </p:sp>
       <p:sp>
         <p:nvSpPr>
           <p:cNvPr id="114" name="Google Shape;114;p35"/>
-          <p:cNvSpPr txBox="1"/>
+          <p:cNvSpPr txBox="1">
+            <a:spLocks noGrp="1"/>
+          </p:cNvSpPr>
           <p:nvPr>
             <p:ph type="sldNum" idx="12"/>
           </p:nvPr>
@@ -10697,6 +10951,16 @@
             </a:pPr>
             <a:fld id="{00000000-1234-1234-1234-123412341234}" type="slidenum">
               <a:rPr lang="en-US"/>
+              <a:pPr marL="0" lvl="0" indent="0" algn="r" rtl="0">
+                <a:spcBef>
+                  <a:spcPts val="0"/>
+                </a:spcBef>
+                <a:spcAft>
+                  <a:spcPts val="0"/>
+                </a:spcAft>
+                <a:buNone/>
+              </a:pPr>
+              <a:t>‹#›</a:t>
             </a:fld>
             <a:endParaRPr lang="en-US"/>
           </a:p>
@@ -10715,7 +10979,7 @@
   <p:cSld name="Quote Name Card">
     <p:spTree>
       <p:nvGrpSpPr>
-        <p:cNvPr id="115" name="Shape 115"/>
+        <p:cNvPr id="1" name="Shape 115"/>
         <p:cNvGrpSpPr/>
         <p:nvPr/>
       </p:nvGrpSpPr>
@@ -10730,7 +10994,9 @@
       <p:sp>
         <p:nvSpPr>
           <p:cNvPr id="116" name="Google Shape;116;p36"/>
-          <p:cNvSpPr txBox="1"/>
+          <p:cNvSpPr txBox="1">
+            <a:spLocks noGrp="1"/>
+          </p:cNvSpPr>
           <p:nvPr>
             <p:ph type="title"/>
           </p:nvPr>
@@ -10857,13 +11123,17 @@
               <a:defRPr/>
             </a:lvl9pPr>
           </a:lstStyle>
-          <a:p/>
+          <a:p>
+            <a:endParaRPr/>
+          </a:p>
         </p:txBody>
       </p:sp>
       <p:sp>
         <p:nvSpPr>
           <p:cNvPr id="117" name="Google Shape;117;p36"/>
-          <p:cNvSpPr txBox="1"/>
+          <p:cNvSpPr txBox="1">
+            <a:spLocks noGrp="1"/>
+          </p:cNvSpPr>
           <p:nvPr>
             <p:ph type="body" idx="1"/>
           </p:nvPr>
@@ -10995,13 +11265,17 @@
               <a:defRPr/>
             </a:lvl9pPr>
           </a:lstStyle>
-          <a:p/>
+          <a:p>
+            <a:endParaRPr/>
+          </a:p>
         </p:txBody>
       </p:sp>
       <p:sp>
         <p:nvSpPr>
           <p:cNvPr id="118" name="Google Shape;118;p36"/>
-          <p:cNvSpPr txBox="1"/>
+          <p:cNvSpPr txBox="1">
+            <a:spLocks noGrp="1"/>
+          </p:cNvSpPr>
           <p:nvPr>
             <p:ph type="body" idx="2"/>
           </p:nvPr>
@@ -11160,13 +11434,17 @@
               </a:defRPr>
             </a:lvl9pPr>
           </a:lstStyle>
-          <a:p/>
+          <a:p>
+            <a:endParaRPr/>
+          </a:p>
         </p:txBody>
       </p:sp>
       <p:sp>
         <p:nvSpPr>
           <p:cNvPr id="119" name="Google Shape;119;p36"/>
-          <p:cNvSpPr txBox="1"/>
+          <p:cNvSpPr txBox="1">
+            <a:spLocks noGrp="1"/>
+          </p:cNvSpPr>
           <p:nvPr>
             <p:ph type="dt" idx="10"/>
           </p:nvPr>
@@ -11289,13 +11567,17 @@
               <a:defRPr/>
             </a:lvl9pPr>
           </a:lstStyle>
-          <a:p/>
+          <a:p>
+            <a:endParaRPr/>
+          </a:p>
         </p:txBody>
       </p:sp>
       <p:sp>
         <p:nvSpPr>
           <p:cNvPr id="120" name="Google Shape;120;p36"/>
-          <p:cNvSpPr txBox="1"/>
+          <p:cNvSpPr txBox="1">
+            <a:spLocks noGrp="1"/>
+          </p:cNvSpPr>
           <p:nvPr>
             <p:ph type="ftr" idx="11"/>
           </p:nvPr>
@@ -11418,13 +11700,17 @@
               <a:defRPr/>
             </a:lvl9pPr>
           </a:lstStyle>
-          <a:p/>
+          <a:p>
+            <a:endParaRPr/>
+          </a:p>
         </p:txBody>
       </p:sp>
       <p:sp>
         <p:nvSpPr>
           <p:cNvPr id="121" name="Google Shape;121;p36"/>
-          <p:cNvSpPr txBox="1"/>
+          <p:cNvSpPr txBox="1">
+            <a:spLocks noGrp="1"/>
+          </p:cNvSpPr>
           <p:nvPr>
             <p:ph type="sldNum" idx="12"/>
           </p:nvPr>
@@ -11523,6 +11809,16 @@
             </a:pPr>
             <a:fld id="{00000000-1234-1234-1234-123412341234}" type="slidenum">
               <a:rPr lang="en-US"/>
+              <a:pPr marL="0" lvl="0" indent="0" algn="r" rtl="0">
+                <a:spcBef>
+                  <a:spcPts val="0"/>
+                </a:spcBef>
+                <a:spcAft>
+                  <a:spcPts val="0"/>
+                </a:spcAft>
+                <a:buNone/>
+              </a:pPr>
+              <a:t>‹#›</a:t>
             </a:fld>
             <a:endParaRPr lang="en-US"/>
           </a:p>
@@ -11574,15 +11870,6 @@
               </a:rPr>
               <a:t>“</a:t>
             </a:r>
-            <a:endParaRPr lang="en-US" sz="8000">
-              <a:solidFill>
-                <a:srgbClr val="9EDFF5"/>
-              </a:solidFill>
-              <a:latin typeface="Arial" panose="020B0604020202020204"/>
-              <a:ea typeface="Arial" panose="020B0604020202020204"/>
-              <a:cs typeface="Arial" panose="020B0604020202020204"/>
-              <a:sym typeface="Arial" panose="020B0604020202020204"/>
-            </a:endParaRPr>
           </a:p>
         </p:txBody>
       </p:sp>
@@ -11632,15 +11919,6 @@
               </a:rPr>
               <a:t>”</a:t>
             </a:r>
-            <a:endParaRPr lang="en-US" sz="8000">
-              <a:solidFill>
-                <a:srgbClr val="9EDFF5"/>
-              </a:solidFill>
-              <a:latin typeface="Arial" panose="020B0604020202020204"/>
-              <a:ea typeface="Arial" panose="020B0604020202020204"/>
-              <a:cs typeface="Arial" panose="020B0604020202020204"/>
-              <a:sym typeface="Arial" panose="020B0604020202020204"/>
-            </a:endParaRPr>
           </a:p>
         </p:txBody>
       </p:sp>
@@ -11657,7 +11935,7 @@
   <p:cSld name="True or False">
     <p:spTree>
       <p:nvGrpSpPr>
-        <p:cNvPr id="124" name="Shape 124"/>
+        <p:cNvPr id="1" name="Shape 124"/>
         <p:cNvGrpSpPr/>
         <p:nvPr/>
       </p:nvGrpSpPr>
@@ -11672,7 +11950,9 @@
       <p:sp>
         <p:nvSpPr>
           <p:cNvPr id="125" name="Google Shape;125;p37"/>
-          <p:cNvSpPr txBox="1"/>
+          <p:cNvSpPr txBox="1">
+            <a:spLocks noGrp="1"/>
+          </p:cNvSpPr>
           <p:nvPr>
             <p:ph type="title"/>
           </p:nvPr>
@@ -11799,13 +12079,17 @@
               <a:defRPr/>
             </a:lvl9pPr>
           </a:lstStyle>
-          <a:p/>
+          <a:p>
+            <a:endParaRPr/>
+          </a:p>
         </p:txBody>
       </p:sp>
       <p:sp>
         <p:nvSpPr>
           <p:cNvPr id="126" name="Google Shape;126;p37"/>
-          <p:cNvSpPr txBox="1"/>
+          <p:cNvSpPr txBox="1">
+            <a:spLocks noGrp="1"/>
+          </p:cNvSpPr>
           <p:nvPr>
             <p:ph type="body" idx="1"/>
           </p:nvPr>
@@ -11937,13 +12221,17 @@
               <a:defRPr/>
             </a:lvl9pPr>
           </a:lstStyle>
-          <a:p/>
+          <a:p>
+            <a:endParaRPr/>
+          </a:p>
         </p:txBody>
       </p:sp>
       <p:sp>
         <p:nvSpPr>
           <p:cNvPr id="127" name="Google Shape;127;p37"/>
-          <p:cNvSpPr txBox="1"/>
+          <p:cNvSpPr txBox="1">
+            <a:spLocks noGrp="1"/>
+          </p:cNvSpPr>
           <p:nvPr>
             <p:ph type="body" idx="2"/>
           </p:nvPr>
@@ -12102,13 +12390,17 @@
               </a:defRPr>
             </a:lvl9pPr>
           </a:lstStyle>
-          <a:p/>
+          <a:p>
+            <a:endParaRPr/>
+          </a:p>
         </p:txBody>
       </p:sp>
       <p:sp>
         <p:nvSpPr>
           <p:cNvPr id="128" name="Google Shape;128;p37"/>
-          <p:cNvSpPr txBox="1"/>
+          <p:cNvSpPr txBox="1">
+            <a:spLocks noGrp="1"/>
+          </p:cNvSpPr>
           <p:nvPr>
             <p:ph type="dt" idx="10"/>
           </p:nvPr>
@@ -12231,13 +12523,17 @@
               <a:defRPr/>
             </a:lvl9pPr>
           </a:lstStyle>
-          <a:p/>
+          <a:p>
+            <a:endParaRPr/>
+          </a:p>
         </p:txBody>
       </p:sp>
       <p:sp>
         <p:nvSpPr>
           <p:cNvPr id="129" name="Google Shape;129;p37"/>
-          <p:cNvSpPr txBox="1"/>
+          <p:cNvSpPr txBox="1">
+            <a:spLocks noGrp="1"/>
+          </p:cNvSpPr>
           <p:nvPr>
             <p:ph type="ftr" idx="11"/>
           </p:nvPr>
@@ -12360,13 +12656,17 @@
               <a:defRPr/>
             </a:lvl9pPr>
           </a:lstStyle>
-          <a:p/>
+          <a:p>
+            <a:endParaRPr/>
+          </a:p>
         </p:txBody>
       </p:sp>
       <p:sp>
         <p:nvSpPr>
           <p:cNvPr id="130" name="Google Shape;130;p37"/>
-          <p:cNvSpPr txBox="1"/>
+          <p:cNvSpPr txBox="1">
+            <a:spLocks noGrp="1"/>
+          </p:cNvSpPr>
           <p:nvPr>
             <p:ph type="sldNum" idx="12"/>
           </p:nvPr>
@@ -12465,6 +12765,16 @@
             </a:pPr>
             <a:fld id="{00000000-1234-1234-1234-123412341234}" type="slidenum">
               <a:rPr lang="en-US"/>
+              <a:pPr marL="0" lvl="0" indent="0" algn="r" rtl="0">
+                <a:spcBef>
+                  <a:spcPts val="0"/>
+                </a:spcBef>
+                <a:spcAft>
+                  <a:spcPts val="0"/>
+                </a:spcAft>
+                <a:buNone/>
+              </a:pPr>
+              <a:t>‹#›</a:t>
             </a:fld>
             <a:endParaRPr lang="en-US"/>
           </a:p>
@@ -12479,11 +12789,11 @@
 </file>
 
 <file path=ppt/slideLayouts/slideLayout15.xml><?xml version="1.0" encoding="utf-8"?>
-<p:sldLayout xmlns:a="http://schemas.openxmlformats.org/drawingml/2006/main" xmlns:r="http://schemas.openxmlformats.org/officeDocument/2006/relationships" xmlns:p="http://schemas.openxmlformats.org/presentationml/2006/main" type="vertTx" matchingName="Title and Vertical Text">
+<p:sldLayout xmlns:a="http://schemas.openxmlformats.org/drawingml/2006/main" xmlns:r="http://schemas.openxmlformats.org/officeDocument/2006/relationships" xmlns:p="http://schemas.openxmlformats.org/presentationml/2006/main" matchingName="Title and Vertical Text" type="vertTx">
   <p:cSld name="VERTICAL_TEXT">
     <p:spTree>
       <p:nvGrpSpPr>
-        <p:cNvPr id="131" name="Shape 131"/>
+        <p:cNvPr id="1" name="Shape 131"/>
         <p:cNvGrpSpPr/>
         <p:nvPr/>
       </p:nvGrpSpPr>
@@ -12498,7 +12808,9 @@
       <p:sp>
         <p:nvSpPr>
           <p:cNvPr id="132" name="Google Shape;132;p38"/>
-          <p:cNvSpPr txBox="1"/>
+          <p:cNvSpPr txBox="1">
+            <a:spLocks noGrp="1"/>
+          </p:cNvSpPr>
           <p:nvPr>
             <p:ph type="title"/>
           </p:nvPr>
@@ -12624,13 +12936,17 @@
               <a:defRPr/>
             </a:lvl9pPr>
           </a:lstStyle>
-          <a:p/>
+          <a:p>
+            <a:endParaRPr/>
+          </a:p>
         </p:txBody>
       </p:sp>
       <p:sp>
         <p:nvSpPr>
           <p:cNvPr id="133" name="Google Shape;133;p38"/>
-          <p:cNvSpPr txBox="1"/>
+          <p:cNvSpPr txBox="1">
+            <a:spLocks noGrp="1"/>
+          </p:cNvSpPr>
           <p:nvPr>
             <p:ph type="body" idx="1"/>
           </p:nvPr>
@@ -12753,13 +13069,17 @@
               <a:defRPr/>
             </a:lvl9pPr>
           </a:lstStyle>
-          <a:p/>
+          <a:p>
+            <a:endParaRPr/>
+          </a:p>
         </p:txBody>
       </p:sp>
       <p:sp>
         <p:nvSpPr>
           <p:cNvPr id="134" name="Google Shape;134;p38"/>
-          <p:cNvSpPr txBox="1"/>
+          <p:cNvSpPr txBox="1">
+            <a:spLocks noGrp="1"/>
+          </p:cNvSpPr>
           <p:nvPr>
             <p:ph type="dt" idx="10"/>
           </p:nvPr>
@@ -12882,13 +13202,17 @@
               <a:defRPr/>
             </a:lvl9pPr>
           </a:lstStyle>
-          <a:p/>
+          <a:p>
+            <a:endParaRPr/>
+          </a:p>
         </p:txBody>
       </p:sp>
       <p:sp>
         <p:nvSpPr>
           <p:cNvPr id="135" name="Google Shape;135;p38"/>
-          <p:cNvSpPr txBox="1"/>
+          <p:cNvSpPr txBox="1">
+            <a:spLocks noGrp="1"/>
+          </p:cNvSpPr>
           <p:nvPr>
             <p:ph type="ftr" idx="11"/>
           </p:nvPr>
@@ -13011,13 +13335,17 @@
               <a:defRPr/>
             </a:lvl9pPr>
           </a:lstStyle>
-          <a:p/>
+          <a:p>
+            <a:endParaRPr/>
+          </a:p>
         </p:txBody>
       </p:sp>
       <p:sp>
         <p:nvSpPr>
           <p:cNvPr id="136" name="Google Shape;136;p38"/>
-          <p:cNvSpPr txBox="1"/>
+          <p:cNvSpPr txBox="1">
+            <a:spLocks noGrp="1"/>
+          </p:cNvSpPr>
           <p:nvPr>
             <p:ph type="sldNum" idx="12"/>
           </p:nvPr>
@@ -13116,6 +13444,16 @@
             </a:pPr>
             <a:fld id="{00000000-1234-1234-1234-123412341234}" type="slidenum">
               <a:rPr lang="en-US"/>
+              <a:pPr marL="0" lvl="0" indent="0" algn="r" rtl="0">
+                <a:spcBef>
+                  <a:spcPts val="0"/>
+                </a:spcBef>
+                <a:spcAft>
+                  <a:spcPts val="0"/>
+                </a:spcAft>
+                <a:buNone/>
+              </a:pPr>
+              <a:t>‹#›</a:t>
             </a:fld>
             <a:endParaRPr lang="en-US"/>
           </a:p>
@@ -13130,11 +13468,11 @@
 </file>
 
 <file path=ppt/slideLayouts/slideLayout16.xml><?xml version="1.0" encoding="utf-8"?>
-<p:sldLayout xmlns:a="http://schemas.openxmlformats.org/drawingml/2006/main" xmlns:r="http://schemas.openxmlformats.org/officeDocument/2006/relationships" xmlns:p="http://schemas.openxmlformats.org/presentationml/2006/main" type="vertTitleAndTx" matchingName="Vertical Title and Text">
+<p:sldLayout xmlns:a="http://schemas.openxmlformats.org/drawingml/2006/main" xmlns:r="http://schemas.openxmlformats.org/officeDocument/2006/relationships" xmlns:p="http://schemas.openxmlformats.org/presentationml/2006/main" matchingName="Vertical Title and Text" type="vertTitleAndTx">
   <p:cSld name="VERTICAL_TITLE_AND_VERTICAL_TEXT">
     <p:spTree>
       <p:nvGrpSpPr>
-        <p:cNvPr id="137" name="Shape 137"/>
+        <p:cNvPr id="1" name="Shape 137"/>
         <p:cNvGrpSpPr/>
         <p:nvPr/>
       </p:nvGrpSpPr>
@@ -13149,7 +13487,9 @@
       <p:sp>
         <p:nvSpPr>
           <p:cNvPr id="138" name="Google Shape;138;p39"/>
-          <p:cNvSpPr txBox="1"/>
+          <p:cNvSpPr txBox="1">
+            <a:spLocks noGrp="1"/>
+          </p:cNvSpPr>
           <p:nvPr>
             <p:ph type="title"/>
           </p:nvPr>
@@ -13275,13 +13615,17 @@
               <a:defRPr/>
             </a:lvl9pPr>
           </a:lstStyle>
-          <a:p/>
+          <a:p>
+            <a:endParaRPr/>
+          </a:p>
         </p:txBody>
       </p:sp>
       <p:sp>
         <p:nvSpPr>
           <p:cNvPr id="139" name="Google Shape;139;p39"/>
-          <p:cNvSpPr txBox="1"/>
+          <p:cNvSpPr txBox="1">
+            <a:spLocks noGrp="1"/>
+          </p:cNvSpPr>
           <p:nvPr>
             <p:ph type="body" idx="1"/>
           </p:nvPr>
@@ -13404,13 +13748,17 @@
               <a:defRPr/>
             </a:lvl9pPr>
           </a:lstStyle>
-          <a:p/>
+          <a:p>
+            <a:endParaRPr/>
+          </a:p>
         </p:txBody>
       </p:sp>
       <p:sp>
         <p:nvSpPr>
           <p:cNvPr id="140" name="Google Shape;140;p39"/>
-          <p:cNvSpPr txBox="1"/>
+          <p:cNvSpPr txBox="1">
+            <a:spLocks noGrp="1"/>
+          </p:cNvSpPr>
           <p:nvPr>
             <p:ph type="dt" idx="10"/>
           </p:nvPr>
@@ -13533,13 +13881,17 @@
               <a:defRPr/>
             </a:lvl9pPr>
           </a:lstStyle>
-          <a:p/>
+          <a:p>
+            <a:endParaRPr/>
+          </a:p>
         </p:txBody>
       </p:sp>
       <p:sp>
         <p:nvSpPr>
           <p:cNvPr id="141" name="Google Shape;141;p39"/>
-          <p:cNvSpPr txBox="1"/>
+          <p:cNvSpPr txBox="1">
+            <a:spLocks noGrp="1"/>
+          </p:cNvSpPr>
           <p:nvPr>
             <p:ph type="ftr" idx="11"/>
           </p:nvPr>
@@ -13662,13 +14014,17 @@
               <a:defRPr/>
             </a:lvl9pPr>
           </a:lstStyle>
-          <a:p/>
+          <a:p>
+            <a:endParaRPr/>
+          </a:p>
         </p:txBody>
       </p:sp>
       <p:sp>
         <p:nvSpPr>
           <p:cNvPr id="142" name="Google Shape;142;p39"/>
-          <p:cNvSpPr txBox="1"/>
+          <p:cNvSpPr txBox="1">
+            <a:spLocks noGrp="1"/>
+          </p:cNvSpPr>
           <p:nvPr>
             <p:ph type="sldNum" idx="12"/>
           </p:nvPr>
@@ -13767,6 +14123,16 @@
             </a:pPr>
             <a:fld id="{00000000-1234-1234-1234-123412341234}" type="slidenum">
               <a:rPr lang="en-US"/>
+              <a:pPr marL="0" lvl="0" indent="0" algn="r" rtl="0">
+                <a:spcBef>
+                  <a:spcPts val="0"/>
+                </a:spcBef>
+                <a:spcAft>
+                  <a:spcPts val="0"/>
+                </a:spcAft>
+                <a:buNone/>
+              </a:pPr>
+              <a:t>‹#›</a:t>
             </a:fld>
             <a:endParaRPr lang="en-US"/>
           </a:p>
@@ -13781,11 +14147,11 @@
 </file>
 
 <file path=ppt/slideLayouts/slideLayout2.xml><?xml version="1.0" encoding="utf-8"?>
-<p:sldLayout xmlns:a="http://schemas.openxmlformats.org/drawingml/2006/main" xmlns:r="http://schemas.openxmlformats.org/officeDocument/2006/relationships" xmlns:p="http://schemas.openxmlformats.org/presentationml/2006/main" type="obj" matchingName="Title and Content">
+<p:sldLayout xmlns:a="http://schemas.openxmlformats.org/drawingml/2006/main" xmlns:r="http://schemas.openxmlformats.org/officeDocument/2006/relationships" xmlns:p="http://schemas.openxmlformats.org/presentationml/2006/main" matchingName="Title and Content" type="obj">
   <p:cSld name="OBJECT">
     <p:spTree>
       <p:nvGrpSpPr>
-        <p:cNvPr id="43" name="Shape 43"/>
+        <p:cNvPr id="1" name="Shape 43"/>
         <p:cNvGrpSpPr/>
         <p:nvPr/>
       </p:nvGrpSpPr>
@@ -13800,7 +14166,9 @@
       <p:sp>
         <p:nvSpPr>
           <p:cNvPr id="44" name="Google Shape;44;p25"/>
-          <p:cNvSpPr txBox="1"/>
+          <p:cNvSpPr txBox="1">
+            <a:spLocks noGrp="1"/>
+          </p:cNvSpPr>
           <p:nvPr>
             <p:ph type="title"/>
           </p:nvPr>
@@ -13926,13 +14294,17 @@
               <a:defRPr/>
             </a:lvl9pPr>
           </a:lstStyle>
-          <a:p/>
+          <a:p>
+            <a:endParaRPr/>
+          </a:p>
         </p:txBody>
       </p:sp>
       <p:sp>
         <p:nvSpPr>
           <p:cNvPr id="45" name="Google Shape;45;p25"/>
-          <p:cNvSpPr txBox="1"/>
+          <p:cNvSpPr txBox="1">
+            <a:spLocks noGrp="1"/>
+          </p:cNvSpPr>
           <p:nvPr>
             <p:ph type="body" idx="1"/>
           </p:nvPr>
@@ -14055,13 +14427,17 @@
               <a:defRPr/>
             </a:lvl9pPr>
           </a:lstStyle>
-          <a:p/>
+          <a:p>
+            <a:endParaRPr/>
+          </a:p>
         </p:txBody>
       </p:sp>
       <p:sp>
         <p:nvSpPr>
           <p:cNvPr id="46" name="Google Shape;46;p25"/>
-          <p:cNvSpPr txBox="1"/>
+          <p:cNvSpPr txBox="1">
+            <a:spLocks noGrp="1"/>
+          </p:cNvSpPr>
           <p:nvPr>
             <p:ph type="dt" idx="10"/>
           </p:nvPr>
@@ -14184,13 +14560,17 @@
               <a:defRPr/>
             </a:lvl9pPr>
           </a:lstStyle>
-          <a:p/>
+          <a:p>
+            <a:endParaRPr/>
+          </a:p>
         </p:txBody>
       </p:sp>
       <p:sp>
         <p:nvSpPr>
           <p:cNvPr id="47" name="Google Shape;47;p25"/>
-          <p:cNvSpPr txBox="1"/>
+          <p:cNvSpPr txBox="1">
+            <a:spLocks noGrp="1"/>
+          </p:cNvSpPr>
           <p:nvPr>
             <p:ph type="ftr" idx="11"/>
           </p:nvPr>
@@ -14313,13 +14693,17 @@
               <a:defRPr/>
             </a:lvl9pPr>
           </a:lstStyle>
-          <a:p/>
+          <a:p>
+            <a:endParaRPr/>
+          </a:p>
         </p:txBody>
       </p:sp>
       <p:sp>
         <p:nvSpPr>
           <p:cNvPr id="48" name="Google Shape;48;p25"/>
-          <p:cNvSpPr txBox="1"/>
+          <p:cNvSpPr txBox="1">
+            <a:spLocks noGrp="1"/>
+          </p:cNvSpPr>
           <p:nvPr>
             <p:ph type="sldNum" idx="12"/>
           </p:nvPr>
@@ -14418,6 +14802,16 @@
             </a:pPr>
             <a:fld id="{00000000-1234-1234-1234-123412341234}" type="slidenum">
               <a:rPr lang="en-US"/>
+              <a:pPr marL="0" lvl="0" indent="0" algn="r" rtl="0">
+                <a:spcBef>
+                  <a:spcPts val="0"/>
+                </a:spcBef>
+                <a:spcAft>
+                  <a:spcPts val="0"/>
+                </a:spcAft>
+                <a:buNone/>
+              </a:pPr>
+              <a:t>‹#›</a:t>
             </a:fld>
             <a:endParaRPr lang="en-US"/>
           </a:p>
@@ -14432,11 +14826,11 @@
 </file>
 
 <file path=ppt/slideLayouts/slideLayout3.xml><?xml version="1.0" encoding="utf-8"?>
-<p:sldLayout xmlns:a="http://schemas.openxmlformats.org/drawingml/2006/main" xmlns:r="http://schemas.openxmlformats.org/officeDocument/2006/relationships" xmlns:p="http://schemas.openxmlformats.org/presentationml/2006/main" type="secHead" matchingName="Section Header">
+<p:sldLayout xmlns:a="http://schemas.openxmlformats.org/drawingml/2006/main" xmlns:r="http://schemas.openxmlformats.org/officeDocument/2006/relationships" xmlns:p="http://schemas.openxmlformats.org/presentationml/2006/main" matchingName="Section Header" type="secHead">
   <p:cSld name="SECTION_HEADER">
     <p:spTree>
       <p:nvGrpSpPr>
-        <p:cNvPr id="49" name="Shape 49"/>
+        <p:cNvPr id="1" name="Shape 49"/>
         <p:cNvGrpSpPr/>
         <p:nvPr/>
       </p:nvGrpSpPr>
@@ -14451,7 +14845,9 @@
       <p:sp>
         <p:nvSpPr>
           <p:cNvPr id="50" name="Google Shape;50;p26"/>
-          <p:cNvSpPr txBox="1"/>
+          <p:cNvSpPr txBox="1">
+            <a:spLocks noGrp="1"/>
+          </p:cNvSpPr>
           <p:nvPr>
             <p:ph type="title"/>
           </p:nvPr>
@@ -14578,13 +14974,17 @@
               <a:defRPr/>
             </a:lvl9pPr>
           </a:lstStyle>
-          <a:p/>
+          <a:p>
+            <a:endParaRPr/>
+          </a:p>
         </p:txBody>
       </p:sp>
       <p:sp>
         <p:nvSpPr>
           <p:cNvPr id="51" name="Google Shape;51;p26"/>
-          <p:cNvSpPr txBox="1"/>
+          <p:cNvSpPr txBox="1">
+            <a:spLocks noGrp="1"/>
+          </p:cNvSpPr>
           <p:nvPr>
             <p:ph type="body" idx="1"/>
           </p:nvPr>
@@ -14743,13 +15143,17 @@
               </a:defRPr>
             </a:lvl9pPr>
           </a:lstStyle>
-          <a:p/>
+          <a:p>
+            <a:endParaRPr/>
+          </a:p>
         </p:txBody>
       </p:sp>
       <p:sp>
         <p:nvSpPr>
           <p:cNvPr id="52" name="Google Shape;52;p26"/>
-          <p:cNvSpPr txBox="1"/>
+          <p:cNvSpPr txBox="1">
+            <a:spLocks noGrp="1"/>
+          </p:cNvSpPr>
           <p:nvPr>
             <p:ph type="dt" idx="10"/>
           </p:nvPr>
@@ -14872,13 +15276,17 @@
               <a:defRPr/>
             </a:lvl9pPr>
           </a:lstStyle>
-          <a:p/>
+          <a:p>
+            <a:endParaRPr/>
+          </a:p>
         </p:txBody>
       </p:sp>
       <p:sp>
         <p:nvSpPr>
           <p:cNvPr id="53" name="Google Shape;53;p26"/>
-          <p:cNvSpPr txBox="1"/>
+          <p:cNvSpPr txBox="1">
+            <a:spLocks noGrp="1"/>
+          </p:cNvSpPr>
           <p:nvPr>
             <p:ph type="ftr" idx="11"/>
           </p:nvPr>
@@ -15001,13 +15409,17 @@
               <a:defRPr/>
             </a:lvl9pPr>
           </a:lstStyle>
-          <a:p/>
+          <a:p>
+            <a:endParaRPr/>
+          </a:p>
         </p:txBody>
       </p:sp>
       <p:sp>
         <p:nvSpPr>
           <p:cNvPr id="54" name="Google Shape;54;p26"/>
-          <p:cNvSpPr txBox="1"/>
+          <p:cNvSpPr txBox="1">
+            <a:spLocks noGrp="1"/>
+          </p:cNvSpPr>
           <p:nvPr>
             <p:ph type="sldNum" idx="12"/>
           </p:nvPr>
@@ -15106,6 +15518,16 @@
             </a:pPr>
             <a:fld id="{00000000-1234-1234-1234-123412341234}" type="slidenum">
               <a:rPr lang="en-US"/>
+              <a:pPr marL="0" lvl="0" indent="0" algn="r" rtl="0">
+                <a:spcBef>
+                  <a:spcPts val="0"/>
+                </a:spcBef>
+                <a:spcAft>
+                  <a:spcPts val="0"/>
+                </a:spcAft>
+                <a:buNone/>
+              </a:pPr>
+              <a:t>‹#›</a:t>
             </a:fld>
             <a:endParaRPr lang="en-US"/>
           </a:p>
@@ -15120,11 +15542,11 @@
 </file>
 
 <file path=ppt/slideLayouts/slideLayout4.xml><?xml version="1.0" encoding="utf-8"?>
-<p:sldLayout xmlns:a="http://schemas.openxmlformats.org/drawingml/2006/main" xmlns:r="http://schemas.openxmlformats.org/officeDocument/2006/relationships" xmlns:p="http://schemas.openxmlformats.org/presentationml/2006/main" type="twoObj" matchingName="Two Content">
+<p:sldLayout xmlns:a="http://schemas.openxmlformats.org/drawingml/2006/main" xmlns:r="http://schemas.openxmlformats.org/officeDocument/2006/relationships" xmlns:p="http://schemas.openxmlformats.org/presentationml/2006/main" matchingName="Two Content" type="twoObj">
   <p:cSld name="TWO_OBJECTS">
     <p:spTree>
       <p:nvGrpSpPr>
-        <p:cNvPr id="55" name="Shape 55"/>
+        <p:cNvPr id="1" name="Shape 55"/>
         <p:cNvGrpSpPr/>
         <p:nvPr/>
       </p:nvGrpSpPr>
@@ -15139,7 +15561,9 @@
       <p:sp>
         <p:nvSpPr>
           <p:cNvPr id="56" name="Google Shape;56;p27"/>
-          <p:cNvSpPr txBox="1"/>
+          <p:cNvSpPr txBox="1">
+            <a:spLocks noGrp="1"/>
+          </p:cNvSpPr>
           <p:nvPr>
             <p:ph type="title"/>
           </p:nvPr>
@@ -15265,13 +15689,17 @@
               <a:defRPr/>
             </a:lvl9pPr>
           </a:lstStyle>
-          <a:p/>
+          <a:p>
+            <a:endParaRPr/>
+          </a:p>
         </p:txBody>
       </p:sp>
       <p:sp>
         <p:nvSpPr>
           <p:cNvPr id="57" name="Google Shape;57;p27"/>
-          <p:cNvSpPr txBox="1"/>
+          <p:cNvSpPr txBox="1">
+            <a:spLocks noGrp="1"/>
+          </p:cNvSpPr>
           <p:nvPr>
             <p:ph type="body" idx="1"/>
           </p:nvPr>
@@ -15394,13 +15822,17 @@
               <a:defRPr/>
             </a:lvl9pPr>
           </a:lstStyle>
-          <a:p/>
+          <a:p>
+            <a:endParaRPr/>
+          </a:p>
         </p:txBody>
       </p:sp>
       <p:sp>
         <p:nvSpPr>
           <p:cNvPr id="58" name="Google Shape;58;p27"/>
-          <p:cNvSpPr txBox="1"/>
+          <p:cNvSpPr txBox="1">
+            <a:spLocks noGrp="1"/>
+          </p:cNvSpPr>
           <p:nvPr>
             <p:ph type="body" idx="2"/>
           </p:nvPr>
@@ -15523,13 +15955,17 @@
               <a:defRPr/>
             </a:lvl9pPr>
           </a:lstStyle>
-          <a:p/>
+          <a:p>
+            <a:endParaRPr/>
+          </a:p>
         </p:txBody>
       </p:sp>
       <p:sp>
         <p:nvSpPr>
           <p:cNvPr id="59" name="Google Shape;59;p27"/>
-          <p:cNvSpPr txBox="1"/>
+          <p:cNvSpPr txBox="1">
+            <a:spLocks noGrp="1"/>
+          </p:cNvSpPr>
           <p:nvPr>
             <p:ph type="dt" idx="10"/>
           </p:nvPr>
@@ -15652,13 +16088,17 @@
               <a:defRPr/>
             </a:lvl9pPr>
           </a:lstStyle>
-          <a:p/>
+          <a:p>
+            <a:endParaRPr/>
+          </a:p>
         </p:txBody>
       </p:sp>
       <p:sp>
         <p:nvSpPr>
           <p:cNvPr id="60" name="Google Shape;60;p27"/>
-          <p:cNvSpPr txBox="1"/>
+          <p:cNvSpPr txBox="1">
+            <a:spLocks noGrp="1"/>
+          </p:cNvSpPr>
           <p:nvPr>
             <p:ph type="ftr" idx="11"/>
           </p:nvPr>
@@ -15781,13 +16221,17 @@
               <a:defRPr/>
             </a:lvl9pPr>
           </a:lstStyle>
-          <a:p/>
+          <a:p>
+            <a:endParaRPr/>
+          </a:p>
         </p:txBody>
       </p:sp>
       <p:sp>
         <p:nvSpPr>
           <p:cNvPr id="61" name="Google Shape;61;p27"/>
-          <p:cNvSpPr txBox="1"/>
+          <p:cNvSpPr txBox="1">
+            <a:spLocks noGrp="1"/>
+          </p:cNvSpPr>
           <p:nvPr>
             <p:ph type="sldNum" idx="12"/>
           </p:nvPr>
@@ -15886,6 +16330,16 @@
             </a:pPr>
             <a:fld id="{00000000-1234-1234-1234-123412341234}" type="slidenum">
               <a:rPr lang="en-US"/>
+              <a:pPr marL="0" lvl="0" indent="0" algn="r" rtl="0">
+                <a:spcBef>
+                  <a:spcPts val="0"/>
+                </a:spcBef>
+                <a:spcAft>
+                  <a:spcPts val="0"/>
+                </a:spcAft>
+                <a:buNone/>
+              </a:pPr>
+              <a:t>‹#›</a:t>
             </a:fld>
             <a:endParaRPr lang="en-US"/>
           </a:p>
@@ -15900,11 +16354,11 @@
 </file>
 
 <file path=ppt/slideLayouts/slideLayout5.xml><?xml version="1.0" encoding="utf-8"?>
-<p:sldLayout xmlns:a="http://schemas.openxmlformats.org/drawingml/2006/main" xmlns:r="http://schemas.openxmlformats.org/officeDocument/2006/relationships" xmlns:p="http://schemas.openxmlformats.org/presentationml/2006/main" type="twoTxTwoObj" matchingName="Comparison">
+<p:sldLayout xmlns:a="http://schemas.openxmlformats.org/drawingml/2006/main" xmlns:r="http://schemas.openxmlformats.org/officeDocument/2006/relationships" xmlns:p="http://schemas.openxmlformats.org/presentationml/2006/main" matchingName="Comparison" type="twoTxTwoObj">
   <p:cSld name="TWO_OBJECTS_WITH_TEXT">
     <p:spTree>
       <p:nvGrpSpPr>
-        <p:cNvPr id="62" name="Shape 62"/>
+        <p:cNvPr id="1" name="Shape 62"/>
         <p:cNvGrpSpPr/>
         <p:nvPr/>
       </p:nvGrpSpPr>
@@ -15919,7 +16373,9 @@
       <p:sp>
         <p:nvSpPr>
           <p:cNvPr id="63" name="Google Shape;63;p28"/>
-          <p:cNvSpPr txBox="1"/>
+          <p:cNvSpPr txBox="1">
+            <a:spLocks noGrp="1"/>
+          </p:cNvSpPr>
           <p:nvPr>
             <p:ph type="title"/>
           </p:nvPr>
@@ -16046,13 +16502,17 @@
               <a:defRPr/>
             </a:lvl9pPr>
           </a:lstStyle>
-          <a:p/>
+          <a:p>
+            <a:endParaRPr/>
+          </a:p>
         </p:txBody>
       </p:sp>
       <p:sp>
         <p:nvSpPr>
           <p:cNvPr id="64" name="Google Shape;64;p28"/>
-          <p:cNvSpPr txBox="1"/>
+          <p:cNvSpPr txBox="1">
+            <a:spLocks noGrp="1"/>
+          </p:cNvSpPr>
           <p:nvPr>
             <p:ph type="body" idx="1"/>
           </p:nvPr>
@@ -16175,13 +16635,17 @@
               <a:defRPr sz="1600" b="1"/>
             </a:lvl9pPr>
           </a:lstStyle>
-          <a:p/>
+          <a:p>
+            <a:endParaRPr/>
+          </a:p>
         </p:txBody>
       </p:sp>
       <p:sp>
         <p:nvSpPr>
           <p:cNvPr id="65" name="Google Shape;65;p28"/>
-          <p:cNvSpPr txBox="1"/>
+          <p:cNvSpPr txBox="1">
+            <a:spLocks noGrp="1"/>
+          </p:cNvSpPr>
           <p:nvPr>
             <p:ph type="body" idx="2"/>
           </p:nvPr>
@@ -16304,13 +16768,17 @@
               <a:defRPr/>
             </a:lvl9pPr>
           </a:lstStyle>
-          <a:p/>
+          <a:p>
+            <a:endParaRPr/>
+          </a:p>
         </p:txBody>
       </p:sp>
       <p:sp>
         <p:nvSpPr>
           <p:cNvPr id="66" name="Google Shape;66;p28"/>
-          <p:cNvSpPr txBox="1"/>
+          <p:cNvSpPr txBox="1">
+            <a:spLocks noGrp="1"/>
+          </p:cNvSpPr>
           <p:nvPr>
             <p:ph type="body" idx="3"/>
           </p:nvPr>
@@ -16433,13 +16901,17 @@
               <a:defRPr sz="1600" b="1"/>
             </a:lvl9pPr>
           </a:lstStyle>
-          <a:p/>
+          <a:p>
+            <a:endParaRPr/>
+          </a:p>
         </p:txBody>
       </p:sp>
       <p:sp>
         <p:nvSpPr>
           <p:cNvPr id="67" name="Google Shape;67;p28"/>
-          <p:cNvSpPr txBox="1"/>
+          <p:cNvSpPr txBox="1">
+            <a:spLocks noGrp="1"/>
+          </p:cNvSpPr>
           <p:nvPr>
             <p:ph type="body" idx="4"/>
           </p:nvPr>
@@ -16562,13 +17034,17 @@
               <a:defRPr/>
             </a:lvl9pPr>
           </a:lstStyle>
-          <a:p/>
+          <a:p>
+            <a:endParaRPr/>
+          </a:p>
         </p:txBody>
       </p:sp>
       <p:sp>
         <p:nvSpPr>
           <p:cNvPr id="68" name="Google Shape;68;p28"/>
-          <p:cNvSpPr txBox="1"/>
+          <p:cNvSpPr txBox="1">
+            <a:spLocks noGrp="1"/>
+          </p:cNvSpPr>
           <p:nvPr>
             <p:ph type="dt" idx="10"/>
           </p:nvPr>
@@ -16691,13 +17167,17 @@
               <a:defRPr/>
             </a:lvl9pPr>
           </a:lstStyle>
-          <a:p/>
+          <a:p>
+            <a:endParaRPr/>
+          </a:p>
         </p:txBody>
       </p:sp>
       <p:sp>
         <p:nvSpPr>
           <p:cNvPr id="69" name="Google Shape;69;p28"/>
-          <p:cNvSpPr txBox="1"/>
+          <p:cNvSpPr txBox="1">
+            <a:spLocks noGrp="1"/>
+          </p:cNvSpPr>
           <p:nvPr>
             <p:ph type="ftr" idx="11"/>
           </p:nvPr>
@@ -16820,13 +17300,17 @@
               <a:defRPr/>
             </a:lvl9pPr>
           </a:lstStyle>
-          <a:p/>
+          <a:p>
+            <a:endParaRPr/>
+          </a:p>
         </p:txBody>
       </p:sp>
       <p:sp>
         <p:nvSpPr>
           <p:cNvPr id="70" name="Google Shape;70;p28"/>
-          <p:cNvSpPr txBox="1"/>
+          <p:cNvSpPr txBox="1">
+            <a:spLocks noGrp="1"/>
+          </p:cNvSpPr>
           <p:nvPr>
             <p:ph type="sldNum" idx="12"/>
           </p:nvPr>
@@ -16925,6 +17409,16 @@
             </a:pPr>
             <a:fld id="{00000000-1234-1234-1234-123412341234}" type="slidenum">
               <a:rPr lang="en-US"/>
+              <a:pPr marL="0" lvl="0" indent="0" algn="r" rtl="0">
+                <a:spcBef>
+                  <a:spcPts val="0"/>
+                </a:spcBef>
+                <a:spcAft>
+                  <a:spcPts val="0"/>
+                </a:spcAft>
+                <a:buNone/>
+              </a:pPr>
+              <a:t>‹#›</a:t>
             </a:fld>
             <a:endParaRPr lang="en-US"/>
           </a:p>
@@ -16939,11 +17433,11 @@
 </file>
 
 <file path=ppt/slideLayouts/slideLayout6.xml><?xml version="1.0" encoding="utf-8"?>
-<p:sldLayout xmlns:a="http://schemas.openxmlformats.org/drawingml/2006/main" xmlns:r="http://schemas.openxmlformats.org/officeDocument/2006/relationships" xmlns:p="http://schemas.openxmlformats.org/presentationml/2006/main" type="titleOnly" matchingName="Title Only">
+<p:sldLayout xmlns:a="http://schemas.openxmlformats.org/drawingml/2006/main" xmlns:r="http://schemas.openxmlformats.org/officeDocument/2006/relationships" xmlns:p="http://schemas.openxmlformats.org/presentationml/2006/main" matchingName="Title Only" type="titleOnly">
   <p:cSld name="TITLE_ONLY">
     <p:spTree>
       <p:nvGrpSpPr>
-        <p:cNvPr id="71" name="Shape 71"/>
+        <p:cNvPr id="1" name="Shape 71"/>
         <p:cNvGrpSpPr/>
         <p:nvPr/>
       </p:nvGrpSpPr>
@@ -16958,7 +17452,9 @@
       <p:sp>
         <p:nvSpPr>
           <p:cNvPr id="72" name="Google Shape;72;p29"/>
-          <p:cNvSpPr txBox="1"/>
+          <p:cNvSpPr txBox="1">
+            <a:spLocks noGrp="1"/>
+          </p:cNvSpPr>
           <p:nvPr>
             <p:ph type="title"/>
           </p:nvPr>
@@ -17084,13 +17580,17 @@
               <a:defRPr/>
             </a:lvl9pPr>
           </a:lstStyle>
-          <a:p/>
+          <a:p>
+            <a:endParaRPr/>
+          </a:p>
         </p:txBody>
       </p:sp>
       <p:sp>
         <p:nvSpPr>
           <p:cNvPr id="73" name="Google Shape;73;p29"/>
-          <p:cNvSpPr txBox="1"/>
+          <p:cNvSpPr txBox="1">
+            <a:spLocks noGrp="1"/>
+          </p:cNvSpPr>
           <p:nvPr>
             <p:ph type="dt" idx="10"/>
           </p:nvPr>
@@ -17213,13 +17713,17 @@
               <a:defRPr/>
             </a:lvl9pPr>
           </a:lstStyle>
-          <a:p/>
+          <a:p>
+            <a:endParaRPr/>
+          </a:p>
         </p:txBody>
       </p:sp>
       <p:sp>
         <p:nvSpPr>
           <p:cNvPr id="74" name="Google Shape;74;p29"/>
-          <p:cNvSpPr txBox="1"/>
+          <p:cNvSpPr txBox="1">
+            <a:spLocks noGrp="1"/>
+          </p:cNvSpPr>
           <p:nvPr>
             <p:ph type="ftr" idx="11"/>
           </p:nvPr>
@@ -17342,13 +17846,17 @@
               <a:defRPr/>
             </a:lvl9pPr>
           </a:lstStyle>
-          <a:p/>
+          <a:p>
+            <a:endParaRPr/>
+          </a:p>
         </p:txBody>
       </p:sp>
       <p:sp>
         <p:nvSpPr>
           <p:cNvPr id="75" name="Google Shape;75;p29"/>
-          <p:cNvSpPr txBox="1"/>
+          <p:cNvSpPr txBox="1">
+            <a:spLocks noGrp="1"/>
+          </p:cNvSpPr>
           <p:nvPr>
             <p:ph type="sldNum" idx="12"/>
           </p:nvPr>
@@ -17447,6 +17955,16 @@
             </a:pPr>
             <a:fld id="{00000000-1234-1234-1234-123412341234}" type="slidenum">
               <a:rPr lang="en-US"/>
+              <a:pPr marL="0" lvl="0" indent="0" algn="r" rtl="0">
+                <a:spcBef>
+                  <a:spcPts val="0"/>
+                </a:spcBef>
+                <a:spcAft>
+                  <a:spcPts val="0"/>
+                </a:spcAft>
+                <a:buNone/>
+              </a:pPr>
+              <a:t>‹#›</a:t>
             </a:fld>
             <a:endParaRPr lang="en-US"/>
           </a:p>
@@ -17461,11 +17979,11 @@
 </file>
 
 <file path=ppt/slideLayouts/slideLayout7.xml><?xml version="1.0" encoding="utf-8"?>
-<p:sldLayout xmlns:a="http://schemas.openxmlformats.org/drawingml/2006/main" xmlns:r="http://schemas.openxmlformats.org/officeDocument/2006/relationships" xmlns:p="http://schemas.openxmlformats.org/presentationml/2006/main" type="blank" matchingName="Blank">
+<p:sldLayout xmlns:a="http://schemas.openxmlformats.org/drawingml/2006/main" xmlns:r="http://schemas.openxmlformats.org/officeDocument/2006/relationships" xmlns:p="http://schemas.openxmlformats.org/presentationml/2006/main" matchingName="Blank" type="blank">
   <p:cSld name="BLANK">
     <p:spTree>
       <p:nvGrpSpPr>
-        <p:cNvPr id="76" name="Shape 76"/>
+        <p:cNvPr id="1" name="Shape 76"/>
         <p:cNvGrpSpPr/>
         <p:nvPr/>
       </p:nvGrpSpPr>
@@ -17480,7 +17998,9 @@
       <p:sp>
         <p:nvSpPr>
           <p:cNvPr id="77" name="Google Shape;77;p30"/>
-          <p:cNvSpPr txBox="1"/>
+          <p:cNvSpPr txBox="1">
+            <a:spLocks noGrp="1"/>
+          </p:cNvSpPr>
           <p:nvPr>
             <p:ph type="dt" idx="10"/>
           </p:nvPr>
@@ -17603,13 +18123,17 @@
               <a:defRPr/>
             </a:lvl9pPr>
           </a:lstStyle>
-          <a:p/>
+          <a:p>
+            <a:endParaRPr/>
+          </a:p>
         </p:txBody>
       </p:sp>
       <p:sp>
         <p:nvSpPr>
           <p:cNvPr id="78" name="Google Shape;78;p30"/>
-          <p:cNvSpPr txBox="1"/>
+          <p:cNvSpPr txBox="1">
+            <a:spLocks noGrp="1"/>
+          </p:cNvSpPr>
           <p:nvPr>
             <p:ph type="ftr" idx="11"/>
           </p:nvPr>
@@ -17732,13 +18256,17 @@
               <a:defRPr/>
             </a:lvl9pPr>
           </a:lstStyle>
-          <a:p/>
+          <a:p>
+            <a:endParaRPr/>
+          </a:p>
         </p:txBody>
       </p:sp>
       <p:sp>
         <p:nvSpPr>
           <p:cNvPr id="79" name="Google Shape;79;p30"/>
-          <p:cNvSpPr txBox="1"/>
+          <p:cNvSpPr txBox="1">
+            <a:spLocks noGrp="1"/>
+          </p:cNvSpPr>
           <p:nvPr>
             <p:ph type="sldNum" idx="12"/>
           </p:nvPr>
@@ -17837,6 +18365,16 @@
             </a:pPr>
             <a:fld id="{00000000-1234-1234-1234-123412341234}" type="slidenum">
               <a:rPr lang="en-US"/>
+              <a:pPr marL="0" lvl="0" indent="0" algn="r" rtl="0">
+                <a:spcBef>
+                  <a:spcPts val="0"/>
+                </a:spcBef>
+                <a:spcAft>
+                  <a:spcPts val="0"/>
+                </a:spcAft>
+                <a:buNone/>
+              </a:pPr>
+              <a:t>‹#›</a:t>
             </a:fld>
             <a:endParaRPr lang="en-US"/>
           </a:p>
@@ -17851,11 +18389,11 @@
 </file>
 
 <file path=ppt/slideLayouts/slideLayout8.xml><?xml version="1.0" encoding="utf-8"?>
-<p:sldLayout xmlns:a="http://schemas.openxmlformats.org/drawingml/2006/main" xmlns:r="http://schemas.openxmlformats.org/officeDocument/2006/relationships" xmlns:p="http://schemas.openxmlformats.org/presentationml/2006/main" type="objTx" matchingName="Content with Caption">
+<p:sldLayout xmlns:a="http://schemas.openxmlformats.org/drawingml/2006/main" xmlns:r="http://schemas.openxmlformats.org/officeDocument/2006/relationships" xmlns:p="http://schemas.openxmlformats.org/presentationml/2006/main" matchingName="Content with Caption" type="objTx">
   <p:cSld name="OBJECT_WITH_CAPTION_TEXT">
     <p:spTree>
       <p:nvGrpSpPr>
-        <p:cNvPr id="80" name="Shape 80"/>
+        <p:cNvPr id="1" name="Shape 80"/>
         <p:cNvGrpSpPr/>
         <p:nvPr/>
       </p:nvGrpSpPr>
@@ -17870,7 +18408,9 @@
       <p:sp>
         <p:nvSpPr>
           <p:cNvPr id="81" name="Google Shape;81;p31"/>
-          <p:cNvSpPr txBox="1"/>
+          <p:cNvSpPr txBox="1">
+            <a:spLocks noGrp="1"/>
+          </p:cNvSpPr>
           <p:nvPr>
             <p:ph type="title"/>
           </p:nvPr>
@@ -17997,13 +18537,17 @@
               <a:defRPr/>
             </a:lvl9pPr>
           </a:lstStyle>
-          <a:p/>
+          <a:p>
+            <a:endParaRPr/>
+          </a:p>
         </p:txBody>
       </p:sp>
       <p:sp>
         <p:nvSpPr>
           <p:cNvPr id="82" name="Google Shape;82;p31"/>
-          <p:cNvSpPr txBox="1"/>
+          <p:cNvSpPr txBox="1">
+            <a:spLocks noGrp="1"/>
+          </p:cNvSpPr>
           <p:nvPr>
             <p:ph type="body" idx="1"/>
           </p:nvPr>
@@ -18126,13 +18670,17 @@
               <a:defRPr/>
             </a:lvl9pPr>
           </a:lstStyle>
-          <a:p/>
+          <a:p>
+            <a:endParaRPr/>
+          </a:p>
         </p:txBody>
       </p:sp>
       <p:sp>
         <p:nvSpPr>
           <p:cNvPr id="83" name="Google Shape;83;p31"/>
-          <p:cNvSpPr txBox="1"/>
+          <p:cNvSpPr txBox="1">
+            <a:spLocks noGrp="1"/>
+          </p:cNvSpPr>
           <p:nvPr>
             <p:ph type="body" idx="2"/>
           </p:nvPr>
@@ -18255,13 +18803,17 @@
               <a:defRPr sz="1000"/>
             </a:lvl9pPr>
           </a:lstStyle>
-          <a:p/>
+          <a:p>
+            <a:endParaRPr/>
+          </a:p>
         </p:txBody>
       </p:sp>
       <p:sp>
         <p:nvSpPr>
           <p:cNvPr id="84" name="Google Shape;84;p31"/>
-          <p:cNvSpPr txBox="1"/>
+          <p:cNvSpPr txBox="1">
+            <a:spLocks noGrp="1"/>
+          </p:cNvSpPr>
           <p:nvPr>
             <p:ph type="dt" idx="10"/>
           </p:nvPr>
@@ -18384,13 +18936,17 @@
               <a:defRPr/>
             </a:lvl9pPr>
           </a:lstStyle>
-          <a:p/>
+          <a:p>
+            <a:endParaRPr/>
+          </a:p>
         </p:txBody>
       </p:sp>
       <p:sp>
         <p:nvSpPr>
           <p:cNvPr id="85" name="Google Shape;85;p31"/>
-          <p:cNvSpPr txBox="1"/>
+          <p:cNvSpPr txBox="1">
+            <a:spLocks noGrp="1"/>
+          </p:cNvSpPr>
           <p:nvPr>
             <p:ph type="ftr" idx="11"/>
           </p:nvPr>
@@ -18513,13 +19069,17 @@
               <a:defRPr/>
             </a:lvl9pPr>
           </a:lstStyle>
-          <a:p/>
+          <a:p>
+            <a:endParaRPr/>
+          </a:p>
         </p:txBody>
       </p:sp>
       <p:sp>
         <p:nvSpPr>
           <p:cNvPr id="86" name="Google Shape;86;p31"/>
-          <p:cNvSpPr txBox="1"/>
+          <p:cNvSpPr txBox="1">
+            <a:spLocks noGrp="1"/>
+          </p:cNvSpPr>
           <p:nvPr>
             <p:ph type="sldNum" idx="12"/>
           </p:nvPr>
@@ -18618,6 +19178,16 @@
             </a:pPr>
             <a:fld id="{00000000-1234-1234-1234-123412341234}" type="slidenum">
               <a:rPr lang="en-US"/>
+              <a:pPr marL="0" lvl="0" indent="0" algn="r" rtl="0">
+                <a:spcBef>
+                  <a:spcPts val="0"/>
+                </a:spcBef>
+                <a:spcAft>
+                  <a:spcPts val="0"/>
+                </a:spcAft>
+                <a:buNone/>
+              </a:pPr>
+              <a:t>‹#›</a:t>
             </a:fld>
             <a:endParaRPr lang="en-US"/>
           </a:p>
@@ -18632,11 +19202,11 @@
 </file>
 
 <file path=ppt/slideLayouts/slideLayout9.xml><?xml version="1.0" encoding="utf-8"?>
-<p:sldLayout xmlns:a="http://schemas.openxmlformats.org/drawingml/2006/main" xmlns:r="http://schemas.openxmlformats.org/officeDocument/2006/relationships" xmlns:p="http://schemas.openxmlformats.org/presentationml/2006/main" type="picTx" matchingName="Picture with Caption">
+<p:sldLayout xmlns:a="http://schemas.openxmlformats.org/drawingml/2006/main" xmlns:r="http://schemas.openxmlformats.org/officeDocument/2006/relationships" xmlns:p="http://schemas.openxmlformats.org/presentationml/2006/main" matchingName="Picture with Caption" type="picTx">
   <p:cSld name="PICTURE_WITH_CAPTION_TEXT">
     <p:spTree>
       <p:nvGrpSpPr>
-        <p:cNvPr id="87" name="Shape 87"/>
+        <p:cNvPr id="1" name="Shape 87"/>
         <p:cNvGrpSpPr/>
         <p:nvPr/>
       </p:nvGrpSpPr>
@@ -18651,7 +19221,9 @@
       <p:sp>
         <p:nvSpPr>
           <p:cNvPr id="88" name="Google Shape;88;p32"/>
-          <p:cNvSpPr txBox="1"/>
+          <p:cNvSpPr txBox="1">
+            <a:spLocks noGrp="1"/>
+          </p:cNvSpPr>
           <p:nvPr>
             <p:ph type="title"/>
           </p:nvPr>
@@ -18778,13 +19350,17 @@
               <a:defRPr/>
             </a:lvl9pPr>
           </a:lstStyle>
-          <a:p/>
+          <a:p>
+            <a:endParaRPr/>
+          </a:p>
         </p:txBody>
       </p:sp>
       <p:sp>
         <p:nvSpPr>
           <p:cNvPr id="89" name="Google Shape;89;p32"/>
-          <p:cNvSpPr/>
+          <p:cNvSpPr>
+            <a:spLocks noGrp="1"/>
+          </p:cNvSpPr>
           <p:nvPr>
             <p:ph type="pic" idx="2"/>
           </p:nvPr>
@@ -18806,7 +19382,9 @@
       <p:sp>
         <p:nvSpPr>
           <p:cNvPr id="90" name="Google Shape;90;p32"/>
-          <p:cNvSpPr txBox="1"/>
+          <p:cNvSpPr txBox="1">
+            <a:spLocks noGrp="1"/>
+          </p:cNvSpPr>
           <p:nvPr>
             <p:ph type="body" idx="1"/>
           </p:nvPr>
@@ -18929,13 +19507,17 @@
               <a:defRPr sz="900"/>
             </a:lvl9pPr>
           </a:lstStyle>
-          <a:p/>
+          <a:p>
+            <a:endParaRPr/>
+          </a:p>
         </p:txBody>
       </p:sp>
       <p:sp>
         <p:nvSpPr>
           <p:cNvPr id="91" name="Google Shape;91;p32"/>
-          <p:cNvSpPr txBox="1"/>
+          <p:cNvSpPr txBox="1">
+            <a:spLocks noGrp="1"/>
+          </p:cNvSpPr>
           <p:nvPr>
             <p:ph type="ftr" idx="11"/>
           </p:nvPr>
@@ -19058,13 +19640,17 @@
               <a:defRPr/>
             </a:lvl9pPr>
           </a:lstStyle>
-          <a:p/>
+          <a:p>
+            <a:endParaRPr/>
+          </a:p>
         </p:txBody>
       </p:sp>
       <p:sp>
         <p:nvSpPr>
           <p:cNvPr id="92" name="Google Shape;92;p32"/>
-          <p:cNvSpPr txBox="1"/>
+          <p:cNvSpPr txBox="1">
+            <a:spLocks noGrp="1"/>
+          </p:cNvSpPr>
           <p:nvPr>
             <p:ph type="sldNum" idx="12"/>
           </p:nvPr>
@@ -19163,6 +19749,16 @@
             </a:pPr>
             <a:fld id="{00000000-1234-1234-1234-123412341234}" type="slidenum">
               <a:rPr lang="en-US"/>
+              <a:pPr marL="0" lvl="0" indent="0" algn="r" rtl="0">
+                <a:spcBef>
+                  <a:spcPts val="0"/>
+                </a:spcBef>
+                <a:spcAft>
+                  <a:spcPts val="0"/>
+                </a:spcAft>
+                <a:buNone/>
+              </a:pPr>
+              <a:t>‹#›</a:t>
             </a:fld>
             <a:endParaRPr lang="en-US"/>
           </a:p>
@@ -19171,7 +19767,9 @@
       <p:sp>
         <p:nvSpPr>
           <p:cNvPr id="93" name="Google Shape;93;p32"/>
-          <p:cNvSpPr txBox="1"/>
+          <p:cNvSpPr txBox="1">
+            <a:spLocks noGrp="1"/>
+          </p:cNvSpPr>
           <p:nvPr>
             <p:ph type="dt" idx="10"/>
           </p:nvPr>
@@ -19294,7 +19892,9 @@
               <a:defRPr/>
             </a:lvl9pPr>
           </a:lstStyle>
-          <a:p/>
+          <a:p>
+            <a:endParaRPr/>
+          </a:p>
         </p:txBody>
       </p:sp>
     </p:spTree>
@@ -19318,7 +19918,7 @@
     </p:bg>
     <p:spTree>
       <p:nvGrpSpPr>
-        <p:cNvPr id="9" name="Shape 9"/>
+        <p:cNvPr id="1" name="Shape 9"/>
         <p:cNvGrpSpPr/>
         <p:nvPr/>
       </p:nvGrpSpPr>
@@ -19536,6 +20136,7 @@
                 </a:spcAft>
                 <a:buNone/>
               </a:pPr>
+              <a:endParaRPr/>
             </a:p>
           </p:txBody>
         </p:sp>
@@ -19723,6 +20324,7 @@
                 </a:spcAft>
                 <a:buNone/>
               </a:pPr>
+              <a:endParaRPr/>
             </a:p>
           </p:txBody>
         </p:sp>
@@ -19766,6 +20368,7 @@
                 </a:spcAft>
                 <a:buNone/>
               </a:pPr>
+              <a:endParaRPr/>
             </a:p>
           </p:txBody>
         </p:sp>
@@ -19773,7 +20376,9 @@
       <p:sp>
         <p:nvSpPr>
           <p:cNvPr id="21" name="Google Shape;21;p23"/>
-          <p:cNvSpPr txBox="1"/>
+          <p:cNvSpPr txBox="1">
+            <a:spLocks noGrp="1"/>
+          </p:cNvSpPr>
           <p:nvPr>
             <p:ph type="title"/>
           </p:nvPr>
@@ -19940,13 +20545,17 @@
               </a:defRPr>
             </a:lvl9pPr>
           </a:lstStyle>
-          <a:p/>
+          <a:p>
+            <a:endParaRPr/>
+          </a:p>
         </p:txBody>
       </p:sp>
       <p:sp>
         <p:nvSpPr>
           <p:cNvPr id="22" name="Google Shape;22;p23"/>
-          <p:cNvSpPr txBox="1"/>
+          <p:cNvSpPr txBox="1">
+            <a:spLocks noGrp="1"/>
+          </p:cNvSpPr>
           <p:nvPr>
             <p:ph type="body" idx="1"/>
           </p:nvPr>
@@ -20177,13 +20786,17 @@
               </a:defRPr>
             </a:lvl9pPr>
           </a:lstStyle>
-          <a:p/>
+          <a:p>
+            <a:endParaRPr/>
+          </a:p>
         </p:txBody>
       </p:sp>
       <p:sp>
         <p:nvSpPr>
           <p:cNvPr id="23" name="Google Shape;23;p23"/>
-          <p:cNvSpPr txBox="1"/>
+          <p:cNvSpPr txBox="1">
+            <a:spLocks noGrp="1"/>
+          </p:cNvSpPr>
           <p:nvPr>
             <p:ph type="dt" idx="10"/>
           </p:nvPr>
@@ -20378,13 +20991,17 @@
               </a:defRPr>
             </a:lvl9pPr>
           </a:lstStyle>
-          <a:p/>
+          <a:p>
+            <a:endParaRPr/>
+          </a:p>
         </p:txBody>
       </p:sp>
       <p:sp>
         <p:nvSpPr>
           <p:cNvPr id="24" name="Google Shape;24;p23"/>
-          <p:cNvSpPr txBox="1"/>
+          <p:cNvSpPr txBox="1">
+            <a:spLocks noGrp="1"/>
+          </p:cNvSpPr>
           <p:nvPr>
             <p:ph type="ftr" idx="11"/>
           </p:nvPr>
@@ -20579,13 +21196,17 @@
               </a:defRPr>
             </a:lvl9pPr>
           </a:lstStyle>
-          <a:p/>
+          <a:p>
+            <a:endParaRPr/>
+          </a:p>
         </p:txBody>
       </p:sp>
       <p:sp>
         <p:nvSpPr>
           <p:cNvPr id="25" name="Google Shape;25;p23"/>
-          <p:cNvSpPr txBox="1"/>
+          <p:cNvSpPr txBox="1">
+            <a:spLocks noGrp="1"/>
+          </p:cNvSpPr>
           <p:nvPr>
             <p:ph type="sldNum" idx="12"/>
           </p:nvPr>
@@ -20756,6 +21377,16 @@
             </a:pPr>
             <a:fld id="{00000000-1234-1234-1234-123412341234}" type="slidenum">
               <a:rPr lang="en-US"/>
+              <a:pPr marL="0" lvl="0" indent="0" algn="r" rtl="0">
+                <a:spcBef>
+                  <a:spcPts val="0"/>
+                </a:spcBef>
+                <a:spcAft>
+                  <a:spcPts val="0"/>
+                </a:spcAft>
+                <a:buNone/>
+              </a:pPr>
+              <a:t>‹#›</a:t>
             </a:fld>
             <a:endParaRPr lang="en-US"/>
           </a:p>
@@ -21481,7 +22112,7 @@
     <p:bg>
       <p:bgPr>
         <a:blipFill>
-          <a:blip r:embed="rId1"/>
+          <a:blip r:embed="rId3"/>
           <a:stretch>
             <a:fillRect/>
           </a:stretch>
@@ -21491,7 +22122,7 @@
     </p:bg>
     <p:spTree>
       <p:nvGrpSpPr>
-        <p:cNvPr id="146" name="Shape 146"/>
+        <p:cNvPr id="1" name="Shape 146"/>
         <p:cNvGrpSpPr/>
         <p:nvPr/>
       </p:nvGrpSpPr>
@@ -21506,7 +22137,9 @@
       <p:sp>
         <p:nvSpPr>
           <p:cNvPr id="147" name="Google Shape;147;p1"/>
-          <p:cNvSpPr txBox="1"/>
+          <p:cNvSpPr txBox="1">
+            <a:spLocks noGrp="1"/>
+          </p:cNvSpPr>
           <p:nvPr>
             <p:ph type="ctrTitle"/>
           </p:nvPr>
@@ -21544,8 +22177,20 @@
               <a:buFont typeface="Arial" panose="020B0604020202020204"/>
               <a:buNone/>
             </a:pPr>
+            <a:r>
+              <a:rPr lang="en-US" sz="2200" dirty="0">
+                <a:solidFill>
+                  <a:srgbClr val="1F1F1F"/>
+                </a:solidFill>
+                <a:latin typeface="Arial" panose="020B0604020202020204"/>
+                <a:ea typeface="Arial" panose="020B0604020202020204"/>
+                <a:cs typeface="Arial" panose="020B0604020202020204"/>
+                <a:sym typeface="Arial" panose="020B0604020202020204"/>
+              </a:rPr>
+              <a:t/>
+            </a:r>
             <a:br>
-              <a:rPr lang="en-US" sz="2200">
+              <a:rPr lang="en-US" sz="2200" dirty="0">
                 <a:solidFill>
                   <a:srgbClr val="1F1F1F"/>
                 </a:solidFill>
@@ -21555,8 +22200,20 @@
                 <a:sym typeface="Arial" panose="020B0604020202020204"/>
               </a:rPr>
             </a:br>
+            <a:r>
+              <a:rPr lang="en-US" sz="2200" dirty="0">
+                <a:solidFill>
+                  <a:srgbClr val="1F1F1F"/>
+                </a:solidFill>
+                <a:latin typeface="Arial" panose="020B0604020202020204"/>
+                <a:ea typeface="Arial" panose="020B0604020202020204"/>
+                <a:cs typeface="Arial" panose="020B0604020202020204"/>
+                <a:sym typeface="Arial" panose="020B0604020202020204"/>
+              </a:rPr>
+              <a:t/>
+            </a:r>
             <a:br>
-              <a:rPr lang="en-US" sz="2200">
+              <a:rPr lang="en-US" sz="2200" dirty="0">
                 <a:solidFill>
                   <a:srgbClr val="1F1F1F"/>
                 </a:solidFill>
@@ -21566,8 +22223,20 @@
                 <a:sym typeface="Arial" panose="020B0604020202020204"/>
               </a:rPr>
             </a:br>
+            <a:r>
+              <a:rPr lang="en-US" sz="2200" dirty="0">
+                <a:solidFill>
+                  <a:srgbClr val="1F1F1F"/>
+                </a:solidFill>
+                <a:latin typeface="Arial" panose="020B0604020202020204"/>
+                <a:ea typeface="Arial" panose="020B0604020202020204"/>
+                <a:cs typeface="Arial" panose="020B0604020202020204"/>
+                <a:sym typeface="Arial" panose="020B0604020202020204"/>
+              </a:rPr>
+              <a:t/>
+            </a:r>
             <a:br>
-              <a:rPr lang="en-US" sz="2200">
+              <a:rPr lang="en-US" sz="2200" dirty="0">
                 <a:solidFill>
                   <a:srgbClr val="1F1F1F"/>
                 </a:solidFill>
@@ -21577,16 +22246,17 @@
                 <a:sym typeface="Arial" panose="020B0604020202020204"/>
               </a:rPr>
             </a:br>
-            <a:br>
-              <a:rPr lang="en-US" sz="2200">
+            <a:r>
+              <a:rPr lang="en-US" sz="2200" dirty="0">
                 <a:latin typeface="Arial" panose="020B0604020202020204"/>
                 <a:ea typeface="Arial" panose="020B0604020202020204"/>
                 <a:cs typeface="Arial" panose="020B0604020202020204"/>
                 <a:sym typeface="Arial" panose="020B0604020202020204"/>
               </a:rPr>
-            </a:br>
+              <a:t/>
+            </a:r>
             <a:br>
-              <a:rPr lang="en-US" sz="2200">
+              <a:rPr lang="en-US" sz="2200" dirty="0">
                 <a:latin typeface="Arial" panose="020B0604020202020204"/>
                 <a:ea typeface="Arial" panose="020B0604020202020204"/>
                 <a:cs typeface="Arial" panose="020B0604020202020204"/>
@@ -21594,7 +22264,24 @@
               </a:rPr>
             </a:br>
             <a:r>
-              <a:rPr lang="en-US" sz="3200" b="1">
+              <a:rPr lang="en-US" sz="2200" dirty="0">
+                <a:latin typeface="Arial" panose="020B0604020202020204"/>
+                <a:ea typeface="Arial" panose="020B0604020202020204"/>
+                <a:cs typeface="Arial" panose="020B0604020202020204"/>
+                <a:sym typeface="Arial" panose="020B0604020202020204"/>
+              </a:rPr>
+              <a:t/>
+            </a:r>
+            <a:br>
+              <a:rPr lang="en-US" sz="2200" dirty="0">
+                <a:latin typeface="Arial" panose="020B0604020202020204"/>
+                <a:ea typeface="Arial" panose="020B0604020202020204"/>
+                <a:cs typeface="Arial" panose="020B0604020202020204"/>
+                <a:sym typeface="Arial" panose="020B0604020202020204"/>
+              </a:rPr>
+            </a:br>
+            <a:r>
+              <a:rPr lang="en-US" sz="3200" b="1" dirty="0">
                 <a:solidFill>
                   <a:schemeClr val="lt1"/>
                 </a:solidFill>
@@ -21605,7 +22292,7 @@
               </a:rPr>
               <a:t>Advanced UI Development Techniques: Mastering the Art of Engaging and Scalable Interfaces</a:t>
             </a:r>
-            <a:endParaRPr sz="3200" b="1">
+            <a:endParaRPr sz="3200" b="1" dirty="0">
               <a:solidFill>
                 <a:schemeClr val="lt1"/>
               </a:solidFill>
@@ -21626,10 +22313,14 @@
               <a:buFont typeface="Trebuchet MS" panose="020B0603020202020204"/>
               <a:buNone/>
             </a:pPr>
+            <a:r>
+              <a:rPr lang="en-US" dirty="0"/>
+              <a:t/>
+            </a:r>
             <a:br>
-              <a:rPr lang="en-US"/>
+              <a:rPr lang="en-US" dirty="0"/>
             </a:br>
-            <a:endParaRPr>
+            <a:endParaRPr dirty="0">
               <a:solidFill>
                 <a:schemeClr val="lt1"/>
               </a:solidFill>
@@ -21640,7 +22331,9 @@
       <p:sp>
         <p:nvSpPr>
           <p:cNvPr id="148" name="Google Shape;148;p1"/>
-          <p:cNvSpPr txBox="1"/>
+          <p:cNvSpPr txBox="1">
+            <a:spLocks noGrp="1"/>
+          </p:cNvSpPr>
           <p:nvPr>
             <p:ph type="subTitle" idx="1"/>
           </p:nvPr>
@@ -21703,6 +22396,10 @@
               <a:buSzPct val="80000"/>
               <a:buNone/>
             </a:pPr>
+            <a:r>
+              <a:rPr lang="en-US"/>
+              <a:t/>
+            </a:r>
             <a:br>
               <a:rPr lang="en-US"/>
             </a:br>
@@ -21717,7 +22414,7 @@
           <p:nvPr/>
         </p:nvPicPr>
         <p:blipFill rotWithShape="1">
-          <a:blip r:embed="rId2"/>
+          <a:blip r:embed="rId4"/>
           <a:srcRect/>
           <a:stretch>
             <a:fillRect/>
@@ -21949,14 +22646,14 @@
                 </p:childTnLst>
               </p:cTn>
               <p:prevCondLst>
-                <p:cond evt="onPrev">
+                <p:cond evt="onPrev" delay="0">
                   <p:tgtEl>
                     <p:sldTgt/>
                   </p:tgtEl>
                 </p:cond>
               </p:prevCondLst>
               <p:nextCondLst>
-                <p:cond evt="onNext">
+                <p:cond evt="onNext" delay="0">
                   <p:tgtEl>
                     <p:sldTgt/>
                   </p:tgtEl>
@@ -21976,7 +22673,7 @@
   <p:cSld>
     <p:spTree>
       <p:nvGrpSpPr>
-        <p:cNvPr id="229" name="Shape 229"/>
+        <p:cNvPr id="1" name="Shape 229"/>
         <p:cNvGrpSpPr/>
         <p:nvPr/>
       </p:nvGrpSpPr>
@@ -21991,7 +22688,9 @@
       <p:sp>
         <p:nvSpPr>
           <p:cNvPr id="230" name="Google Shape;230;p10"/>
-          <p:cNvSpPr txBox="1"/>
+          <p:cNvSpPr txBox="1">
+            <a:spLocks noGrp="1"/>
+          </p:cNvSpPr>
           <p:nvPr>
             <p:ph type="title"/>
           </p:nvPr>
@@ -22041,15 +22740,6 @@
               </a:rPr>
               <a:t>Navigation Drawer</a:t>
             </a:r>
-            <a:endParaRPr lang="en-US" sz="2900" b="1">
-              <a:solidFill>
-                <a:schemeClr val="dk1"/>
-              </a:solidFill>
-              <a:latin typeface="Calibri" panose="020F0502020204030204"/>
-              <a:ea typeface="Calibri" panose="020F0502020204030204"/>
-              <a:cs typeface="Calibri" panose="020F0502020204030204"/>
-              <a:sym typeface="Calibri" panose="020F0502020204030204"/>
-            </a:endParaRPr>
           </a:p>
         </p:txBody>
       </p:sp>
@@ -22218,15 +22908,6 @@
               </a:rPr>
               <a:t>​</a:t>
             </a:r>
-            <a:endParaRPr lang="en-US" sz="1800">
-              <a:solidFill>
-                <a:schemeClr val="dk1"/>
-              </a:solidFill>
-              <a:latin typeface="Calibri" panose="020F0502020204030204"/>
-              <a:ea typeface="Calibri" panose="020F0502020204030204"/>
-              <a:cs typeface="Calibri" panose="020F0502020204030204"/>
-              <a:sym typeface="Calibri" panose="020F0502020204030204"/>
-            </a:endParaRPr>
           </a:p>
           <a:p>
             <a:pPr marL="228600" marR="0" lvl="0" indent="-114300" algn="l" rtl="0">
@@ -22292,15 +22973,6 @@
               </a:rPr>
               <a:t>​</a:t>
             </a:r>
-            <a:endParaRPr lang="en-US" sz="1800">
-              <a:solidFill>
-                <a:schemeClr val="dk1"/>
-              </a:solidFill>
-              <a:latin typeface="Calibri" panose="020F0502020204030204"/>
-              <a:ea typeface="Calibri" panose="020F0502020204030204"/>
-              <a:cs typeface="Calibri" panose="020F0502020204030204"/>
-              <a:sym typeface="Calibri" panose="020F0502020204030204"/>
-            </a:endParaRPr>
           </a:p>
           <a:p>
             <a:pPr marL="228600" marR="0" lvl="0" indent="-114300" algn="l" rtl="0">
@@ -22366,15 +23038,6 @@
               </a:rPr>
               <a:t>​</a:t>
             </a:r>
-            <a:endParaRPr lang="en-US" sz="1800">
-              <a:solidFill>
-                <a:schemeClr val="dk1"/>
-              </a:solidFill>
-              <a:latin typeface="Calibri" panose="020F0502020204030204"/>
-              <a:ea typeface="Calibri" panose="020F0502020204030204"/>
-              <a:cs typeface="Calibri" panose="020F0502020204030204"/>
-              <a:sym typeface="Calibri" panose="020F0502020204030204"/>
-            </a:endParaRPr>
           </a:p>
           <a:p>
             <a:pPr marL="228600" marR="0" lvl="0" indent="-114300" algn="l" rtl="0">
@@ -22459,7 +23122,7 @@
           <p:nvPr/>
         </p:nvPicPr>
         <p:blipFill rotWithShape="1">
-          <a:blip r:embed="rId1"/>
+          <a:blip r:embed="rId3"/>
           <a:srcRect/>
           <a:stretch>
             <a:fillRect/>
@@ -23150,14 +23813,14 @@
                 </p:childTnLst>
               </p:cTn>
               <p:prevCondLst>
-                <p:cond evt="onPrev">
+                <p:cond evt="onPrev" delay="0">
                   <p:tgtEl>
                     <p:sldTgt/>
                   </p:tgtEl>
                 </p:cond>
               </p:prevCondLst>
               <p:nextCondLst>
-                <p:cond evt="onNext">
+                <p:cond evt="onNext" delay="0">
                   <p:tgtEl>
                     <p:sldTgt/>
                   </p:tgtEl>
@@ -23177,7 +23840,7 @@
   <p:cSld>
     <p:spTree>
       <p:nvGrpSpPr>
-        <p:cNvPr id="236" name="Shape 236"/>
+        <p:cNvPr id="1" name="Shape 236"/>
         <p:cNvGrpSpPr/>
         <p:nvPr/>
       </p:nvGrpSpPr>
@@ -23192,7 +23855,9 @@
       <p:sp>
         <p:nvSpPr>
           <p:cNvPr id="237" name="Google Shape;237;p11"/>
-          <p:cNvSpPr txBox="1"/>
+          <p:cNvSpPr txBox="1">
+            <a:spLocks noGrp="1"/>
+          </p:cNvSpPr>
           <p:nvPr>
             <p:ph type="title"/>
           </p:nvPr>
@@ -23242,28 +23907,21 @@
               </a:rPr>
               <a:t>Example of Navigation Drawer </a:t>
             </a:r>
-            <a:endParaRPr lang="en-US" sz="2900" b="1">
-              <a:solidFill>
-                <a:schemeClr val="dk1"/>
-              </a:solidFill>
-              <a:latin typeface="Calibri" panose="020F0502020204030204"/>
-              <a:ea typeface="Calibri" panose="020F0502020204030204"/>
-              <a:cs typeface="Calibri" panose="020F0502020204030204"/>
-              <a:sym typeface="Calibri" panose="020F0502020204030204"/>
-            </a:endParaRPr>
           </a:p>
         </p:txBody>
       </p:sp>
       <p:pic>
         <p:nvPicPr>
           <p:cNvPr id="238" name="Google Shape;238;p11" descr="A screen shot of a computer program&#10;&#10;Description automatically generated"/>
-          <p:cNvPicPr preferRelativeResize="0"/>
+          <p:cNvPicPr preferRelativeResize="0">
+            <a:picLocks noGrp="1"/>
+          </p:cNvPicPr>
           <p:nvPr>
             <p:ph type="body" idx="1"/>
           </p:nvPr>
         </p:nvPicPr>
         <p:blipFill rotWithShape="1">
-          <a:blip r:embed="rId1"/>
+          <a:blip r:embed="rId3"/>
           <a:srcRect/>
           <a:stretch>
             <a:fillRect/>
@@ -23348,7 +24006,7 @@
           <p:nvPr/>
         </p:nvPicPr>
         <p:blipFill rotWithShape="1">
-          <a:blip r:embed="rId2"/>
+          <a:blip r:embed="rId4"/>
           <a:srcRect/>
           <a:stretch>
             <a:fillRect/>
@@ -23382,7 +24040,7 @@
           <p:nvPr/>
         </p:nvPicPr>
         <p:blipFill rotWithShape="1">
-          <a:blip r:embed="rId3"/>
+          <a:blip r:embed="rId5"/>
           <a:srcRect/>
           <a:stretch>
             <a:fillRect/>
@@ -23449,7 +24107,7 @@
           <p:nvPr/>
         </p:nvPicPr>
         <p:blipFill rotWithShape="1">
-          <a:blip r:embed="rId4"/>
+          <a:blip r:embed="rId6"/>
           <a:srcRect/>
           <a:stretch>
             <a:fillRect/>
@@ -23803,14 +24461,14 @@
                 </p:childTnLst>
               </p:cTn>
               <p:prevCondLst>
-                <p:cond evt="onPrev">
+                <p:cond evt="onPrev" delay="0">
                   <p:tgtEl>
                     <p:sldTgt/>
                   </p:tgtEl>
                 </p:cond>
               </p:prevCondLst>
               <p:nextCondLst>
-                <p:cond evt="onNext">
+                <p:cond evt="onNext" delay="0">
                   <p:tgtEl>
                     <p:sldTgt/>
                   </p:tgtEl>
@@ -23830,7 +24488,7 @@
   <p:cSld>
     <p:spTree>
       <p:nvGrpSpPr>
-        <p:cNvPr id="248" name="Shape 248"/>
+        <p:cNvPr id="1" name="Shape 248"/>
         <p:cNvGrpSpPr/>
         <p:nvPr/>
       </p:nvGrpSpPr>
@@ -23845,7 +24503,9 @@
       <p:sp>
         <p:nvSpPr>
           <p:cNvPr id="249" name="Google Shape;249;p12"/>
-          <p:cNvSpPr txBox="1"/>
+          <p:cNvSpPr txBox="1">
+            <a:spLocks noGrp="1"/>
+          </p:cNvSpPr>
           <p:nvPr>
             <p:ph type="title"/>
           </p:nvPr>
@@ -23895,15 +24555,6 @@
               </a:rPr>
               <a:t>Bottom Sheet</a:t>
             </a:r>
-            <a:endParaRPr lang="en-US" sz="2900" b="1">
-              <a:solidFill>
-                <a:schemeClr val="dk1"/>
-              </a:solidFill>
-              <a:latin typeface="Calibri" panose="020F0502020204030204"/>
-              <a:ea typeface="Calibri" panose="020F0502020204030204"/>
-              <a:cs typeface="Calibri" panose="020F0502020204030204"/>
-              <a:sym typeface="Calibri" panose="020F0502020204030204"/>
-            </a:endParaRPr>
           </a:p>
         </p:txBody>
       </p:sp>
@@ -23991,15 +24642,6 @@
               </a:rPr>
               <a:t>​</a:t>
             </a:r>
-            <a:endParaRPr lang="en-US" sz="1800">
-              <a:solidFill>
-                <a:schemeClr val="dk1"/>
-              </a:solidFill>
-              <a:latin typeface="Calibri" panose="020F0502020204030204"/>
-              <a:ea typeface="Calibri" panose="020F0502020204030204"/>
-              <a:cs typeface="Calibri" panose="020F0502020204030204"/>
-              <a:sym typeface="Calibri" panose="020F0502020204030204"/>
-            </a:endParaRPr>
           </a:p>
           <a:p>
             <a:pPr marL="228600" marR="0" lvl="0" indent="-114300" algn="l" rtl="0">
@@ -24065,15 +24707,6 @@
               </a:rPr>
               <a:t>​</a:t>
             </a:r>
-            <a:endParaRPr lang="en-US" sz="1800">
-              <a:solidFill>
-                <a:schemeClr val="dk1"/>
-              </a:solidFill>
-              <a:latin typeface="Calibri" panose="020F0502020204030204"/>
-              <a:ea typeface="Calibri" panose="020F0502020204030204"/>
-              <a:cs typeface="Calibri" panose="020F0502020204030204"/>
-              <a:sym typeface="Calibri" panose="020F0502020204030204"/>
-            </a:endParaRPr>
           </a:p>
           <a:p>
             <a:pPr marL="228600" marR="0" lvl="0" indent="-114300" algn="l" rtl="0">
@@ -24158,7 +24791,7 @@
           <p:nvPr/>
         </p:nvPicPr>
         <p:blipFill rotWithShape="1">
-          <a:blip r:embed="rId1"/>
+          <a:blip r:embed="rId3"/>
           <a:srcRect/>
           <a:stretch>
             <a:fillRect/>
@@ -24605,14 +25238,14 @@
                 </p:childTnLst>
               </p:cTn>
               <p:prevCondLst>
-                <p:cond evt="onPrev">
+                <p:cond evt="onPrev" delay="0">
                   <p:tgtEl>
                     <p:sldTgt/>
                   </p:tgtEl>
                 </p:cond>
               </p:prevCondLst>
               <p:nextCondLst>
-                <p:cond evt="onNext">
+                <p:cond evt="onNext" delay="0">
                   <p:tgtEl>
                     <p:sldTgt/>
                   </p:tgtEl>
@@ -24632,7 +25265,7 @@
   <p:cSld>
     <p:spTree>
       <p:nvGrpSpPr>
-        <p:cNvPr id="255" name="Shape 255"/>
+        <p:cNvPr id="1" name="Shape 255"/>
         <p:cNvGrpSpPr/>
         <p:nvPr/>
       </p:nvGrpSpPr>
@@ -24647,7 +25280,9 @@
       <p:sp>
         <p:nvSpPr>
           <p:cNvPr id="256" name="Google Shape;256;p13"/>
-          <p:cNvSpPr txBox="1"/>
+          <p:cNvSpPr txBox="1">
+            <a:spLocks noGrp="1"/>
+          </p:cNvSpPr>
           <p:nvPr>
             <p:ph type="title"/>
           </p:nvPr>
@@ -24697,28 +25332,21 @@
               </a:rPr>
               <a:t>Example of Bottom Sheet </a:t>
             </a:r>
-            <a:endParaRPr lang="en-US" sz="2900" b="1">
-              <a:solidFill>
-                <a:schemeClr val="dk1"/>
-              </a:solidFill>
-              <a:latin typeface="Calibri" panose="020F0502020204030204"/>
-              <a:ea typeface="Calibri" panose="020F0502020204030204"/>
-              <a:cs typeface="Calibri" panose="020F0502020204030204"/>
-              <a:sym typeface="Calibri" panose="020F0502020204030204"/>
-            </a:endParaRPr>
           </a:p>
         </p:txBody>
       </p:sp>
       <p:pic>
         <p:nvPicPr>
           <p:cNvPr id="257" name="Google Shape;257;p13" descr="A screen shot of a computer program&#10;&#10;Description automatically generated"/>
-          <p:cNvPicPr preferRelativeResize="0"/>
+          <p:cNvPicPr preferRelativeResize="0">
+            <a:picLocks noGrp="1"/>
+          </p:cNvPicPr>
           <p:nvPr>
             <p:ph type="body" idx="1"/>
           </p:nvPr>
         </p:nvPicPr>
         <p:blipFill rotWithShape="1">
-          <a:blip r:embed="rId1"/>
+          <a:blip r:embed="rId3"/>
           <a:srcRect/>
           <a:stretch>
             <a:fillRect/>
@@ -24815,7 +25443,7 @@
           <p:nvPr/>
         </p:nvPicPr>
         <p:blipFill rotWithShape="1">
-          <a:blip r:embed="rId2"/>
+          <a:blip r:embed="rId4"/>
           <a:srcRect/>
           <a:stretch>
             <a:fillRect/>
@@ -24849,7 +25477,7 @@
           <p:nvPr/>
         </p:nvPicPr>
         <p:blipFill rotWithShape="1">
-          <a:blip r:embed="rId3"/>
+          <a:blip r:embed="rId5"/>
           <a:srcRect/>
           <a:stretch>
             <a:fillRect/>
@@ -24916,7 +25544,7 @@
           <p:nvPr/>
         </p:nvPicPr>
         <p:blipFill rotWithShape="1">
-          <a:blip r:embed="rId4"/>
+          <a:blip r:embed="rId6"/>
           <a:srcRect/>
           <a:stretch>
             <a:fillRect/>
@@ -25270,14 +25898,14 @@
                 </p:childTnLst>
               </p:cTn>
               <p:prevCondLst>
-                <p:cond evt="onPrev">
+                <p:cond evt="onPrev" delay="0">
                   <p:tgtEl>
                     <p:sldTgt/>
                   </p:tgtEl>
                 </p:cond>
               </p:prevCondLst>
               <p:nextCondLst>
-                <p:cond evt="onNext">
+                <p:cond evt="onNext" delay="0">
                   <p:tgtEl>
                     <p:sldTgt/>
                   </p:tgtEl>
@@ -25297,7 +25925,7 @@
   <p:cSld>
     <p:spTree>
       <p:nvGrpSpPr>
-        <p:cNvPr id="267" name="Shape 267"/>
+        <p:cNvPr id="1" name="Shape 267"/>
         <p:cNvGrpSpPr/>
         <p:nvPr/>
       </p:nvGrpSpPr>
@@ -25312,7 +25940,9 @@
       <p:sp>
         <p:nvSpPr>
           <p:cNvPr id="268" name="Google Shape;268;p14"/>
-          <p:cNvSpPr txBox="1"/>
+          <p:cNvSpPr txBox="1">
+            <a:spLocks noGrp="1"/>
+          </p:cNvSpPr>
           <p:nvPr>
             <p:ph type="title"/>
           </p:nvPr>
@@ -25360,36 +25990,17 @@
                 <a:cs typeface="Calibri" panose="020F0502020204030204"/>
                 <a:sym typeface="Calibri" panose="020F0502020204030204"/>
               </a:rPr>
-              <a:t>Custom</a:t>
+              <a:t>Custom Widgets</a:t>
             </a:r>
-            <a:r>
-              <a:rPr lang="en-US" sz="2900" b="1">
-                <a:solidFill>
-                  <a:schemeClr val="dk1"/>
-                </a:solidFill>
-                <a:latin typeface="Calibri" panose="020F0502020204030204"/>
-                <a:ea typeface="Calibri" panose="020F0502020204030204"/>
-                <a:cs typeface="Calibri" panose="020F0502020204030204"/>
-                <a:sym typeface="Calibri" panose="020F0502020204030204"/>
-              </a:rPr>
-              <a:t> Widgets</a:t>
-            </a:r>
-            <a:endParaRPr lang="en-US" sz="2900" b="1">
-              <a:solidFill>
-                <a:schemeClr val="dk1"/>
-              </a:solidFill>
-              <a:latin typeface="Calibri" panose="020F0502020204030204"/>
-              <a:ea typeface="Calibri" panose="020F0502020204030204"/>
-              <a:cs typeface="Calibri" panose="020F0502020204030204"/>
-              <a:sym typeface="Calibri" panose="020F0502020204030204"/>
-            </a:endParaRPr>
           </a:p>
         </p:txBody>
       </p:sp>
       <p:sp>
         <p:nvSpPr>
           <p:cNvPr id="269" name="Google Shape;269;p14"/>
-          <p:cNvSpPr txBox="1"/>
+          <p:cNvSpPr txBox="1">
+            <a:spLocks noGrp="1"/>
+          </p:cNvSpPr>
           <p:nvPr>
             <p:ph type="body" idx="1"/>
           </p:nvPr>
@@ -25561,15 +26172,6 @@
               </a:rPr>
               <a:t>​</a:t>
             </a:r>
-            <a:endParaRPr lang="en-US" sz="1800">
-              <a:solidFill>
-                <a:schemeClr val="dk1"/>
-              </a:solidFill>
-              <a:latin typeface="Calibri" panose="020F0502020204030204"/>
-              <a:ea typeface="Calibri" panose="020F0502020204030204"/>
-              <a:cs typeface="Calibri" panose="020F0502020204030204"/>
-              <a:sym typeface="Calibri" panose="020F0502020204030204"/>
-            </a:endParaRPr>
           </a:p>
           <a:p>
             <a:pPr marL="228600" marR="0" lvl="0" indent="-114300" algn="l" rtl="0">
@@ -25635,15 +26237,6 @@
               </a:rPr>
               <a:t>​</a:t>
             </a:r>
-            <a:endParaRPr lang="en-US" sz="1800">
-              <a:solidFill>
-                <a:schemeClr val="dk1"/>
-              </a:solidFill>
-              <a:latin typeface="Calibri" panose="020F0502020204030204"/>
-              <a:ea typeface="Calibri" panose="020F0502020204030204"/>
-              <a:cs typeface="Calibri" panose="020F0502020204030204"/>
-              <a:sym typeface="Calibri" panose="020F0502020204030204"/>
-            </a:endParaRPr>
           </a:p>
           <a:p>
             <a:pPr marL="228600" marR="0" lvl="0" indent="-114300" algn="l" rtl="0">
@@ -25756,15 +26349,6 @@
               </a:rPr>
               <a:t>​</a:t>
             </a:r>
-            <a:endParaRPr lang="en-US" sz="1800">
-              <a:solidFill>
-                <a:schemeClr val="dk1"/>
-              </a:solidFill>
-              <a:latin typeface="Calibri" panose="020F0502020204030204"/>
-              <a:ea typeface="Calibri" panose="020F0502020204030204"/>
-              <a:cs typeface="Calibri" panose="020F0502020204030204"/>
-              <a:sym typeface="Calibri" panose="020F0502020204030204"/>
-            </a:endParaRPr>
           </a:p>
           <a:p>
             <a:pPr marL="228600" marR="0" lvl="0" indent="-114300" algn="l" rtl="0">
@@ -25830,15 +26414,6 @@
               </a:rPr>
               <a:t>​</a:t>
             </a:r>
-            <a:endParaRPr lang="en-US" sz="1800">
-              <a:solidFill>
-                <a:schemeClr val="dk1"/>
-              </a:solidFill>
-              <a:latin typeface="Calibri" panose="020F0502020204030204"/>
-              <a:ea typeface="Calibri" panose="020F0502020204030204"/>
-              <a:cs typeface="Calibri" panose="020F0502020204030204"/>
-              <a:sym typeface="Calibri" panose="020F0502020204030204"/>
-            </a:endParaRPr>
           </a:p>
           <a:p>
             <a:pPr marL="228600" marR="0" lvl="0" indent="-114300" algn="l" rtl="0">
@@ -25904,15 +26479,6 @@
               </a:rPr>
               <a:t>​</a:t>
             </a:r>
-            <a:endParaRPr lang="en-US" sz="1800">
-              <a:solidFill>
-                <a:schemeClr val="dk1"/>
-              </a:solidFill>
-              <a:latin typeface="Calibri" panose="020F0502020204030204"/>
-              <a:ea typeface="Calibri" panose="020F0502020204030204"/>
-              <a:cs typeface="Calibri" panose="020F0502020204030204"/>
-              <a:sym typeface="Calibri" panose="020F0502020204030204"/>
-            </a:endParaRPr>
           </a:p>
           <a:p>
             <a:pPr marL="228600" marR="0" lvl="0" indent="-114300" algn="l" rtl="0">
@@ -25997,7 +26563,7 @@
           <p:nvPr/>
         </p:nvPicPr>
         <p:blipFill rotWithShape="1">
-          <a:blip r:embed="rId1"/>
+          <a:blip r:embed="rId3"/>
           <a:srcRect/>
           <a:stretch>
             <a:fillRect/>
@@ -26863,14 +27429,14 @@
                 </p:childTnLst>
               </p:cTn>
               <p:prevCondLst>
-                <p:cond evt="onPrev">
+                <p:cond evt="onPrev" delay="0">
                   <p:tgtEl>
                     <p:sldTgt/>
                   </p:tgtEl>
                 </p:cond>
               </p:prevCondLst>
               <p:nextCondLst>
-                <p:cond evt="onNext">
+                <p:cond evt="onNext" delay="0">
                   <p:tgtEl>
                     <p:sldTgt/>
                   </p:tgtEl>
@@ -26898,7 +27464,7 @@
     </p:bg>
     <p:spTree>
       <p:nvGrpSpPr>
-        <p:cNvPr id="277" name="Shape 277"/>
+        <p:cNvPr id="1" name="Shape 277"/>
         <p:cNvGrpSpPr/>
         <p:nvPr/>
       </p:nvGrpSpPr>
@@ -26913,7 +27479,9 @@
       <p:sp>
         <p:nvSpPr>
           <p:cNvPr id="278" name="Google Shape;278;p15"/>
-          <p:cNvSpPr txBox="1"/>
+          <p:cNvSpPr txBox="1">
+            <a:spLocks noGrp="1"/>
+          </p:cNvSpPr>
           <p:nvPr>
             <p:ph type="title"/>
           </p:nvPr>
@@ -26982,7 +27550,7 @@
           <p:nvPr/>
         </p:nvPicPr>
         <p:blipFill rotWithShape="1">
-          <a:blip r:embed="rId1"/>
+          <a:blip r:embed="rId3"/>
           <a:srcRect/>
           <a:stretch>
             <a:fillRect/>
@@ -27076,19 +27644,7 @@
                 <a:cs typeface="Calibri" panose="020F0502020204030204"/>
                 <a:sym typeface="Calibri" panose="020F0502020204030204"/>
               </a:rPr>
-              <a:t>Designing Effective Layouts for Various Screen Sizes</a:t>
-            </a:r>
-            <a:r>
-              <a:rPr lang="en-US" sz="1800">
-                <a:solidFill>
-                  <a:schemeClr val="dk1"/>
-                </a:solidFill>
-                <a:latin typeface="Calibri" panose="020F0502020204030204"/>
-                <a:ea typeface="Calibri" panose="020F0502020204030204"/>
-                <a:cs typeface="Calibri" panose="020F0502020204030204"/>
-                <a:sym typeface="Calibri" panose="020F0502020204030204"/>
-              </a:rPr>
-              <a:t>​</a:t>
+              <a:t>Designing Effective Layouts for Various Screen Sizes​</a:t>
             </a:r>
             <a:br>
               <a:rPr lang="en-US" sz="1800">
@@ -27113,15 +27669,6 @@
               </a:rPr>
               <a:t>​</a:t>
             </a:r>
-            <a:endParaRPr lang="en-US" sz="1800">
-              <a:solidFill>
-                <a:schemeClr val="dk1"/>
-              </a:solidFill>
-              <a:latin typeface="Calibri" panose="020F0502020204030204"/>
-              <a:ea typeface="Calibri" panose="020F0502020204030204"/>
-              <a:cs typeface="Calibri" panose="020F0502020204030204"/>
-              <a:sym typeface="Calibri" panose="020F0502020204030204"/>
-            </a:endParaRPr>
           </a:p>
           <a:p>
             <a:pPr marL="285750" marR="0" lvl="0" indent="-285750" algn="l" rtl="0">
@@ -27148,29 +27695,8 @@
                 <a:cs typeface="Calibri" panose="020F0502020204030204"/>
                 <a:sym typeface="Calibri" panose="020F0502020204030204"/>
               </a:rPr>
-              <a:t>Mastering Layout Managers and Techniques</a:t>
+              <a:t>Mastering Layout Managers and Techniques​</a:t>
             </a:r>
-            <a:r>
-              <a:rPr lang="en-US" sz="1800">
-                <a:solidFill>
-                  <a:schemeClr val="dk1"/>
-                </a:solidFill>
-                <a:latin typeface="Calibri" panose="020F0502020204030204"/>
-                <a:ea typeface="Calibri" panose="020F0502020204030204"/>
-                <a:cs typeface="Calibri" panose="020F0502020204030204"/>
-                <a:sym typeface="Calibri" panose="020F0502020204030204"/>
-              </a:rPr>
-              <a:t>​</a:t>
-            </a:r>
-            <a:endParaRPr lang="en-US" sz="1800">
-              <a:solidFill>
-                <a:schemeClr val="dk1"/>
-              </a:solidFill>
-              <a:latin typeface="Calibri" panose="020F0502020204030204"/>
-              <a:ea typeface="Calibri" panose="020F0502020204030204"/>
-              <a:cs typeface="Calibri" panose="020F0502020204030204"/>
-              <a:sym typeface="Calibri" panose="020F0502020204030204"/>
-            </a:endParaRPr>
           </a:p>
           <a:p>
             <a:pPr marL="0" marR="0" lvl="0" indent="0" algn="l" rtl="0">
@@ -27194,15 +27720,6 @@
               </a:rPr>
               <a:t>​</a:t>
             </a:r>
-            <a:endParaRPr lang="en-US" sz="1800">
-              <a:solidFill>
-                <a:schemeClr val="dk1"/>
-              </a:solidFill>
-              <a:latin typeface="Calibri" panose="020F0502020204030204"/>
-              <a:ea typeface="Calibri" panose="020F0502020204030204"/>
-              <a:cs typeface="Calibri" panose="020F0502020204030204"/>
-              <a:sym typeface="Calibri" panose="020F0502020204030204"/>
-            </a:endParaRPr>
           </a:p>
           <a:p>
             <a:pPr marL="285750" marR="0" lvl="0" indent="-285750" algn="l" rtl="0">
@@ -27229,19 +27746,7 @@
                 <a:cs typeface="Calibri" panose="020F0502020204030204"/>
                 <a:sym typeface="Calibri" panose="020F0502020204030204"/>
               </a:rPr>
-              <a:t>Implementing Responsive Design Principles</a:t>
-            </a:r>
-            <a:r>
-              <a:rPr lang="en-US" sz="1800">
-                <a:solidFill>
-                  <a:schemeClr val="dk1"/>
-                </a:solidFill>
-                <a:latin typeface="Calibri" panose="020F0502020204030204"/>
-                <a:ea typeface="Calibri" panose="020F0502020204030204"/>
-                <a:cs typeface="Calibri" panose="020F0502020204030204"/>
-                <a:sym typeface="Calibri" panose="020F0502020204030204"/>
-              </a:rPr>
-              <a:t>​</a:t>
+              <a:t>Implementing Responsive Design Principles​</a:t>
             </a:r>
             <a:endParaRPr sz="1800">
               <a:solidFill>
@@ -27262,7 +27767,7 @@
           <p:nvPr/>
         </p:nvPicPr>
         <p:blipFill rotWithShape="1">
-          <a:blip r:embed="rId2"/>
+          <a:blip r:embed="rId4"/>
           <a:srcRect/>
           <a:stretch>
             <a:fillRect/>
@@ -27701,14 +28206,14 @@
                 </p:childTnLst>
               </p:cTn>
               <p:prevCondLst>
-                <p:cond evt="onPrev">
+                <p:cond evt="onPrev" delay="0">
                   <p:tgtEl>
                     <p:sldTgt/>
                   </p:tgtEl>
                 </p:cond>
               </p:prevCondLst>
               <p:nextCondLst>
-                <p:cond evt="onNext">
+                <p:cond evt="onNext" delay="0">
                   <p:tgtEl>
                     <p:sldTgt/>
                   </p:tgtEl>
@@ -27728,7 +28233,7 @@
   <p:cSld>
     <p:spTree>
       <p:nvGrpSpPr>
-        <p:cNvPr id="285" name="Shape 285"/>
+        <p:cNvPr id="1" name="Shape 285"/>
         <p:cNvGrpSpPr/>
         <p:nvPr/>
       </p:nvGrpSpPr>
@@ -27743,7 +28248,9 @@
       <p:sp>
         <p:nvSpPr>
           <p:cNvPr id="286" name="Google Shape;286;p16"/>
-          <p:cNvSpPr txBox="1"/>
+          <p:cNvSpPr txBox="1">
+            <a:spLocks noGrp="1"/>
+          </p:cNvSpPr>
           <p:nvPr>
             <p:ph type="title"/>
           </p:nvPr>
@@ -27793,28 +28300,21 @@
               </a:rPr>
               <a:t>Example: UI Design of an Taxi-Booking Application</a:t>
             </a:r>
-            <a:endParaRPr lang="en-US" sz="2900">
-              <a:solidFill>
-                <a:schemeClr val="dk1"/>
-              </a:solidFill>
-              <a:latin typeface="Calibri" panose="020F0502020204030204"/>
-              <a:ea typeface="Calibri" panose="020F0502020204030204"/>
-              <a:cs typeface="Calibri" panose="020F0502020204030204"/>
-              <a:sym typeface="Calibri" panose="020F0502020204030204"/>
-            </a:endParaRPr>
           </a:p>
         </p:txBody>
       </p:sp>
       <p:pic>
         <p:nvPicPr>
           <p:cNvPr id="287" name="Google Shape;287;p16" descr="Screens screenshots of a phone&#10;&#10;Description automatically generated"/>
-          <p:cNvPicPr preferRelativeResize="0"/>
+          <p:cNvPicPr preferRelativeResize="0">
+            <a:picLocks noGrp="1"/>
+          </p:cNvPicPr>
           <p:nvPr>
             <p:ph type="body" idx="1"/>
           </p:nvPr>
         </p:nvPicPr>
         <p:blipFill rotWithShape="1">
-          <a:blip r:embed="rId1"/>
+          <a:blip r:embed="rId3"/>
           <a:srcRect/>
           <a:stretch>
             <a:fillRect/>
@@ -27841,7 +28341,7 @@
           <p:nvPr/>
         </p:nvPicPr>
         <p:blipFill rotWithShape="1">
-          <a:blip r:embed="rId2"/>
+          <a:blip r:embed="rId4"/>
           <a:srcRect/>
           <a:stretch>
             <a:fillRect/>
@@ -27983,14 +28483,14 @@
                 </p:childTnLst>
               </p:cTn>
               <p:prevCondLst>
-                <p:cond evt="onPrev">
+                <p:cond evt="onPrev" delay="0">
                   <p:tgtEl>
                     <p:sldTgt/>
                   </p:tgtEl>
                 </p:cond>
               </p:prevCondLst>
               <p:nextCondLst>
-                <p:cond evt="onNext">
+                <p:cond evt="onNext" delay="0">
                   <p:tgtEl>
                     <p:sldTgt/>
                   </p:tgtEl>
@@ -28018,7 +28518,7 @@
     </p:bg>
     <p:spTree>
       <p:nvGrpSpPr>
-        <p:cNvPr id="293" name="Shape 293"/>
+        <p:cNvPr id="1" name="Shape 293"/>
         <p:cNvGrpSpPr/>
         <p:nvPr/>
       </p:nvGrpSpPr>
@@ -28033,7 +28533,9 @@
       <p:sp>
         <p:nvSpPr>
           <p:cNvPr id="294" name="Google Shape;294;p17"/>
-          <p:cNvSpPr txBox="1"/>
+          <p:cNvSpPr txBox="1">
+            <a:spLocks noGrp="1"/>
+          </p:cNvSpPr>
           <p:nvPr>
             <p:ph type="title"/>
           </p:nvPr>
@@ -28098,7 +28600,9 @@
       <p:sp>
         <p:nvSpPr>
           <p:cNvPr id="295" name="Google Shape;295;p17"/>
-          <p:cNvSpPr txBox="1"/>
+          <p:cNvSpPr txBox="1">
+            <a:spLocks noGrp="1"/>
+          </p:cNvSpPr>
           <p:nvPr>
             <p:ph type="body" idx="1"/>
           </p:nvPr>
@@ -28132,6 +28636,15 @@
               <a:buSzPts val="1120"/>
               <a:buNone/>
             </a:pPr>
+            <a:r>
+              <a:rPr lang="en-US" sz="1400">
+                <a:latin typeface="Bookman Old Style" panose="02050604050505020204"/>
+                <a:ea typeface="Bookman Old Style" panose="02050604050505020204"/>
+                <a:cs typeface="Bookman Old Style" panose="02050604050505020204"/>
+                <a:sym typeface="Bookman Old Style" panose="02050604050505020204"/>
+              </a:rPr>
+              <a:t/>
+            </a:r>
             <a:br>
               <a:rPr lang="en-US" sz="1400">
                 <a:latin typeface="Bookman Old Style" panose="02050604050505020204"/>
@@ -28161,6 +28674,15 @@
               <a:buSzPts val="1120"/>
               <a:buNone/>
             </a:pPr>
+            <a:r>
+              <a:rPr lang="en-US" sz="1400">
+                <a:latin typeface="Bookman Old Style" panose="02050604050505020204"/>
+                <a:ea typeface="Bookman Old Style" panose="02050604050505020204"/>
+                <a:cs typeface="Bookman Old Style" panose="02050604050505020204"/>
+                <a:sym typeface="Bookman Old Style" panose="02050604050505020204"/>
+              </a:rPr>
+              <a:t/>
+            </a:r>
             <a:br>
               <a:rPr lang="en-US" sz="1400">
                 <a:latin typeface="Bookman Old Style" panose="02050604050505020204"/>
@@ -28188,7 +28710,7 @@
           <p:nvPr/>
         </p:nvPicPr>
         <p:blipFill rotWithShape="1">
-          <a:blip r:embed="rId1"/>
+          <a:blip r:embed="rId3"/>
           <a:srcRect/>
           <a:stretch>
             <a:fillRect/>
@@ -28282,19 +28804,7 @@
                 <a:cs typeface="Calibri" panose="020F0502020204030204"/>
                 <a:sym typeface="Calibri" panose="020F0502020204030204"/>
               </a:rPr>
-              <a:t>Incorporating Advanced Animation Techniques </a:t>
-            </a:r>
-            <a:r>
-              <a:rPr lang="en-US" sz="1800">
-                <a:solidFill>
-                  <a:schemeClr val="dk1"/>
-                </a:solidFill>
-                <a:latin typeface="Calibri" panose="020F0502020204030204"/>
-                <a:ea typeface="Calibri" panose="020F0502020204030204"/>
-                <a:cs typeface="Calibri" panose="020F0502020204030204"/>
-                <a:sym typeface="Calibri" panose="020F0502020204030204"/>
-              </a:rPr>
-              <a:t>​</a:t>
+              <a:t>Incorporating Advanced Animation Techniques ​</a:t>
             </a:r>
             <a:endParaRPr sz="1800">
               <a:solidFill>
@@ -28379,19 +28889,7 @@
                 <a:cs typeface="Calibri" panose="020F0502020204030204"/>
                 <a:sym typeface="Calibri" panose="020F0502020204030204"/>
               </a:rPr>
-              <a:t>Utilizing Motion Design Principles</a:t>
-            </a:r>
-            <a:r>
-              <a:rPr lang="en-US" sz="1800">
-                <a:solidFill>
-                  <a:schemeClr val="dk1"/>
-                </a:solidFill>
-                <a:latin typeface="Calibri" panose="020F0502020204030204"/>
-                <a:ea typeface="Calibri" panose="020F0502020204030204"/>
-                <a:cs typeface="Calibri" panose="020F0502020204030204"/>
-                <a:sym typeface="Calibri" panose="020F0502020204030204"/>
-              </a:rPr>
-              <a:t>​</a:t>
+              <a:t>Utilizing Motion Design Principles​</a:t>
             </a:r>
             <a:endParaRPr sz="1800">
               <a:solidFill>
@@ -28476,19 +28974,7 @@
                 <a:cs typeface="Calibri" panose="020F0502020204030204"/>
                 <a:sym typeface="Calibri" panose="020F0502020204030204"/>
               </a:rPr>
-              <a:t>Employing Animation Libraries and Frameworks </a:t>
-            </a:r>
-            <a:r>
-              <a:rPr lang="en-US" sz="1800">
-                <a:solidFill>
-                  <a:schemeClr val="dk1"/>
-                </a:solidFill>
-                <a:latin typeface="Calibri" panose="020F0502020204030204"/>
-                <a:ea typeface="Calibri" panose="020F0502020204030204"/>
-                <a:cs typeface="Calibri" panose="020F0502020204030204"/>
-                <a:sym typeface="Calibri" panose="020F0502020204030204"/>
-              </a:rPr>
-              <a:t>​</a:t>
+              <a:t>Employing Animation Libraries and Frameworks ​</a:t>
             </a:r>
             <a:endParaRPr sz="1800">
               <a:solidFill>
@@ -28509,7 +28995,7 @@
           <p:nvPr/>
         </p:nvPicPr>
         <p:blipFill rotWithShape="1">
-          <a:blip r:embed="rId2"/>
+          <a:blip r:embed="rId4"/>
           <a:srcRect/>
           <a:stretch>
             <a:fillRect/>
@@ -28993,14 +29479,14 @@
                 </p:childTnLst>
               </p:cTn>
               <p:prevCondLst>
-                <p:cond evt="onPrev">
+                <p:cond evt="onPrev" delay="0">
                   <p:tgtEl>
                     <p:sldTgt/>
                   </p:tgtEl>
                 </p:cond>
               </p:prevCondLst>
               <p:nextCondLst>
-                <p:cond evt="onNext">
+                <p:cond evt="onNext" delay="0">
                   <p:tgtEl>
                     <p:sldTgt/>
                   </p:tgtEl>
@@ -29020,7 +29506,7 @@
   <p:cSld>
     <p:spTree>
       <p:nvGrpSpPr>
-        <p:cNvPr id="304" name="Shape 304"/>
+        <p:cNvPr id="1" name="Shape 304"/>
         <p:cNvGrpSpPr/>
         <p:nvPr/>
       </p:nvGrpSpPr>
@@ -29035,7 +29521,9 @@
       <p:sp>
         <p:nvSpPr>
           <p:cNvPr id="305" name="Google Shape;305;p18"/>
-          <p:cNvSpPr txBox="1"/>
+          <p:cNvSpPr txBox="1">
+            <a:spLocks noGrp="1"/>
+          </p:cNvSpPr>
           <p:nvPr>
             <p:ph type="title"/>
           </p:nvPr>
@@ -29085,28 +29573,21 @@
               </a:rPr>
               <a:t>Example: Lottie file Animation</a:t>
             </a:r>
-            <a:endParaRPr lang="en-US" sz="2900">
-              <a:solidFill>
-                <a:schemeClr val="dk1"/>
-              </a:solidFill>
-              <a:latin typeface="Calibri" panose="020F0502020204030204"/>
-              <a:ea typeface="Calibri" panose="020F0502020204030204"/>
-              <a:cs typeface="Calibri" panose="020F0502020204030204"/>
-              <a:sym typeface="Calibri" panose="020F0502020204030204"/>
-            </a:endParaRPr>
           </a:p>
         </p:txBody>
       </p:sp>
       <p:pic>
         <p:nvPicPr>
           <p:cNvPr id="306" name="Google Shape;306;p18" descr="A screenshot of a website&#10;&#10;Description automatically generated"/>
-          <p:cNvPicPr preferRelativeResize="0"/>
+          <p:cNvPicPr preferRelativeResize="0">
+            <a:picLocks noGrp="1"/>
+          </p:cNvPicPr>
           <p:nvPr>
             <p:ph type="body" idx="1"/>
           </p:nvPr>
         </p:nvPicPr>
         <p:blipFill rotWithShape="1">
-          <a:blip r:embed="rId1"/>
+          <a:blip r:embed="rId3"/>
           <a:srcRect/>
           <a:stretch>
             <a:fillRect/>
@@ -29140,7 +29621,7 @@
           <p:nvPr/>
         </p:nvPicPr>
         <p:blipFill rotWithShape="1">
-          <a:blip r:embed="rId2"/>
+          <a:blip r:embed="rId4"/>
           <a:srcRect/>
           <a:stretch>
             <a:fillRect/>
@@ -29282,14 +29763,14 @@
                 </p:childTnLst>
               </p:cTn>
               <p:prevCondLst>
-                <p:cond evt="onPrev">
+                <p:cond evt="onPrev" delay="0">
                   <p:tgtEl>
                     <p:sldTgt/>
                   </p:tgtEl>
                 </p:cond>
               </p:prevCondLst>
               <p:nextCondLst>
-                <p:cond evt="onNext">
+                <p:cond evt="onNext" delay="0">
                   <p:tgtEl>
                     <p:sldTgt/>
                   </p:tgtEl>
@@ -29309,7 +29790,7 @@
   <p:cSld>
     <p:spTree>
       <p:nvGrpSpPr>
-        <p:cNvPr id="311" name="Shape 311"/>
+        <p:cNvPr id="1" name="Shape 311"/>
         <p:cNvGrpSpPr/>
         <p:nvPr/>
       </p:nvGrpSpPr>
@@ -29324,7 +29805,9 @@
       <p:sp>
         <p:nvSpPr>
           <p:cNvPr id="312" name="Google Shape;312;p19"/>
-          <p:cNvSpPr txBox="1"/>
+          <p:cNvSpPr txBox="1">
+            <a:spLocks noGrp="1"/>
+          </p:cNvSpPr>
           <p:nvPr>
             <p:ph type="title"/>
           </p:nvPr>
@@ -29374,28 +29857,21 @@
               </a:rPr>
               <a:t>Animations:</a:t>
             </a:r>
-            <a:endParaRPr lang="en-US" sz="2900" b="1">
-              <a:solidFill>
-                <a:schemeClr val="dk1"/>
-              </a:solidFill>
-              <a:latin typeface="Calibri" panose="020F0502020204030204"/>
-              <a:ea typeface="Calibri" panose="020F0502020204030204"/>
-              <a:cs typeface="Calibri" panose="020F0502020204030204"/>
-              <a:sym typeface="Calibri" panose="020F0502020204030204"/>
-            </a:endParaRPr>
           </a:p>
         </p:txBody>
       </p:sp>
       <p:pic>
         <p:nvPicPr>
           <p:cNvPr id="313" name="Google Shape;313;p19" descr="A black background with a red circle&#10;&#10;Description automatically generated"/>
-          <p:cNvPicPr preferRelativeResize="0"/>
+          <p:cNvPicPr preferRelativeResize="0">
+            <a:picLocks noGrp="1"/>
+          </p:cNvPicPr>
           <p:nvPr>
             <p:ph type="body" idx="1"/>
           </p:nvPr>
         </p:nvPicPr>
         <p:blipFill rotWithShape="1">
-          <a:blip r:embed="rId1"/>
+          <a:blip r:embed="rId3"/>
           <a:srcRect/>
           <a:stretch>
             <a:fillRect/>
@@ -29422,7 +29898,7 @@
           <p:nvPr/>
         </p:nvPicPr>
         <p:blipFill rotWithShape="1">
-          <a:blip r:embed="rId2"/>
+          <a:blip r:embed="rId4"/>
           <a:srcRect/>
           <a:stretch>
             <a:fillRect/>
@@ -29449,7 +29925,7 @@
           <p:nvPr/>
         </p:nvPicPr>
         <p:blipFill rotWithShape="1">
-          <a:blip r:embed="rId3"/>
+          <a:blip r:embed="rId5"/>
           <a:srcRect/>
           <a:stretch>
             <a:fillRect/>
@@ -29476,7 +29952,7 @@
           <p:nvPr/>
         </p:nvPicPr>
         <p:blipFill rotWithShape="1">
-          <a:blip r:embed="rId4"/>
+          <a:blip r:embed="rId6"/>
           <a:srcRect/>
           <a:stretch>
             <a:fillRect/>
@@ -29503,7 +29979,7 @@
           <p:nvPr/>
         </p:nvPicPr>
         <p:blipFill rotWithShape="1">
-          <a:blip r:embed="rId5"/>
+          <a:blip r:embed="rId7"/>
           <a:srcRect/>
           <a:stretch>
             <a:fillRect/>
@@ -29530,7 +30006,7 @@
           <p:nvPr/>
         </p:nvPicPr>
         <p:blipFill rotWithShape="1">
-          <a:blip r:embed="rId6"/>
+          <a:blip r:embed="rId8"/>
           <a:srcRect/>
           <a:stretch>
             <a:fillRect/>
@@ -29557,7 +30033,7 @@
           <p:nvPr/>
         </p:nvPicPr>
         <p:blipFill rotWithShape="1">
-          <a:blip r:embed="rId7"/>
+          <a:blip r:embed="rId9"/>
           <a:srcRect/>
           <a:stretch>
             <a:fillRect/>
@@ -29584,7 +30060,7 @@
           <p:nvPr/>
         </p:nvPicPr>
         <p:blipFill rotWithShape="1">
-          <a:blip r:embed="rId8"/>
+          <a:blip r:embed="rId10"/>
           <a:srcRect/>
           <a:stretch>
             <a:fillRect/>
@@ -29611,7 +30087,7 @@
           <p:nvPr/>
         </p:nvPicPr>
         <p:blipFill rotWithShape="1">
-          <a:blip r:embed="rId9"/>
+          <a:blip r:embed="rId11"/>
           <a:srcRect/>
           <a:stretch>
             <a:fillRect/>
@@ -30124,14 +30600,14 @@
                 </p:childTnLst>
               </p:cTn>
               <p:prevCondLst>
-                <p:cond evt="onPrev">
+                <p:cond evt="onPrev" delay="0">
                   <p:tgtEl>
                     <p:sldTgt/>
                   </p:tgtEl>
                 </p:cond>
               </p:prevCondLst>
               <p:nextCondLst>
-                <p:cond evt="onNext">
+                <p:cond evt="onNext" delay="0">
                   <p:tgtEl>
                     <p:sldTgt/>
                   </p:tgtEl>
@@ -30159,7 +30635,7 @@
     </p:bg>
     <p:spTree>
       <p:nvGrpSpPr>
-        <p:cNvPr id="153" name="Shape 153"/>
+        <p:cNvPr id="1" name="Shape 153"/>
         <p:cNvGrpSpPr/>
         <p:nvPr/>
       </p:nvGrpSpPr>
@@ -30174,7 +30650,9 @@
       <p:sp>
         <p:nvSpPr>
           <p:cNvPr id="154" name="Google Shape;154;p2"/>
-          <p:cNvSpPr txBox="1"/>
+          <p:cNvSpPr txBox="1">
+            <a:spLocks noGrp="1"/>
+          </p:cNvSpPr>
           <p:nvPr>
             <p:ph type="title"/>
           </p:nvPr>
@@ -30212,6 +30690,15 @@
               <a:buFont typeface="Bookman Old Style" panose="02050604050505020204"/>
               <a:buNone/>
             </a:pPr>
+            <a:r>
+              <a:rPr lang="en-US" sz="3100" b="1">
+                <a:latin typeface="Bookman Old Style" panose="02050604050505020204"/>
+                <a:ea typeface="Bookman Old Style" panose="02050604050505020204"/>
+                <a:cs typeface="Bookman Old Style" panose="02050604050505020204"/>
+                <a:sym typeface="Bookman Old Style" panose="02050604050505020204"/>
+              </a:rPr>
+              <a:t/>
+            </a:r>
             <a:br>
               <a:rPr lang="en-US" sz="3100" b="1">
                 <a:latin typeface="Bookman Old Style" panose="02050604050505020204"/>
@@ -30257,6 +30744,15 @@
               <a:buFont typeface="Bookman Old Style" panose="02050604050505020204"/>
               <a:buNone/>
             </a:pPr>
+            <a:r>
+              <a:rPr lang="en-US" sz="3100">
+                <a:latin typeface="Bookman Old Style" panose="02050604050505020204"/>
+                <a:ea typeface="Bookman Old Style" panose="02050604050505020204"/>
+                <a:cs typeface="Bookman Old Style" panose="02050604050505020204"/>
+                <a:sym typeface="Bookman Old Style" panose="02050604050505020204"/>
+              </a:rPr>
+              <a:t/>
+            </a:r>
             <a:br>
               <a:rPr lang="en-US" sz="3100">
                 <a:latin typeface="Bookman Old Style" panose="02050604050505020204"/>
@@ -30277,7 +30773,9 @@
       <p:sp>
         <p:nvSpPr>
           <p:cNvPr id="155" name="Google Shape;155;p2"/>
-          <p:cNvSpPr txBox="1"/>
+          <p:cNvSpPr txBox="1">
+            <a:spLocks noGrp="1"/>
+          </p:cNvSpPr>
           <p:nvPr>
             <p:ph type="body" idx="1"/>
           </p:nvPr>
@@ -30311,6 +30809,15 @@
               <a:buSzPts val="1280"/>
               <a:buNone/>
             </a:pPr>
+            <a:r>
+              <a:rPr lang="en-US" sz="1600">
+                <a:latin typeface="Bookman Old Style" panose="02050604050505020204"/>
+                <a:ea typeface="Bookman Old Style" panose="02050604050505020204"/>
+                <a:cs typeface="Bookman Old Style" panose="02050604050505020204"/>
+                <a:sym typeface="Bookman Old Style" panose="02050604050505020204"/>
+              </a:rPr>
+              <a:t/>
+            </a:r>
             <a:br>
               <a:rPr lang="en-US" sz="1600">
                 <a:latin typeface="Bookman Old Style" panose="02050604050505020204"/>
@@ -30335,7 +30842,7 @@
           <p:nvPr/>
         </p:nvPicPr>
         <p:blipFill rotWithShape="1">
-          <a:blip r:embed="rId1"/>
+          <a:blip r:embed="rId3"/>
           <a:srcRect/>
           <a:stretch>
             <a:fillRect/>
@@ -30428,15 +30935,6 @@
               </a:rPr>
               <a:t>Modern UI Challenge:</a:t>
             </a:r>
-            <a:endParaRPr lang="en-US" sz="1800" b="0" i="0" u="none" strike="noStrike" cap="none">
-              <a:solidFill>
-                <a:schemeClr val="dk1"/>
-              </a:solidFill>
-              <a:latin typeface="Calibri" panose="020F0502020204030204"/>
-              <a:ea typeface="Calibri" panose="020F0502020204030204"/>
-              <a:cs typeface="Calibri" panose="020F0502020204030204"/>
-              <a:sym typeface="Calibri" panose="020F0502020204030204"/>
-            </a:endParaRPr>
           </a:p>
           <a:p>
             <a:pPr marL="0" marR="0" lvl="0" indent="0" algn="l" rtl="0">
@@ -30460,15 +30958,6 @@
               </a:rPr>
               <a:t> </a:t>
             </a:r>
-            <a:endParaRPr lang="en-US" sz="1800" b="0" i="0" u="none" strike="noStrike" cap="none">
-              <a:solidFill>
-                <a:schemeClr val="dk1"/>
-              </a:solidFill>
-              <a:latin typeface="Calibri" panose="020F0502020204030204"/>
-              <a:ea typeface="Calibri" panose="020F0502020204030204"/>
-              <a:cs typeface="Calibri" panose="020F0502020204030204"/>
-              <a:sym typeface="Calibri" panose="020F0502020204030204"/>
-            </a:endParaRPr>
           </a:p>
           <a:p>
             <a:pPr marL="285750" marR="0" lvl="0" indent="-285750" algn="l" rtl="0">
@@ -30497,15 +30986,6 @@
               </a:rPr>
               <a:t>Develop visually appealing, functional, scalable, and maintainable user interfaces across diverse platforms and devices.​</a:t>
             </a:r>
-            <a:endParaRPr lang="en-US" sz="1800" b="0" i="0" u="none" strike="noStrike" cap="none">
-              <a:solidFill>
-                <a:schemeClr val="dk1"/>
-              </a:solidFill>
-              <a:latin typeface="Calibri" panose="020F0502020204030204"/>
-              <a:ea typeface="Calibri" panose="020F0502020204030204"/>
-              <a:cs typeface="Calibri" panose="020F0502020204030204"/>
-              <a:sym typeface="Calibri" panose="020F0502020204030204"/>
-            </a:endParaRPr>
           </a:p>
           <a:p>
             <a:pPr marL="0" marR="0" lvl="0" indent="0" algn="l" rtl="0">
@@ -30549,15 +31029,6 @@
               </a:rPr>
               <a:t>​</a:t>
             </a:r>
-            <a:endParaRPr lang="en-US" sz="1800">
-              <a:solidFill>
-                <a:schemeClr val="dk1"/>
-              </a:solidFill>
-              <a:latin typeface="Calibri" panose="020F0502020204030204"/>
-              <a:ea typeface="Calibri" panose="020F0502020204030204"/>
-              <a:cs typeface="Calibri" panose="020F0502020204030204"/>
-              <a:sym typeface="Calibri" panose="020F0502020204030204"/>
-            </a:endParaRPr>
           </a:p>
           <a:p>
             <a:pPr marL="285750" marR="0" lvl="0" indent="-285750" algn="l" rtl="0">
@@ -30586,15 +31057,6 @@
               </a:rPr>
               <a:t>Advanced Techniques Requirement:</a:t>
             </a:r>
-            <a:endParaRPr lang="en-US" sz="1800">
-              <a:solidFill>
-                <a:schemeClr val="dk1"/>
-              </a:solidFill>
-              <a:latin typeface="Calibri" panose="020F0502020204030204"/>
-              <a:ea typeface="Calibri" panose="020F0502020204030204"/>
-              <a:cs typeface="Calibri" panose="020F0502020204030204"/>
-              <a:sym typeface="Calibri" panose="020F0502020204030204"/>
-            </a:endParaRPr>
           </a:p>
           <a:p>
             <a:pPr marL="0" marR="0" lvl="0" indent="0" algn="l" rtl="0">
@@ -30641,29 +31103,8 @@
                 <a:cs typeface="Calibri" panose="020F0502020204030204"/>
                 <a:sym typeface="Calibri" panose="020F0502020204030204"/>
               </a:rPr>
-              <a:t>Master advanced UI development techniques to overcome challenges and create exceptional user experiences.</a:t>
+              <a:t>Master advanced UI development techniques to overcome challenges and create exceptional user experiences.​</a:t>
             </a:r>
-            <a:r>
-              <a:rPr lang="en-US" sz="1800">
-                <a:solidFill>
-                  <a:schemeClr val="dk1"/>
-                </a:solidFill>
-                <a:latin typeface="Calibri" panose="020F0502020204030204"/>
-                <a:ea typeface="Calibri" panose="020F0502020204030204"/>
-                <a:cs typeface="Calibri" panose="020F0502020204030204"/>
-                <a:sym typeface="Calibri" panose="020F0502020204030204"/>
-              </a:rPr>
-              <a:t>​</a:t>
-            </a:r>
-            <a:endParaRPr lang="en-US" sz="1800">
-              <a:solidFill>
-                <a:schemeClr val="dk1"/>
-              </a:solidFill>
-              <a:latin typeface="Calibri" panose="020F0502020204030204"/>
-              <a:ea typeface="Calibri" panose="020F0502020204030204"/>
-              <a:cs typeface="Calibri" panose="020F0502020204030204"/>
-              <a:sym typeface="Calibri" panose="020F0502020204030204"/>
-            </a:endParaRPr>
           </a:p>
           <a:p>
             <a:pPr marL="0" marR="0" lvl="0" indent="0" algn="l" rtl="0">
@@ -30687,15 +31128,6 @@
               </a:rPr>
               <a:t>​</a:t>
             </a:r>
-            <a:endParaRPr lang="en-US" sz="1800">
-              <a:solidFill>
-                <a:schemeClr val="dk1"/>
-              </a:solidFill>
-              <a:latin typeface="Trebuchet MS" panose="020B0603020202020204"/>
-              <a:ea typeface="Trebuchet MS" panose="020B0603020202020204"/>
-              <a:cs typeface="Trebuchet MS" panose="020B0603020202020204"/>
-              <a:sym typeface="Trebuchet MS" panose="020B0603020202020204"/>
-            </a:endParaRPr>
           </a:p>
           <a:p>
             <a:pPr marL="0" marR="0" lvl="0" indent="0" algn="l" rtl="0">
@@ -30738,7 +31170,7 @@
           <p:nvPr/>
         </p:nvPicPr>
         <p:blipFill rotWithShape="1">
-          <a:blip r:embed="rId2"/>
+          <a:blip r:embed="rId4"/>
           <a:srcRect/>
           <a:stretch>
             <a:fillRect/>
@@ -31543,14 +31975,14 @@
                 </p:childTnLst>
               </p:cTn>
               <p:prevCondLst>
-                <p:cond evt="onPrev">
+                <p:cond evt="onPrev" delay="0">
                   <p:tgtEl>
                     <p:sldTgt/>
                   </p:tgtEl>
                 </p:cond>
               </p:prevCondLst>
               <p:nextCondLst>
-                <p:cond evt="onNext">
+                <p:cond evt="onNext" delay="0">
                   <p:tgtEl>
                     <p:sldTgt/>
                   </p:tgtEl>
@@ -31578,7 +32010,7 @@
     </p:bg>
     <p:spTree>
       <p:nvGrpSpPr>
-        <p:cNvPr id="326" name="Shape 326"/>
+        <p:cNvPr id="1" name="Shape 326"/>
         <p:cNvGrpSpPr/>
         <p:nvPr/>
       </p:nvGrpSpPr>
@@ -31593,7 +32025,9 @@
       <p:sp>
         <p:nvSpPr>
           <p:cNvPr id="327" name="Google Shape;327;p20"/>
-          <p:cNvSpPr txBox="1"/>
+          <p:cNvSpPr txBox="1">
+            <a:spLocks noGrp="1"/>
+          </p:cNvSpPr>
           <p:nvPr>
             <p:ph type="title"/>
           </p:nvPr>
@@ -31668,6 +32102,15 @@
               <a:buFont typeface="Bookman Old Style" panose="02050604050505020204"/>
               <a:buNone/>
             </a:pPr>
+            <a:r>
+              <a:rPr lang="en-US" sz="2200">
+                <a:latin typeface="Bookman Old Style" panose="02050604050505020204"/>
+                <a:ea typeface="Bookman Old Style" panose="02050604050505020204"/>
+                <a:cs typeface="Bookman Old Style" panose="02050604050505020204"/>
+                <a:sym typeface="Bookman Old Style" panose="02050604050505020204"/>
+              </a:rPr>
+              <a:t/>
+            </a:r>
             <a:br>
               <a:rPr lang="en-US" sz="2200">
                 <a:latin typeface="Bookman Old Style" panose="02050604050505020204"/>
@@ -31692,7 +32135,7 @@
           <p:nvPr/>
         </p:nvPicPr>
         <p:blipFill rotWithShape="1">
-          <a:blip r:embed="rId1"/>
+          <a:blip r:embed="rId3"/>
           <a:srcRect/>
           <a:stretch>
             <a:fillRect/>
@@ -31799,29 +32242,8 @@
                 <a:cs typeface="Calibri" panose="020F0502020204030204"/>
                 <a:sym typeface="Calibri" panose="020F0502020204030204"/>
               </a:rPr>
-              <a:t>Effectively Managing UI State in Large-Scale Applications​</a:t>
+              <a:t>Effectively Managing UI State in Large-Scale Applications​​</a:t>
             </a:r>
-            <a:r>
-              <a:rPr lang="en-US" sz="1800">
-                <a:solidFill>
-                  <a:schemeClr val="dk1"/>
-                </a:solidFill>
-                <a:latin typeface="Calibri" panose="020F0502020204030204"/>
-                <a:ea typeface="Calibri" panose="020F0502020204030204"/>
-                <a:cs typeface="Calibri" panose="020F0502020204030204"/>
-                <a:sym typeface="Calibri" panose="020F0502020204030204"/>
-              </a:rPr>
-              <a:t>​</a:t>
-            </a:r>
-            <a:endParaRPr lang="en-US" sz="1800">
-              <a:solidFill>
-                <a:schemeClr val="dk1"/>
-              </a:solidFill>
-              <a:latin typeface="Calibri" panose="020F0502020204030204"/>
-              <a:ea typeface="Calibri" panose="020F0502020204030204"/>
-              <a:cs typeface="Calibri" panose="020F0502020204030204"/>
-              <a:sym typeface="Calibri" panose="020F0502020204030204"/>
-            </a:endParaRPr>
           </a:p>
           <a:p>
             <a:pPr marL="0" marR="0" lvl="0" indent="0" algn="l" rtl="0">
@@ -31843,29 +32265,8 @@
                 <a:cs typeface="Calibri" panose="020F0502020204030204"/>
                 <a:sym typeface="Calibri" panose="020F0502020204030204"/>
               </a:rPr>
-              <a:t>​</a:t>
+              <a:t>​​</a:t>
             </a:r>
-            <a:r>
-              <a:rPr lang="en-US" sz="1800">
-                <a:solidFill>
-                  <a:schemeClr val="dk1"/>
-                </a:solidFill>
-                <a:latin typeface="Calibri" panose="020F0502020204030204"/>
-                <a:ea typeface="Calibri" panose="020F0502020204030204"/>
-                <a:cs typeface="Calibri" panose="020F0502020204030204"/>
-                <a:sym typeface="Calibri" panose="020F0502020204030204"/>
-              </a:rPr>
-              <a:t>​</a:t>
-            </a:r>
-            <a:endParaRPr lang="en-US" sz="1800">
-              <a:solidFill>
-                <a:schemeClr val="dk1"/>
-              </a:solidFill>
-              <a:latin typeface="Calibri" panose="020F0502020204030204"/>
-              <a:ea typeface="Calibri" panose="020F0502020204030204"/>
-              <a:cs typeface="Calibri" panose="020F0502020204030204"/>
-              <a:sym typeface="Calibri" panose="020F0502020204030204"/>
-            </a:endParaRPr>
           </a:p>
           <a:p>
             <a:pPr marL="285750" marR="0" lvl="0" indent="-285750" algn="l" rtl="0">
@@ -31892,19 +32293,7 @@
                 <a:cs typeface="Calibri" panose="020F0502020204030204"/>
                 <a:sym typeface="Calibri" panose="020F0502020204030204"/>
               </a:rPr>
-              <a:t>Utilizing State Management Libraries and Frameworks ​</a:t>
-            </a:r>
-            <a:r>
-              <a:rPr lang="en-US" sz="1800">
-                <a:solidFill>
-                  <a:schemeClr val="dk1"/>
-                </a:solidFill>
-                <a:latin typeface="Calibri" panose="020F0502020204030204"/>
-                <a:ea typeface="Calibri" panose="020F0502020204030204"/>
-                <a:cs typeface="Calibri" panose="020F0502020204030204"/>
-                <a:sym typeface="Calibri" panose="020F0502020204030204"/>
-              </a:rPr>
-              <a:t>​</a:t>
+              <a:t>Utilizing State Management Libraries and Frameworks ​​</a:t>
             </a:r>
             <a:br>
               <a:rPr lang="en-US" sz="1800">
@@ -31927,29 +32316,8 @@
                 <a:cs typeface="Calibri" panose="020F0502020204030204"/>
                 <a:sym typeface="Calibri" panose="020F0502020204030204"/>
               </a:rPr>
-              <a:t>​</a:t>
+              <a:t>​​</a:t>
             </a:r>
-            <a:r>
-              <a:rPr lang="en-US" sz="1800">
-                <a:solidFill>
-                  <a:schemeClr val="dk1"/>
-                </a:solidFill>
-                <a:latin typeface="Calibri" panose="020F0502020204030204"/>
-                <a:ea typeface="Calibri" panose="020F0502020204030204"/>
-                <a:cs typeface="Calibri" panose="020F0502020204030204"/>
-                <a:sym typeface="Calibri" panose="020F0502020204030204"/>
-              </a:rPr>
-              <a:t>​</a:t>
-            </a:r>
-            <a:endParaRPr lang="en-US" sz="1800">
-              <a:solidFill>
-                <a:schemeClr val="dk1"/>
-              </a:solidFill>
-              <a:latin typeface="Calibri" panose="020F0502020204030204"/>
-              <a:ea typeface="Calibri" panose="020F0502020204030204"/>
-              <a:cs typeface="Calibri" panose="020F0502020204030204"/>
-              <a:sym typeface="Calibri" panose="020F0502020204030204"/>
-            </a:endParaRPr>
           </a:p>
           <a:p>
             <a:pPr marL="228600" marR="0" lvl="0" indent="-228600" algn="l" rtl="0">
@@ -31976,19 +32344,7 @@
                 <a:cs typeface="Calibri" panose="020F0502020204030204"/>
                 <a:sym typeface="Calibri" panose="020F0502020204030204"/>
               </a:rPr>
-              <a:t>Addressing State Complexity and Performance Challenges​</a:t>
-            </a:r>
-            <a:r>
-              <a:rPr lang="en-US" sz="1800">
-                <a:solidFill>
-                  <a:schemeClr val="dk1"/>
-                </a:solidFill>
-                <a:latin typeface="Calibri" panose="020F0502020204030204"/>
-                <a:ea typeface="Calibri" panose="020F0502020204030204"/>
-                <a:cs typeface="Calibri" panose="020F0502020204030204"/>
-                <a:sym typeface="Calibri" panose="020F0502020204030204"/>
-              </a:rPr>
-              <a:t>​</a:t>
+              <a:t>Addressing State Complexity and Performance Challenges​​</a:t>
             </a:r>
             <a:endParaRPr sz="1800">
               <a:solidFill>
@@ -32009,7 +32365,7 @@
           <p:nvPr/>
         </p:nvPicPr>
         <p:blipFill rotWithShape="1">
-          <a:blip r:embed="rId2"/>
+          <a:blip r:embed="rId4"/>
           <a:srcRect/>
           <a:stretch>
             <a:fillRect/>
@@ -32448,14 +32804,14 @@
                 </p:childTnLst>
               </p:cTn>
               <p:prevCondLst>
-                <p:cond evt="onPrev">
+                <p:cond evt="onPrev" delay="0">
                   <p:tgtEl>
                     <p:sldTgt/>
                   </p:tgtEl>
                 </p:cond>
               </p:prevCondLst>
               <p:nextCondLst>
-                <p:cond evt="onNext">
+                <p:cond evt="onNext" delay="0">
                   <p:tgtEl>
                     <p:sldTgt/>
                   </p:tgtEl>
@@ -32483,7 +32839,7 @@
     </p:bg>
     <p:spTree>
       <p:nvGrpSpPr>
-        <p:cNvPr id="335" name="Shape 335"/>
+        <p:cNvPr id="1" name="Shape 335"/>
         <p:cNvGrpSpPr/>
         <p:nvPr/>
       </p:nvGrpSpPr>
@@ -32498,7 +32854,9 @@
       <p:sp>
         <p:nvSpPr>
           <p:cNvPr id="336" name="Google Shape;336;p21"/>
-          <p:cNvSpPr txBox="1"/>
+          <p:cNvSpPr txBox="1">
+            <a:spLocks noGrp="1"/>
+          </p:cNvSpPr>
           <p:nvPr>
             <p:ph type="title"/>
           </p:nvPr>
@@ -32573,6 +32931,15 @@
               <a:buFont typeface="Bookman Old Style" panose="02050604050505020204"/>
               <a:buNone/>
             </a:pPr>
+            <a:r>
+              <a:rPr lang="en-US" sz="1900">
+                <a:latin typeface="Bookman Old Style" panose="02050604050505020204"/>
+                <a:ea typeface="Bookman Old Style" panose="02050604050505020204"/>
+                <a:cs typeface="Bookman Old Style" panose="02050604050505020204"/>
+                <a:sym typeface="Bookman Old Style" panose="02050604050505020204"/>
+              </a:rPr>
+              <a:t/>
+            </a:r>
             <a:br>
               <a:rPr lang="en-US" sz="1900">
                 <a:latin typeface="Bookman Old Style" panose="02050604050505020204"/>
@@ -32597,7 +32964,7 @@
           <p:nvPr/>
         </p:nvPicPr>
         <p:blipFill rotWithShape="1">
-          <a:blip r:embed="rId1"/>
+          <a:blip r:embed="rId3"/>
           <a:srcRect/>
           <a:stretch>
             <a:fillRect/>
@@ -32706,19 +33073,7 @@
                 <a:cs typeface="Calibri" panose="020F0502020204030204"/>
                 <a:sym typeface="Calibri" panose="020F0502020204030204"/>
               </a:rPr>
-              <a:t>Connecting UI Components with Backend Services</a:t>
-            </a:r>
-            <a:r>
-              <a:rPr lang="en-US" sz="1800">
-                <a:solidFill>
-                  <a:schemeClr val="dk1"/>
-                </a:solidFill>
-                <a:latin typeface="Calibri" panose="020F0502020204030204"/>
-                <a:ea typeface="Calibri" panose="020F0502020204030204"/>
-                <a:cs typeface="Calibri" panose="020F0502020204030204"/>
-                <a:sym typeface="Calibri" panose="020F0502020204030204"/>
-              </a:rPr>
-              <a:t>​</a:t>
+              <a:t>Connecting UI Components with Backend Services​</a:t>
             </a:r>
             <a:endParaRPr sz="1800">
               <a:solidFill>
@@ -32835,19 +33190,7 @@
                 <a:cs typeface="Calibri" panose="020F0502020204030204"/>
                 <a:sym typeface="Calibri" panose="020F0502020204030204"/>
               </a:rPr>
-              <a:t>Implementing Data Fetching and Caching Strategies</a:t>
-            </a:r>
-            <a:r>
-              <a:rPr lang="en-US" sz="1800">
-                <a:solidFill>
-                  <a:schemeClr val="dk1"/>
-                </a:solidFill>
-                <a:latin typeface="Calibri" panose="020F0502020204030204"/>
-                <a:ea typeface="Calibri" panose="020F0502020204030204"/>
-                <a:cs typeface="Calibri" panose="020F0502020204030204"/>
-                <a:sym typeface="Calibri" panose="020F0502020204030204"/>
-              </a:rPr>
-              <a:t>​</a:t>
+              <a:t>Implementing Data Fetching and Caching Strategies​</a:t>
             </a:r>
             <a:endParaRPr sz="1800">
               <a:solidFill>
@@ -32964,19 +33307,7 @@
                 <a:cs typeface="Calibri" panose="020F0502020204030204"/>
                 <a:sym typeface="Calibri" panose="020F0502020204030204"/>
               </a:rPr>
-              <a:t>Handling Network Requests and Error Scenarios Gracefully</a:t>
-            </a:r>
-            <a:r>
-              <a:rPr lang="en-US" sz="1800">
-                <a:solidFill>
-                  <a:schemeClr val="dk1"/>
-                </a:solidFill>
-                <a:latin typeface="Calibri" panose="020F0502020204030204"/>
-                <a:ea typeface="Calibri" panose="020F0502020204030204"/>
-                <a:cs typeface="Calibri" panose="020F0502020204030204"/>
-                <a:sym typeface="Calibri" panose="020F0502020204030204"/>
-              </a:rPr>
-              <a:t>​</a:t>
+              <a:t>Handling Network Requests and Error Scenarios Gracefully​</a:t>
             </a:r>
             <a:endParaRPr sz="1800">
               <a:solidFill>
@@ -32997,7 +33328,7 @@
           <p:nvPr/>
         </p:nvPicPr>
         <p:blipFill rotWithShape="1">
-          <a:blip r:embed="rId2"/>
+          <a:blip r:embed="rId4"/>
           <a:srcRect/>
           <a:stretch>
             <a:fillRect/>
@@ -33603,14 +33934,14 @@
                 </p:childTnLst>
               </p:cTn>
               <p:prevCondLst>
-                <p:cond evt="onPrev">
+                <p:cond evt="onPrev" delay="0">
                   <p:tgtEl>
                     <p:sldTgt/>
                   </p:tgtEl>
                 </p:cond>
               </p:prevCondLst>
               <p:nextCondLst>
-                <p:cond evt="onNext">
+                <p:cond evt="onNext" delay="0">
                   <p:tgtEl>
                     <p:sldTgt/>
                   </p:tgtEl>
@@ -33638,7 +33969,7 @@
     </p:bg>
     <p:spTree>
       <p:nvGrpSpPr>
-        <p:cNvPr id="346" name="Shape 346"/>
+        <p:cNvPr id="1" name="Shape 346"/>
         <p:cNvGrpSpPr/>
         <p:nvPr/>
       </p:nvGrpSpPr>
@@ -33653,7 +33984,9 @@
       <p:sp>
         <p:nvSpPr>
           <p:cNvPr id="347" name="Google Shape;347;p22"/>
-          <p:cNvSpPr txBox="1"/>
+          <p:cNvSpPr txBox="1">
+            <a:spLocks noGrp="1"/>
+          </p:cNvSpPr>
           <p:nvPr>
             <p:ph type="title"/>
           </p:nvPr>
@@ -33728,6 +34061,15 @@
               <a:buFont typeface="Bookman Old Style" panose="02050604050505020204"/>
               <a:buNone/>
             </a:pPr>
+            <a:r>
+              <a:rPr lang="en-US" sz="1800">
+                <a:latin typeface="Bookman Old Style" panose="02050604050505020204"/>
+                <a:ea typeface="Bookman Old Style" panose="02050604050505020204"/>
+                <a:cs typeface="Bookman Old Style" panose="02050604050505020204"/>
+                <a:sym typeface="Bookman Old Style" panose="02050604050505020204"/>
+              </a:rPr>
+              <a:t/>
+            </a:r>
             <a:br>
               <a:rPr lang="en-US" sz="1800">
                 <a:latin typeface="Bookman Old Style" panose="02050604050505020204"/>
@@ -33752,7 +34094,7 @@
           <p:nvPr/>
         </p:nvPicPr>
         <p:blipFill rotWithShape="1">
-          <a:blip r:embed="rId1"/>
+          <a:blip r:embed="rId3"/>
           <a:srcRect/>
           <a:stretch>
             <a:fillRect/>
@@ -33843,41 +34185,8 @@
                 <a:cs typeface="Calibri" panose="020F0502020204030204"/>
                 <a:sym typeface="Calibri" panose="020F0502020204030204"/>
               </a:rPr>
-              <a:t> </a:t>
+              <a:t> Recap of Key Takeaways​​</a:t>
             </a:r>
-            <a:r>
-              <a:rPr lang="en-US" sz="1800">
-                <a:solidFill>
-                  <a:schemeClr val="dk1"/>
-                </a:solidFill>
-                <a:latin typeface="Calibri" panose="020F0502020204030204"/>
-                <a:ea typeface="Calibri" panose="020F0502020204030204"/>
-                <a:cs typeface="Calibri" panose="020F0502020204030204"/>
-                <a:sym typeface="Calibri" panose="020F0502020204030204"/>
-              </a:rPr>
-              <a:t>Recap of Key Takeaways​</a:t>
-            </a:r>
-            <a:r>
-              <a:rPr lang="en-US" sz="1800">
-                <a:solidFill>
-                  <a:schemeClr val="dk1"/>
-                </a:solidFill>
-                <a:latin typeface="Calibri" panose="020F0502020204030204"/>
-                <a:ea typeface="Calibri" panose="020F0502020204030204"/>
-                <a:cs typeface="Calibri" panose="020F0502020204030204"/>
-                <a:sym typeface="Calibri" panose="020F0502020204030204"/>
-              </a:rPr>
-              <a:t>​</a:t>
-            </a:r>
-            <a:endParaRPr lang="en-US" sz="1800">
-              <a:solidFill>
-                <a:schemeClr val="dk1"/>
-              </a:solidFill>
-              <a:latin typeface="Calibri" panose="020F0502020204030204"/>
-              <a:ea typeface="Calibri" panose="020F0502020204030204"/>
-              <a:cs typeface="Calibri" panose="020F0502020204030204"/>
-              <a:sym typeface="Calibri" panose="020F0502020204030204"/>
-            </a:endParaRPr>
           </a:p>
           <a:p>
             <a:pPr marL="0" marR="0" lvl="0" indent="0" algn="l" rtl="0">
@@ -33901,15 +34210,6 @@
               </a:rPr>
               <a:t>​</a:t>
             </a:r>
-            <a:endParaRPr lang="en-US" sz="1800">
-              <a:solidFill>
-                <a:schemeClr val="dk1"/>
-              </a:solidFill>
-              <a:latin typeface="Calibri" panose="020F0502020204030204"/>
-              <a:ea typeface="Calibri" panose="020F0502020204030204"/>
-              <a:cs typeface="Calibri" panose="020F0502020204030204"/>
-              <a:sym typeface="Calibri" panose="020F0502020204030204"/>
-            </a:endParaRPr>
           </a:p>
           <a:p>
             <a:pPr marL="0" marR="0" lvl="0" indent="0" algn="l" rtl="0">
@@ -33931,29 +34231,8 @@
                 <a:cs typeface="Calibri" panose="020F0502020204030204"/>
                 <a:sym typeface="Calibri" panose="020F0502020204030204"/>
               </a:rPr>
-              <a:t>​</a:t>
+              <a:t>​​</a:t>
             </a:r>
-            <a:r>
-              <a:rPr lang="en-US" sz="1800">
-                <a:solidFill>
-                  <a:schemeClr val="dk1"/>
-                </a:solidFill>
-                <a:latin typeface="Calibri" panose="020F0502020204030204"/>
-                <a:ea typeface="Calibri" panose="020F0502020204030204"/>
-                <a:cs typeface="Calibri" panose="020F0502020204030204"/>
-                <a:sym typeface="Calibri" panose="020F0502020204030204"/>
-              </a:rPr>
-              <a:t>​</a:t>
-            </a:r>
-            <a:endParaRPr lang="en-US" sz="1800">
-              <a:solidFill>
-                <a:schemeClr val="dk1"/>
-              </a:solidFill>
-              <a:latin typeface="Calibri" panose="020F0502020204030204"/>
-              <a:ea typeface="Calibri" panose="020F0502020204030204"/>
-              <a:cs typeface="Calibri" panose="020F0502020204030204"/>
-              <a:sym typeface="Calibri" panose="020F0502020204030204"/>
-            </a:endParaRPr>
           </a:p>
           <a:p>
             <a:pPr marL="285750" marR="0" lvl="0" indent="-285750" algn="l" rtl="0">
@@ -33980,29 +34259,8 @@
                 <a:cs typeface="Calibri" panose="020F0502020204030204"/>
                 <a:sym typeface="Calibri" panose="020F0502020204030204"/>
               </a:rPr>
-              <a:t>Emphasis on Mastering Advanced UI Development Techniques​</a:t>
+              <a:t>Emphasis on Mastering Advanced UI Development Techniques​​</a:t>
             </a:r>
-            <a:r>
-              <a:rPr lang="en-US" sz="1800">
-                <a:solidFill>
-                  <a:schemeClr val="dk1"/>
-                </a:solidFill>
-                <a:latin typeface="Calibri" panose="020F0502020204030204"/>
-                <a:ea typeface="Calibri" panose="020F0502020204030204"/>
-                <a:cs typeface="Calibri" panose="020F0502020204030204"/>
-                <a:sym typeface="Calibri" panose="020F0502020204030204"/>
-              </a:rPr>
-              <a:t>​</a:t>
-            </a:r>
-            <a:endParaRPr lang="en-US" sz="1800">
-              <a:solidFill>
-                <a:schemeClr val="dk1"/>
-              </a:solidFill>
-              <a:latin typeface="Calibri" panose="020F0502020204030204"/>
-              <a:ea typeface="Calibri" panose="020F0502020204030204"/>
-              <a:cs typeface="Calibri" panose="020F0502020204030204"/>
-              <a:sym typeface="Calibri" panose="020F0502020204030204"/>
-            </a:endParaRPr>
           </a:p>
           <a:p>
             <a:pPr marL="0" marR="0" lvl="0" indent="0" algn="l" rtl="0">
@@ -34024,19 +34282,7 @@
                 <a:cs typeface="Calibri" panose="020F0502020204030204"/>
                 <a:sym typeface="Calibri" panose="020F0502020204030204"/>
               </a:rPr>
-              <a:t>​</a:t>
-            </a:r>
-            <a:r>
-              <a:rPr lang="en-US" sz="1800">
-                <a:solidFill>
-                  <a:schemeClr val="dk1"/>
-                </a:solidFill>
-                <a:latin typeface="Calibri" panose="020F0502020204030204"/>
-                <a:ea typeface="Calibri" panose="020F0502020204030204"/>
-                <a:cs typeface="Calibri" panose="020F0502020204030204"/>
-                <a:sym typeface="Calibri" panose="020F0502020204030204"/>
-              </a:rPr>
-              <a:t>​</a:t>
+              <a:t>​​</a:t>
             </a:r>
             <a:br>
               <a:rPr lang="en-US" sz="1800">
@@ -34059,29 +34305,8 @@
                 <a:cs typeface="Calibri" panose="020F0502020204030204"/>
                 <a:sym typeface="Calibri" panose="020F0502020204030204"/>
               </a:rPr>
-              <a:t>​</a:t>
+              <a:t>​​</a:t>
             </a:r>
-            <a:r>
-              <a:rPr lang="en-US" sz="1800">
-                <a:solidFill>
-                  <a:schemeClr val="dk1"/>
-                </a:solidFill>
-                <a:latin typeface="Calibri" panose="020F0502020204030204"/>
-                <a:ea typeface="Calibri" panose="020F0502020204030204"/>
-                <a:cs typeface="Calibri" panose="020F0502020204030204"/>
-                <a:sym typeface="Calibri" panose="020F0502020204030204"/>
-              </a:rPr>
-              <a:t>​</a:t>
-            </a:r>
-            <a:endParaRPr lang="en-US" sz="1800">
-              <a:solidFill>
-                <a:schemeClr val="dk1"/>
-              </a:solidFill>
-              <a:latin typeface="Calibri" panose="020F0502020204030204"/>
-              <a:ea typeface="Calibri" panose="020F0502020204030204"/>
-              <a:cs typeface="Calibri" panose="020F0502020204030204"/>
-              <a:sym typeface="Calibri" panose="020F0502020204030204"/>
-            </a:endParaRPr>
           </a:p>
           <a:p>
             <a:pPr marL="228600" marR="0" lvl="0" indent="-228600" algn="l" rtl="0">
@@ -34108,55 +34333,7 @@
                 <a:cs typeface="Calibri" panose="020F0502020204030204"/>
                 <a:sym typeface="Calibri" panose="020F0502020204030204"/>
               </a:rPr>
-              <a:t> </a:t>
-            </a:r>
-            <a:r>
-              <a:rPr lang="en-US" sz="1800">
-                <a:solidFill>
-                  <a:schemeClr val="dk1"/>
-                </a:solidFill>
-                <a:latin typeface="Calibri" panose="020F0502020204030204"/>
-                <a:ea typeface="Calibri" panose="020F0502020204030204"/>
-                <a:cs typeface="Calibri" panose="020F0502020204030204"/>
-                <a:sym typeface="Calibri" panose="020F0502020204030204"/>
-              </a:rPr>
-              <a:t>Encouragement for</a:t>
-            </a:r>
-            <a:r>
-              <a:rPr lang="en-US" sz="1800">
-                <a:solidFill>
-                  <a:schemeClr val="dk1"/>
-                </a:solidFill>
-                <a:latin typeface="Calibri" panose="020F0502020204030204"/>
-                <a:ea typeface="Calibri" panose="020F0502020204030204"/>
-                <a:cs typeface="Calibri" panose="020F0502020204030204"/>
-                <a:sym typeface="Calibri" panose="020F0502020204030204"/>
-              </a:rPr>
-              <a:t> </a:t>
-            </a:r>
-            <a:r>
-              <a:rPr lang="en-US" sz="1800">
-                <a:solidFill>
-                  <a:schemeClr val="dk1"/>
-                </a:solidFill>
-                <a:latin typeface="Calibri" panose="020F0502020204030204"/>
-                <a:ea typeface="Calibri" panose="020F0502020204030204"/>
-                <a:cs typeface="Calibri" panose="020F0502020204030204"/>
-                <a:sym typeface="Calibri" panose="020F0502020204030204"/>
-              </a:rPr>
-              <a:t>Continuous Learning and Experimentation​</a:t>
-            </a:r>
-            <a:r>
-              <a:rPr lang="en-US" sz="1800">
-                <a:solidFill>
-                  <a:schemeClr val="dk1"/>
-                </a:solidFill>
-                <a:latin typeface="Calibri" panose="020F0502020204030204"/>
-                <a:ea typeface="Calibri" panose="020F0502020204030204"/>
-                <a:cs typeface="Calibri" panose="020F0502020204030204"/>
-                <a:sym typeface="Calibri" panose="020F0502020204030204"/>
-              </a:rPr>
-              <a:t>​</a:t>
+              <a:t> Encouragement for Continuous Learning and Experimentation​​</a:t>
             </a:r>
             <a:endParaRPr sz="1800">
               <a:solidFill>
@@ -34177,7 +34354,7 @@
           <p:nvPr/>
         </p:nvPicPr>
         <p:blipFill rotWithShape="1">
-          <a:blip r:embed="rId2"/>
+          <a:blip r:embed="rId4"/>
           <a:srcRect/>
           <a:stretch>
             <a:fillRect/>
@@ -34738,14 +34915,14 @@
                 </p:childTnLst>
               </p:cTn>
               <p:prevCondLst>
-                <p:cond evt="onPrev">
+                <p:cond evt="onPrev" delay="0">
                   <p:tgtEl>
                     <p:sldTgt/>
                   </p:tgtEl>
                 </p:cond>
               </p:prevCondLst>
               <p:nextCondLst>
-                <p:cond evt="onNext">
+                <p:cond evt="onNext" delay="0">
                   <p:tgtEl>
                     <p:sldTgt/>
                   </p:tgtEl>
@@ -34773,7 +34950,7 @@
     </p:bg>
     <p:spTree>
       <p:nvGrpSpPr>
-        <p:cNvPr id="163" name="Shape 163"/>
+        <p:cNvPr id="1" name="Shape 163"/>
         <p:cNvGrpSpPr/>
         <p:nvPr/>
       </p:nvGrpSpPr>
@@ -34788,7 +34965,9 @@
       <p:sp>
         <p:nvSpPr>
           <p:cNvPr id="164" name="Google Shape;164;p3"/>
-          <p:cNvSpPr txBox="1"/>
+          <p:cNvSpPr txBox="1">
+            <a:spLocks noGrp="1"/>
+          </p:cNvSpPr>
           <p:nvPr>
             <p:ph type="title"/>
           </p:nvPr>
@@ -34827,7 +35006,7 @@
               <a:buNone/>
             </a:pPr>
             <a:r>
-              <a:rPr lang="en-US" sz="3200" b="1">
+              <a:rPr lang="en-US" sz="3200" b="1" dirty="0">
                 <a:solidFill>
                   <a:schemeClr val="dk1"/>
                 </a:solidFill>
@@ -34838,7 +35017,7 @@
               </a:rPr>
               <a:t>Advanced Widget Usage</a:t>
             </a:r>
-            <a:endParaRPr sz="3200">
+            <a:endParaRPr sz="3200" dirty="0">
               <a:solidFill>
                 <a:schemeClr val="dk1"/>
               </a:solidFill>
@@ -34863,15 +35042,24 @@
               <a:buFont typeface="Bookman Old Style" panose="02050604050505020204"/>
               <a:buNone/>
             </a:pPr>
+            <a:r>
+              <a:rPr lang="en-US" sz="3400" dirty="0">
+                <a:latin typeface="Bookman Old Style" panose="02050604050505020204"/>
+                <a:ea typeface="Bookman Old Style" panose="02050604050505020204"/>
+                <a:cs typeface="Bookman Old Style" panose="02050604050505020204"/>
+                <a:sym typeface="Bookman Old Style" panose="02050604050505020204"/>
+              </a:rPr>
+              <a:t/>
+            </a:r>
             <a:br>
-              <a:rPr lang="en-US" sz="3400">
+              <a:rPr lang="en-US" sz="3400" dirty="0">
                 <a:latin typeface="Bookman Old Style" panose="02050604050505020204"/>
                 <a:ea typeface="Bookman Old Style" panose="02050604050505020204"/>
                 <a:cs typeface="Bookman Old Style" panose="02050604050505020204"/>
                 <a:sym typeface="Bookman Old Style" panose="02050604050505020204"/>
               </a:rPr>
             </a:br>
-            <a:endParaRPr sz="3400">
+            <a:endParaRPr sz="3400" dirty="0">
               <a:latin typeface="Bookman Old Style" panose="02050604050505020204"/>
               <a:ea typeface="Bookman Old Style" panose="02050604050505020204"/>
               <a:cs typeface="Bookman Old Style" panose="02050604050505020204"/>
@@ -34883,7 +35071,9 @@
       <p:sp>
         <p:nvSpPr>
           <p:cNvPr id="165" name="Google Shape;165;p3"/>
-          <p:cNvSpPr txBox="1"/>
+          <p:cNvSpPr txBox="1">
+            <a:spLocks noGrp="1"/>
+          </p:cNvSpPr>
           <p:nvPr>
             <p:ph type="body" idx="1"/>
           </p:nvPr>
@@ -35001,7 +35191,7 @@
           <p:nvPr/>
         </p:nvPicPr>
         <p:blipFill rotWithShape="1">
-          <a:blip r:embed="rId1"/>
+          <a:blip r:embed="rId3"/>
           <a:srcRect r="-4" b="-4"/>
           <a:stretch>
             <a:fillRect/>
@@ -35060,7 +35250,7 @@
           <p:nvPr/>
         </p:nvPicPr>
         <p:blipFill rotWithShape="1">
-          <a:blip r:embed="rId2"/>
+          <a:blip r:embed="rId4"/>
           <a:srcRect r="-4" b="-4"/>
           <a:stretch>
             <a:fillRect/>
@@ -35174,7 +35364,7 @@
               <a:buChar char="•"/>
             </a:pPr>
             <a:r>
-              <a:rPr lang="en-US" sz="1800">
+              <a:rPr lang="en-US" sz="1800" dirty="0">
                 <a:solidFill>
                   <a:schemeClr val="dk1"/>
                 </a:solidFill>
@@ -35183,21 +35373,9 @@
                 <a:cs typeface="Calibri" panose="020F0502020204030204"/>
                 <a:sym typeface="Calibri" panose="020F0502020204030204"/>
               </a:rPr>
-              <a:t>Harnessing the Full Potential of Built-in Widgets</a:t>
+              <a:t>Harnessing the Full Potential of Built-in Widgets​</a:t>
             </a:r>
-            <a:r>
-              <a:rPr lang="en-US" sz="1800">
-                <a:solidFill>
-                  <a:schemeClr val="dk1"/>
-                </a:solidFill>
-                <a:latin typeface="Calibri" panose="020F0502020204030204"/>
-                <a:ea typeface="Calibri" panose="020F0502020204030204"/>
-                <a:cs typeface="Calibri" panose="020F0502020204030204"/>
-                <a:sym typeface="Calibri" panose="020F0502020204030204"/>
-              </a:rPr>
-              <a:t>​</a:t>
-            </a:r>
-            <a:endParaRPr sz="1800">
+            <a:endParaRPr sz="1800" dirty="0">
               <a:solidFill>
                 <a:schemeClr val="dk1"/>
               </a:solidFill>
@@ -35271,7 +35449,7 @@
               <a:buChar char="•"/>
             </a:pPr>
             <a:r>
-              <a:rPr lang="en-US" sz="1800">
+              <a:rPr lang="en-US" sz="1800" dirty="0">
                 <a:solidFill>
                   <a:schemeClr val="dk1"/>
                 </a:solidFill>
@@ -35280,21 +35458,9 @@
                 <a:cs typeface="Calibri" panose="020F0502020204030204"/>
                 <a:sym typeface="Calibri" panose="020F0502020204030204"/>
               </a:rPr>
-              <a:t>Creating Custom Widgets for Specific Needs</a:t>
+              <a:t>Creating Custom Widgets for Specific Needs​</a:t>
             </a:r>
-            <a:r>
-              <a:rPr lang="en-US" sz="1800">
-                <a:solidFill>
-                  <a:schemeClr val="dk1"/>
-                </a:solidFill>
-                <a:latin typeface="Calibri" panose="020F0502020204030204"/>
-                <a:ea typeface="Calibri" panose="020F0502020204030204"/>
-                <a:cs typeface="Calibri" panose="020F0502020204030204"/>
-                <a:sym typeface="Calibri" panose="020F0502020204030204"/>
-              </a:rPr>
-              <a:t>​</a:t>
-            </a:r>
-            <a:endParaRPr sz="1800">
+            <a:endParaRPr sz="1800" dirty="0">
               <a:solidFill>
                 <a:schemeClr val="dk1"/>
               </a:solidFill>
@@ -35368,7 +35534,7 @@
               <a:buChar char="•"/>
             </a:pPr>
             <a:r>
-              <a:rPr lang="en-US" sz="1800">
+              <a:rPr lang="en-US" sz="1800" dirty="0">
                 <a:solidFill>
                   <a:schemeClr val="dk1"/>
                 </a:solidFill>
@@ -35377,21 +35543,9 @@
                 <a:cs typeface="Calibri" panose="020F0502020204030204"/>
                 <a:sym typeface="Calibri" panose="020F0502020204030204"/>
               </a:rPr>
-              <a:t>Leveraging Widget Libraries and Frameworks</a:t>
+              <a:t>Leveraging Widget Libraries and Frameworks​</a:t>
             </a:r>
-            <a:r>
-              <a:rPr lang="en-US" sz="1800">
-                <a:solidFill>
-                  <a:schemeClr val="dk1"/>
-                </a:solidFill>
-                <a:latin typeface="Calibri" panose="020F0502020204030204"/>
-                <a:ea typeface="Calibri" panose="020F0502020204030204"/>
-                <a:cs typeface="Calibri" panose="020F0502020204030204"/>
-                <a:sym typeface="Calibri" panose="020F0502020204030204"/>
-              </a:rPr>
-              <a:t>​</a:t>
-            </a:r>
-            <a:endParaRPr sz="1800">
+            <a:endParaRPr sz="1800" dirty="0">
               <a:solidFill>
                 <a:schemeClr val="dk1"/>
               </a:solidFill>
@@ -35410,7 +35564,7 @@
           <p:nvPr/>
         </p:nvPicPr>
         <p:blipFill rotWithShape="1">
-          <a:blip r:embed="rId3"/>
+          <a:blip r:embed="rId5"/>
           <a:srcRect/>
           <a:stretch>
             <a:fillRect/>
@@ -35947,14 +36101,14 @@
                 </p:childTnLst>
               </p:cTn>
               <p:prevCondLst>
-                <p:cond evt="onPrev">
+                <p:cond evt="onPrev" delay="0">
                   <p:tgtEl>
                     <p:sldTgt/>
                   </p:tgtEl>
                 </p:cond>
               </p:prevCondLst>
               <p:nextCondLst>
-                <p:cond evt="onNext">
+                <p:cond evt="onNext" delay="0">
                   <p:tgtEl>
                     <p:sldTgt/>
                   </p:tgtEl>
@@ -35974,7 +36128,7 @@
   <p:cSld>
     <p:spTree>
       <p:nvGrpSpPr>
-        <p:cNvPr id="176" name="Shape 176"/>
+        <p:cNvPr id="1" name="Shape 176"/>
         <p:cNvGrpSpPr/>
         <p:nvPr/>
       </p:nvGrpSpPr>
@@ -35989,7 +36143,9 @@
       <p:sp>
         <p:nvSpPr>
           <p:cNvPr id="177" name="Google Shape;177;p4"/>
-          <p:cNvSpPr txBox="1"/>
+          <p:cNvSpPr txBox="1">
+            <a:spLocks noGrp="1"/>
+          </p:cNvSpPr>
           <p:nvPr>
             <p:ph type="title"/>
           </p:nvPr>
@@ -36028,7 +36184,7 @@
               <a:buNone/>
             </a:pPr>
             <a:r>
-              <a:rPr lang="en-US" sz="2800" b="1">
+              <a:rPr lang="en-US" sz="2800" b="1" dirty="0">
                 <a:solidFill>
                   <a:schemeClr val="dk1"/>
                 </a:solidFill>
@@ -36039,15 +36195,6 @@
               </a:rPr>
               <a:t>Built-in Widgets</a:t>
             </a:r>
-            <a:endParaRPr lang="en-US" sz="2800" b="1">
-              <a:solidFill>
-                <a:schemeClr val="dk1"/>
-              </a:solidFill>
-              <a:latin typeface="Calibri" panose="020F0502020204030204"/>
-              <a:ea typeface="Calibri" panose="020F0502020204030204"/>
-              <a:cs typeface="Calibri" panose="020F0502020204030204"/>
-              <a:sym typeface="Calibri" panose="020F0502020204030204"/>
-            </a:endParaRPr>
           </a:p>
         </p:txBody>
       </p:sp>
@@ -36112,7 +36259,7 @@
               <a:buChar char="•"/>
             </a:pPr>
             <a:r>
-              <a:rPr lang="en-US" sz="1800" b="1">
+              <a:rPr lang="en-US" sz="1800" b="1" dirty="0" err="1">
                 <a:solidFill>
                   <a:srgbClr val="1F1F1F"/>
                 </a:solidFill>
@@ -36121,10 +36268,22 @@
                 <a:cs typeface="Calibri" panose="020F0502020204030204"/>
                 <a:sym typeface="Calibri" panose="020F0502020204030204"/>
               </a:rPr>
-              <a:t>ListView:</a:t>
+              <a:t>ListView</a:t>
             </a:r>
             <a:r>
-              <a:rPr lang="en-US" sz="1800">
+              <a:rPr lang="en-US" sz="1800" b="1" dirty="0">
+                <a:solidFill>
+                  <a:srgbClr val="1F1F1F"/>
+                </a:solidFill>
+                <a:latin typeface="Calibri" panose="020F0502020204030204"/>
+                <a:ea typeface="Calibri" panose="020F0502020204030204"/>
+                <a:cs typeface="Calibri" panose="020F0502020204030204"/>
+                <a:sym typeface="Calibri" panose="020F0502020204030204"/>
+              </a:rPr>
+              <a:t>:</a:t>
+            </a:r>
+            <a:r>
+              <a:rPr lang="en-US" sz="1800" dirty="0">
                 <a:solidFill>
                   <a:schemeClr val="dk1"/>
                 </a:solidFill>
@@ -36135,7 +36294,7 @@
               </a:rPr>
               <a:t>​</a:t>
             </a:r>
-            <a:endParaRPr sz="1800">
+            <a:endParaRPr sz="1800" dirty="0">
               <a:solidFill>
                 <a:schemeClr val="dk1"/>
               </a:solidFill>
@@ -36160,7 +36319,7 @@
               <a:buFont typeface="Arial" panose="020B0604020202020204"/>
               <a:buNone/>
             </a:pPr>
-            <a:endParaRPr sz="1800">
+            <a:endParaRPr sz="1800" dirty="0">
               <a:solidFill>
                 <a:srgbClr val="FFFFFF"/>
               </a:solidFill>
@@ -36186,7 +36345,7 @@
               <a:buChar char="•"/>
             </a:pPr>
             <a:r>
-              <a:rPr lang="en-US" sz="1800">
+              <a:rPr lang="en-US" sz="1800" dirty="0">
                 <a:solidFill>
                   <a:srgbClr val="1F1F1F"/>
                 </a:solidFill>
@@ -36198,7 +36357,7 @@
               <a:t>Displays items in a </a:t>
             </a:r>
             <a:r>
-              <a:rPr lang="en-US" sz="1800" b="1">
+              <a:rPr lang="en-US" sz="1800" b="1" dirty="0">
                 <a:solidFill>
                   <a:srgbClr val="1F1F1F"/>
                 </a:solidFill>
@@ -36210,7 +36369,7 @@
               <a:t>one-dimensional layout:</a:t>
             </a:r>
             <a:r>
-              <a:rPr lang="en-US" sz="1800">
+              <a:rPr lang="en-US" sz="1800" dirty="0">
                 <a:solidFill>
                   <a:srgbClr val="1F1F1F"/>
                 </a:solidFill>
@@ -36222,7 +36381,7 @@
               <a:t> either vertically (default) or horizontally.</a:t>
             </a:r>
             <a:r>
-              <a:rPr lang="en-US" sz="1800">
+              <a:rPr lang="en-US" sz="1800" dirty="0">
                 <a:solidFill>
                   <a:schemeClr val="dk1"/>
                 </a:solidFill>
@@ -36233,15 +36392,6 @@
               </a:rPr>
               <a:t>​</a:t>
             </a:r>
-            <a:endParaRPr lang="en-US" sz="1800">
-              <a:solidFill>
-                <a:schemeClr val="dk1"/>
-              </a:solidFill>
-              <a:latin typeface="Calibri" panose="020F0502020204030204"/>
-              <a:ea typeface="Calibri" panose="020F0502020204030204"/>
-              <a:cs typeface="Calibri" panose="020F0502020204030204"/>
-              <a:sym typeface="Calibri" panose="020F0502020204030204"/>
-            </a:endParaRPr>
           </a:p>
           <a:p>
             <a:pPr marL="285750" marR="0" lvl="0" indent="-171450" algn="l" rtl="0">
@@ -36258,7 +36408,7 @@
               <a:buFont typeface="Arial" panose="020B0604020202020204"/>
               <a:buNone/>
             </a:pPr>
-            <a:endParaRPr sz="1800">
+            <a:endParaRPr sz="1800" dirty="0">
               <a:solidFill>
                 <a:srgbClr val="FFFFFF"/>
               </a:solidFill>
@@ -36284,7 +36434,7 @@
               <a:buChar char="•"/>
             </a:pPr>
             <a:r>
-              <a:rPr lang="en-US" sz="1800">
+              <a:rPr lang="en-US" sz="1800" dirty="0">
                 <a:solidFill>
                   <a:srgbClr val="1F1F1F"/>
                 </a:solidFill>
@@ -36296,7 +36446,7 @@
               <a:t>Useful for lists of text, images, cards, or any content that follows a linear order.</a:t>
             </a:r>
             <a:r>
-              <a:rPr lang="en-US" sz="1800">
+              <a:rPr lang="en-US" sz="1800" dirty="0">
                 <a:solidFill>
                   <a:schemeClr val="dk1"/>
                 </a:solidFill>
@@ -36307,7 +36457,7 @@
               </a:rPr>
               <a:t>​</a:t>
             </a:r>
-            <a:endParaRPr sz="1800">
+            <a:endParaRPr sz="1800" dirty="0">
               <a:solidFill>
                 <a:srgbClr val="FFFFFF"/>
               </a:solidFill>
@@ -36332,7 +36482,7 @@
               <a:buFont typeface="Arial" panose="020B0604020202020204"/>
               <a:buNone/>
             </a:pPr>
-            <a:endParaRPr sz="1800">
+            <a:endParaRPr sz="1800" dirty="0">
               <a:solidFill>
                 <a:srgbClr val="FFFFFF"/>
               </a:solidFill>
@@ -36358,7 +36508,7 @@
               <a:buChar char="•"/>
             </a:pPr>
             <a:r>
-              <a:rPr lang="en-US" sz="1800">
+              <a:rPr lang="en-US" sz="1800" dirty="0">
                 <a:solidFill>
                   <a:srgbClr val="1F1F1F"/>
                 </a:solidFill>
@@ -36370,7 +36520,7 @@
               <a:t>Offers various constructors for different scenarios:</a:t>
             </a:r>
             <a:r>
-              <a:rPr lang="en-US" sz="1800">
+              <a:rPr lang="en-US" sz="1800" dirty="0">
                 <a:solidFill>
                   <a:schemeClr val="dk1"/>
                 </a:solidFill>
@@ -36381,15 +36531,6 @@
               </a:rPr>
               <a:t>​</a:t>
             </a:r>
-            <a:endParaRPr lang="en-US" sz="1800">
-              <a:solidFill>
-                <a:schemeClr val="dk1"/>
-              </a:solidFill>
-              <a:latin typeface="Calibri" panose="020F0502020204030204"/>
-              <a:ea typeface="Calibri" panose="020F0502020204030204"/>
-              <a:cs typeface="Calibri" panose="020F0502020204030204"/>
-              <a:sym typeface="Calibri" panose="020F0502020204030204"/>
-            </a:endParaRPr>
           </a:p>
           <a:p>
             <a:pPr marL="285750" marR="0" lvl="0" indent="-171450" algn="l" rtl="0">
@@ -36406,7 +36547,7 @@
               <a:buFont typeface="Arial" panose="020B0604020202020204"/>
               <a:buNone/>
             </a:pPr>
-            <a:endParaRPr sz="1800">
+            <a:endParaRPr sz="1800" dirty="0">
               <a:solidFill>
                 <a:srgbClr val="FFFFFF"/>
               </a:solidFill>
@@ -36432,7 +36573,7 @@
               <a:buChar char="•"/>
             </a:pPr>
             <a:r>
-              <a:rPr lang="en-US" sz="1800">
+              <a:rPr lang="en-US" sz="1800" dirty="0" err="1">
                 <a:solidFill>
                   <a:srgbClr val="1F1F1F"/>
                 </a:solidFill>
@@ -36441,10 +36582,22 @@
                 <a:cs typeface="Calibri" panose="020F0502020204030204"/>
                 <a:sym typeface="Calibri" panose="020F0502020204030204"/>
               </a:rPr>
-              <a:t>ListView.builder for dynamically generating items from a data source.</a:t>
+              <a:t>ListView.builder</a:t>
             </a:r>
             <a:r>
-              <a:rPr lang="en-US" sz="1800">
+              <a:rPr lang="en-US" sz="1800" dirty="0">
+                <a:solidFill>
+                  <a:srgbClr val="1F1F1F"/>
+                </a:solidFill>
+                <a:latin typeface="Calibri" panose="020F0502020204030204"/>
+                <a:ea typeface="Calibri" panose="020F0502020204030204"/>
+                <a:cs typeface="Calibri" panose="020F0502020204030204"/>
+                <a:sym typeface="Calibri" panose="020F0502020204030204"/>
+              </a:rPr>
+              <a:t> for dynamically generating items from a data source.</a:t>
+            </a:r>
+            <a:r>
+              <a:rPr lang="en-US" sz="1800" dirty="0">
                 <a:solidFill>
                   <a:schemeClr val="dk1"/>
                 </a:solidFill>
@@ -36455,15 +36608,6 @@
               </a:rPr>
               <a:t>​</a:t>
             </a:r>
-            <a:endParaRPr lang="en-US" sz="1800">
-              <a:solidFill>
-                <a:schemeClr val="dk1"/>
-              </a:solidFill>
-              <a:latin typeface="Calibri" panose="020F0502020204030204"/>
-              <a:ea typeface="Calibri" panose="020F0502020204030204"/>
-              <a:cs typeface="Calibri" panose="020F0502020204030204"/>
-              <a:sym typeface="Calibri" panose="020F0502020204030204"/>
-            </a:endParaRPr>
           </a:p>
           <a:p>
             <a:pPr marL="285750" marR="0" lvl="0" indent="-171450" algn="l" rtl="0">
@@ -36480,7 +36624,7 @@
               <a:buFont typeface="Arial" panose="020B0604020202020204"/>
               <a:buNone/>
             </a:pPr>
-            <a:endParaRPr sz="1800">
+            <a:endParaRPr sz="1800" dirty="0">
               <a:solidFill>
                 <a:srgbClr val="FFFFFF"/>
               </a:solidFill>
@@ -36506,7 +36650,7 @@
               <a:buChar char="•"/>
             </a:pPr>
             <a:r>
-              <a:rPr lang="en-US" sz="1800">
+              <a:rPr lang="en-US" sz="1800" dirty="0" err="1">
                 <a:solidFill>
                   <a:srgbClr val="1F1F1F"/>
                 </a:solidFill>
@@ -36515,10 +36659,22 @@
                 <a:cs typeface="Calibri" panose="020F0502020204030204"/>
                 <a:sym typeface="Calibri" panose="020F0502020204030204"/>
               </a:rPr>
-              <a:t>ListView.separated for adding separators between items.</a:t>
+              <a:t>ListView.separated</a:t>
             </a:r>
             <a:r>
-              <a:rPr lang="en-US" sz="1800">
+              <a:rPr lang="en-US" sz="1800" dirty="0">
+                <a:solidFill>
+                  <a:srgbClr val="1F1F1F"/>
+                </a:solidFill>
+                <a:latin typeface="Calibri" panose="020F0502020204030204"/>
+                <a:ea typeface="Calibri" panose="020F0502020204030204"/>
+                <a:cs typeface="Calibri" panose="020F0502020204030204"/>
+                <a:sym typeface="Calibri" panose="020F0502020204030204"/>
+              </a:rPr>
+              <a:t> for adding separators between items.</a:t>
+            </a:r>
+            <a:r>
+              <a:rPr lang="en-US" sz="1800" dirty="0">
                 <a:solidFill>
                   <a:schemeClr val="dk1"/>
                 </a:solidFill>
@@ -36529,15 +36685,6 @@
               </a:rPr>
               <a:t>​</a:t>
             </a:r>
-            <a:endParaRPr lang="en-US" sz="1800">
-              <a:solidFill>
-                <a:schemeClr val="dk1"/>
-              </a:solidFill>
-              <a:latin typeface="Calibri" panose="020F0502020204030204"/>
-              <a:ea typeface="Calibri" panose="020F0502020204030204"/>
-              <a:cs typeface="Calibri" panose="020F0502020204030204"/>
-              <a:sym typeface="Calibri" panose="020F0502020204030204"/>
-            </a:endParaRPr>
           </a:p>
           <a:p>
             <a:pPr marL="285750" marR="0" lvl="0" indent="-171450" algn="l" rtl="0">
@@ -36554,7 +36701,7 @@
               <a:buFont typeface="Arial" panose="020B0604020202020204"/>
               <a:buNone/>
             </a:pPr>
-            <a:endParaRPr sz="1800">
+            <a:endParaRPr sz="1800" dirty="0">
               <a:solidFill>
                 <a:srgbClr val="FFFFFF"/>
               </a:solidFill>
@@ -36580,7 +36727,7 @@
               <a:buChar char="•"/>
             </a:pPr>
             <a:r>
-              <a:rPr lang="en-US" sz="1800">
+              <a:rPr lang="en-US" sz="1800" dirty="0" err="1">
                 <a:solidFill>
                   <a:srgbClr val="1F1F1F"/>
                 </a:solidFill>
@@ -36589,10 +36736,22 @@
                 <a:cs typeface="Calibri" panose="020F0502020204030204"/>
                 <a:sym typeface="Calibri" panose="020F0502020204030204"/>
               </a:rPr>
-              <a:t>ListView.custom for full control over layout and scrolling.</a:t>
+              <a:t>ListView.custom</a:t>
             </a:r>
             <a:r>
-              <a:rPr lang="en-US" sz="1800">
+              <a:rPr lang="en-US" sz="1800" dirty="0">
+                <a:solidFill>
+                  <a:srgbClr val="1F1F1F"/>
+                </a:solidFill>
+                <a:latin typeface="Calibri" panose="020F0502020204030204"/>
+                <a:ea typeface="Calibri" panose="020F0502020204030204"/>
+                <a:cs typeface="Calibri" panose="020F0502020204030204"/>
+                <a:sym typeface="Calibri" panose="020F0502020204030204"/>
+              </a:rPr>
+              <a:t> for full control over layout and scrolling.</a:t>
+            </a:r>
+            <a:r>
+              <a:rPr lang="en-US" sz="1800" dirty="0">
                 <a:solidFill>
                   <a:schemeClr val="dk1"/>
                 </a:solidFill>
@@ -36603,15 +36762,6 @@
               </a:rPr>
               <a:t>​</a:t>
             </a:r>
-            <a:endParaRPr lang="en-US" sz="1800">
-              <a:solidFill>
-                <a:schemeClr val="dk1"/>
-              </a:solidFill>
-              <a:latin typeface="Calibri" panose="020F0502020204030204"/>
-              <a:ea typeface="Calibri" panose="020F0502020204030204"/>
-              <a:cs typeface="Calibri" panose="020F0502020204030204"/>
-              <a:sym typeface="Calibri" panose="020F0502020204030204"/>
-            </a:endParaRPr>
           </a:p>
           <a:p>
             <a:pPr marL="285750" marR="0" lvl="0" indent="-171450" algn="l" rtl="0">
@@ -36628,7 +36778,7 @@
               <a:buFont typeface="Arial" panose="020B0604020202020204"/>
               <a:buNone/>
             </a:pPr>
-            <a:endParaRPr sz="1800">
+            <a:endParaRPr sz="1800" dirty="0">
               <a:solidFill>
                 <a:schemeClr val="dk1"/>
               </a:solidFill>
@@ -36647,7 +36797,7 @@
           <p:nvPr/>
         </p:nvPicPr>
         <p:blipFill rotWithShape="1">
-          <a:blip r:embed="rId1"/>
+          <a:blip r:embed="rId3"/>
           <a:srcRect/>
           <a:stretch>
             <a:fillRect/>
@@ -37643,14 +37793,14 @@
                 </p:childTnLst>
               </p:cTn>
               <p:prevCondLst>
-                <p:cond evt="onPrev">
+                <p:cond evt="onPrev" delay="0">
                   <p:tgtEl>
                     <p:sldTgt/>
                   </p:tgtEl>
                 </p:cond>
               </p:prevCondLst>
               <p:nextCondLst>
-                <p:cond evt="onNext">
+                <p:cond evt="onNext" delay="0">
                   <p:tgtEl>
                     <p:sldTgt/>
                   </p:tgtEl>
@@ -37670,7 +37820,7 @@
   <p:cSld>
     <p:spTree>
       <p:nvGrpSpPr>
-        <p:cNvPr id="183" name="Shape 183"/>
+        <p:cNvPr id="1" name="Shape 183"/>
         <p:cNvGrpSpPr/>
         <p:nvPr/>
       </p:nvGrpSpPr>
@@ -37685,7 +37835,9 @@
       <p:sp>
         <p:nvSpPr>
           <p:cNvPr id="184" name="Google Shape;184;p5"/>
-          <p:cNvSpPr txBox="1"/>
+          <p:cNvSpPr txBox="1">
+            <a:spLocks noGrp="1"/>
+          </p:cNvSpPr>
           <p:nvPr>
             <p:ph type="title"/>
           </p:nvPr>
@@ -37724,7 +37876,7 @@
               <a:buNone/>
             </a:pPr>
             <a:r>
-              <a:rPr lang="en-US" sz="2900" b="1">
+              <a:rPr lang="en-US" sz="2900" b="1" dirty="0">
                 <a:solidFill>
                   <a:schemeClr val="dk1"/>
                 </a:solidFill>
@@ -37735,28 +37887,21 @@
               </a:rPr>
               <a:t>Example of List view </a:t>
             </a:r>
-            <a:endParaRPr lang="en-US" sz="2900" b="1">
-              <a:solidFill>
-                <a:schemeClr val="dk1"/>
-              </a:solidFill>
-              <a:latin typeface="Calibri" panose="020F0502020204030204"/>
-              <a:ea typeface="Calibri" panose="020F0502020204030204"/>
-              <a:cs typeface="Calibri" panose="020F0502020204030204"/>
-              <a:sym typeface="Calibri" panose="020F0502020204030204"/>
-            </a:endParaRPr>
           </a:p>
         </p:txBody>
       </p:sp>
       <p:pic>
         <p:nvPicPr>
           <p:cNvPr id="185" name="Google Shape;185;p5" descr="A screen shot of a computer program&#10;&#10;Description automatically generated"/>
-          <p:cNvPicPr preferRelativeResize="0"/>
+          <p:cNvPicPr preferRelativeResize="0">
+            <a:picLocks noGrp="1"/>
+          </p:cNvPicPr>
           <p:nvPr>
             <p:ph type="body" idx="1"/>
           </p:nvPr>
         </p:nvPicPr>
         <p:blipFill rotWithShape="1">
-          <a:blip r:embed="rId1"/>
+          <a:blip r:embed="rId3"/>
           <a:srcRect/>
           <a:stretch>
             <a:fillRect/>
@@ -37811,7 +37956,7 @@
               <a:buNone/>
             </a:pPr>
             <a:r>
-              <a:rPr lang="en-US" sz="2900" b="1">
+              <a:rPr lang="en-US" sz="2900" b="1" dirty="0">
                 <a:solidFill>
                   <a:schemeClr val="dk1"/>
                 </a:solidFill>
@@ -37823,7 +37968,7 @@
               <a:t>Output:</a:t>
             </a:r>
             <a:r>
-              <a:rPr lang="en-US" sz="2900">
+              <a:rPr lang="en-US" sz="2900" dirty="0">
                 <a:solidFill>
                   <a:srgbClr val="808080"/>
                 </a:solidFill>
@@ -37834,7 +37979,7 @@
               </a:rPr>
               <a:t>​</a:t>
             </a:r>
-            <a:endParaRPr sz="1800">
+            <a:endParaRPr sz="1800" dirty="0">
               <a:solidFill>
                 <a:schemeClr val="dk1"/>
               </a:solidFill>
@@ -37853,7 +37998,7 @@
           <p:nvPr/>
         </p:nvPicPr>
         <p:blipFill rotWithShape="1">
-          <a:blip r:embed="rId2"/>
+          <a:blip r:embed="rId4"/>
           <a:srcRect/>
           <a:stretch>
             <a:fillRect/>
@@ -37887,7 +38032,7 @@
           <p:nvPr/>
         </p:nvPicPr>
         <p:blipFill rotWithShape="1">
-          <a:blip r:embed="rId3"/>
+          <a:blip r:embed="rId5"/>
           <a:srcRect/>
           <a:stretch>
             <a:fillRect/>
@@ -38135,14 +38280,14 @@
                 </p:childTnLst>
               </p:cTn>
               <p:prevCondLst>
-                <p:cond evt="onPrev">
+                <p:cond evt="onPrev" delay="0">
                   <p:tgtEl>
                     <p:sldTgt/>
                   </p:tgtEl>
                 </p:cond>
               </p:prevCondLst>
               <p:nextCondLst>
-                <p:cond evt="onNext">
+                <p:cond evt="onNext" delay="0">
                   <p:tgtEl>
                     <p:sldTgt/>
                   </p:tgtEl>
@@ -38162,7 +38307,7 @@
   <p:cSld>
     <p:spTree>
       <p:nvGrpSpPr>
-        <p:cNvPr id="193" name="Shape 193"/>
+        <p:cNvPr id="1" name="Shape 193"/>
         <p:cNvGrpSpPr/>
         <p:nvPr/>
       </p:nvGrpSpPr>
@@ -38177,7 +38322,9 @@
       <p:sp>
         <p:nvSpPr>
           <p:cNvPr id="194" name="Google Shape;194;p6"/>
-          <p:cNvSpPr txBox="1"/>
+          <p:cNvSpPr txBox="1">
+            <a:spLocks noGrp="1"/>
+          </p:cNvSpPr>
           <p:nvPr>
             <p:ph type="title"/>
           </p:nvPr>
@@ -38216,7 +38363,7 @@
               <a:buChar char="•"/>
             </a:pPr>
             <a:r>
-              <a:rPr lang="en-US" sz="2900" b="1">
+              <a:rPr lang="en-US" sz="2900" b="1" dirty="0">
                 <a:solidFill>
                   <a:srgbClr val="1F1F1F"/>
                 </a:solidFill>
@@ -38227,7 +38374,7 @@
               </a:rPr>
               <a:t>Grid View:</a:t>
             </a:r>
-            <a:endParaRPr sz="2900" b="1">
+            <a:endParaRPr sz="2900" b="1" dirty="0">
               <a:solidFill>
                 <a:srgbClr val="000000"/>
               </a:solidFill>
@@ -38252,6 +38399,7 @@
               <a:buFont typeface="Trebuchet MS" panose="020B0603020202020204"/>
               <a:buNone/>
             </a:pPr>
+            <a:endParaRPr dirty="0"/>
           </a:p>
         </p:txBody>
       </p:sp>
@@ -38263,7 +38411,7 @@
         </p:nvSpPr>
         <p:spPr>
           <a:xfrm>
-            <a:off x="1376093" y="1799468"/>
+            <a:off x="1271464" y="1844824"/>
             <a:ext cx="8822027" cy="4507605"/>
           </a:xfrm>
           <a:prstGeom prst="roundRect">
@@ -38316,7 +38464,7 @@
               <a:buChar char="•"/>
             </a:pPr>
             <a:r>
-              <a:rPr lang="en-US" sz="1800" b="1">
+              <a:rPr lang="en-US" sz="1800" b="1" dirty="0">
                 <a:solidFill>
                   <a:srgbClr val="1F1F1F"/>
                 </a:solidFill>
@@ -38327,7 +38475,7 @@
               </a:rPr>
               <a:t>Grid View:</a:t>
             </a:r>
-            <a:endParaRPr sz="1800">
+            <a:endParaRPr sz="1800" dirty="0">
               <a:solidFill>
                 <a:srgbClr val="000000"/>
               </a:solidFill>
@@ -38353,7 +38501,7 @@
               <a:buChar char="•"/>
             </a:pPr>
             <a:r>
-              <a:rPr lang="en-US" sz="1800">
+              <a:rPr lang="en-US" sz="1800" dirty="0">
                 <a:solidFill>
                   <a:srgbClr val="1F1F1F"/>
                 </a:solidFill>
@@ -38365,7 +38513,7 @@
               <a:t>Arranges items in a </a:t>
             </a:r>
             <a:r>
-              <a:rPr lang="en-US" sz="1800" b="1">
+              <a:rPr lang="en-US" sz="1800" b="1" dirty="0">
                 <a:solidFill>
                   <a:srgbClr val="1F1F1F"/>
                 </a:solidFill>
@@ -38377,7 +38525,7 @@
               <a:t>two-dimensional grid layout:</a:t>
             </a:r>
             <a:r>
-              <a:rPr lang="en-US" sz="1800">
+              <a:rPr lang="en-US" sz="1800" dirty="0">
                 <a:solidFill>
                   <a:srgbClr val="1F1F1F"/>
                 </a:solidFill>
@@ -38388,7 +38536,7 @@
               </a:rPr>
               <a:t> rows and columns.</a:t>
             </a:r>
-            <a:endParaRPr sz="1800">
+            <a:endParaRPr sz="1800" dirty="0">
               <a:solidFill>
                 <a:srgbClr val="000000"/>
               </a:solidFill>
@@ -38414,7 +38562,7 @@
               <a:buChar char="•"/>
             </a:pPr>
             <a:r>
-              <a:rPr lang="en-US" sz="1800">
+              <a:rPr lang="en-US" sz="1800" dirty="0">
                 <a:solidFill>
                   <a:srgbClr val="1F1F1F"/>
                 </a:solidFill>
@@ -38423,9 +38571,21 @@
                 <a:cs typeface="Calibri" panose="020F0502020204030204"/>
                 <a:sym typeface="Calibri" panose="020F0502020204030204"/>
               </a:rPr>
-              <a:t>Suitable for photo galleries, product catalogs, or any visually oriented data.</a:t>
+              <a:t>Suitable for photo galleries, product catalogs, or any visually oriented data</a:t>
             </a:r>
-            <a:endParaRPr sz="1800">
+            <a:r>
+              <a:rPr lang="en-US" sz="1800" dirty="0" smtClean="0">
+                <a:solidFill>
+                  <a:srgbClr val="1F1F1F"/>
+                </a:solidFill>
+                <a:latin typeface="Calibri" panose="020F0502020204030204"/>
+                <a:ea typeface="Calibri" panose="020F0502020204030204"/>
+                <a:cs typeface="Calibri" panose="020F0502020204030204"/>
+                <a:sym typeface="Calibri" panose="020F0502020204030204"/>
+              </a:rPr>
+              <a:t>.</a:t>
+            </a:r>
+            <a:endParaRPr sz="1800" dirty="0" smtClean="0">
               <a:solidFill>
                 <a:srgbClr val="000000"/>
               </a:solidFill>
@@ -38451,7 +38611,7 @@
               <a:buChar char="•"/>
             </a:pPr>
             <a:r>
-              <a:rPr lang="en-US" sz="1800">
+              <a:rPr lang="en-US" sz="1800" dirty="0" smtClean="0">
                 <a:solidFill>
                   <a:srgbClr val="1F1F1F"/>
                 </a:solidFill>
@@ -38462,7 +38622,7 @@
               </a:rPr>
               <a:t>Includes constructors for defining the number of items per row/column and spacing between them.</a:t>
             </a:r>
-            <a:endParaRPr sz="1800">
+            <a:endParaRPr sz="1800" dirty="0" smtClean="0">
               <a:solidFill>
                 <a:srgbClr val="000000"/>
               </a:solidFill>
@@ -38488,7 +38648,7 @@
               <a:buChar char="•"/>
             </a:pPr>
             <a:r>
-              <a:rPr lang="en-US" sz="1800">
+              <a:rPr lang="en-US" sz="1800" dirty="0" err="1" smtClean="0">
                 <a:solidFill>
                   <a:srgbClr val="1F1F1F"/>
                 </a:solidFill>
@@ -38497,9 +38657,33 @@
                 <a:cs typeface="Calibri" panose="020F0502020204030204"/>
                 <a:sym typeface="Calibri" panose="020F0502020204030204"/>
               </a:rPr>
-              <a:t>GridView.count specifies the number of items in each row or column.</a:t>
+              <a:t>GridView.count</a:t>
             </a:r>
-            <a:endParaRPr sz="1800">
+            <a:r>
+              <a:rPr lang="en-US" sz="1800" dirty="0" smtClean="0">
+                <a:solidFill>
+                  <a:srgbClr val="1F1F1F"/>
+                </a:solidFill>
+                <a:latin typeface="Calibri" panose="020F0502020204030204"/>
+                <a:ea typeface="Calibri" panose="020F0502020204030204"/>
+                <a:cs typeface="Calibri" panose="020F0502020204030204"/>
+                <a:sym typeface="Calibri" panose="020F0502020204030204"/>
+              </a:rPr>
+              <a:t> </a:t>
+            </a:r>
+            <a:r>
+              <a:rPr lang="en-US" sz="1800" dirty="0">
+                <a:solidFill>
+                  <a:srgbClr val="1F1F1F"/>
+                </a:solidFill>
+                <a:latin typeface="Calibri" panose="020F0502020204030204"/>
+                <a:ea typeface="Calibri" panose="020F0502020204030204"/>
+                <a:cs typeface="Calibri" panose="020F0502020204030204"/>
+                <a:sym typeface="Calibri" panose="020F0502020204030204"/>
+              </a:rPr>
+              <a:t>specifies the number of items in each row or column.</a:t>
+            </a:r>
+            <a:endParaRPr sz="1800" dirty="0">
               <a:solidFill>
                 <a:srgbClr val="000000"/>
               </a:solidFill>
@@ -38525,7 +38709,7 @@
               <a:buChar char="•"/>
             </a:pPr>
             <a:r>
-              <a:rPr lang="en-US" sz="1800">
+              <a:rPr lang="en-US" sz="1800" dirty="0" err="1">
                 <a:solidFill>
                   <a:srgbClr val="1F1F1F"/>
                 </a:solidFill>
@@ -38534,9 +38718,21 @@
                 <a:cs typeface="Calibri" panose="020F0502020204030204"/>
                 <a:sym typeface="Calibri" panose="020F0502020204030204"/>
               </a:rPr>
-              <a:t>GridView.builder similar to List View. builder but arranges items in a grid.</a:t>
+              <a:t>GridView.builder</a:t>
             </a:r>
-            <a:endParaRPr sz="1800">
+            <a:r>
+              <a:rPr lang="en-US" sz="1800" dirty="0">
+                <a:solidFill>
+                  <a:srgbClr val="1F1F1F"/>
+                </a:solidFill>
+                <a:latin typeface="Calibri" panose="020F0502020204030204"/>
+                <a:ea typeface="Calibri" panose="020F0502020204030204"/>
+                <a:cs typeface="Calibri" panose="020F0502020204030204"/>
+                <a:sym typeface="Calibri" panose="020F0502020204030204"/>
+              </a:rPr>
+              <a:t> similar to List View. builder but arranges items in a grid.</a:t>
+            </a:r>
+            <a:endParaRPr sz="1800" dirty="0">
               <a:solidFill>
                 <a:srgbClr val="000000"/>
               </a:solidFill>
@@ -38562,7 +38758,7 @@
               <a:buChar char="•"/>
             </a:pPr>
             <a:r>
-              <a:rPr lang="en-US" sz="1800">
+              <a:rPr lang="en-US" sz="1800" dirty="0" err="1">
                 <a:solidFill>
                   <a:srgbClr val="1F1F1F"/>
                 </a:solidFill>
@@ -38571,9 +38767,21 @@
                 <a:cs typeface="Calibri" panose="020F0502020204030204"/>
                 <a:sym typeface="Calibri" panose="020F0502020204030204"/>
               </a:rPr>
-              <a:t>GridView.extent uses a fixed size for each item.</a:t>
+              <a:t>GridView.extent</a:t>
             </a:r>
-            <a:endParaRPr sz="1800">
+            <a:r>
+              <a:rPr lang="en-US" sz="1800" dirty="0">
+                <a:solidFill>
+                  <a:srgbClr val="1F1F1F"/>
+                </a:solidFill>
+                <a:latin typeface="Calibri" panose="020F0502020204030204"/>
+                <a:ea typeface="Calibri" panose="020F0502020204030204"/>
+                <a:cs typeface="Calibri" panose="020F0502020204030204"/>
+                <a:sym typeface="Calibri" panose="020F0502020204030204"/>
+              </a:rPr>
+              <a:t> uses a fixed size for each item.</a:t>
+            </a:r>
+            <a:endParaRPr sz="1800" dirty="0">
               <a:solidFill>
                 <a:srgbClr val="000000"/>
               </a:solidFill>
@@ -38593,7 +38801,7 @@
               </a:spcAft>
               <a:buNone/>
             </a:pPr>
-            <a:endParaRPr sz="1800">
+            <a:endParaRPr sz="1800" dirty="0">
               <a:solidFill>
                 <a:schemeClr val="dk1"/>
               </a:solidFill>
@@ -38612,7 +38820,7 @@
           <p:nvPr/>
         </p:nvPicPr>
         <p:blipFill rotWithShape="1">
-          <a:blip r:embed="rId1"/>
+          <a:blip r:embed="rId3"/>
           <a:srcRect/>
           <a:stretch>
             <a:fillRect/>
@@ -39242,14 +39450,14 @@
                 </p:childTnLst>
               </p:cTn>
               <p:prevCondLst>
-                <p:cond evt="onPrev">
+                <p:cond evt="onPrev" delay="0">
                   <p:tgtEl>
                     <p:sldTgt/>
                   </p:tgtEl>
                 </p:cond>
               </p:prevCondLst>
               <p:nextCondLst>
-                <p:cond evt="onNext">
+                <p:cond evt="onNext" delay="0">
                   <p:tgtEl>
                     <p:sldTgt/>
                   </p:tgtEl>
@@ -39269,7 +39477,7 @@
   <p:cSld>
     <p:spTree>
       <p:nvGrpSpPr>
-        <p:cNvPr id="200" name="Shape 200"/>
+        <p:cNvPr id="1" name="Shape 200"/>
         <p:cNvGrpSpPr/>
         <p:nvPr/>
       </p:nvGrpSpPr>
@@ -39284,7 +39492,9 @@
       <p:sp>
         <p:nvSpPr>
           <p:cNvPr id="201" name="Google Shape;201;p7"/>
-          <p:cNvSpPr txBox="1"/>
+          <p:cNvSpPr txBox="1">
+            <a:spLocks noGrp="1"/>
+          </p:cNvSpPr>
           <p:nvPr>
             <p:ph type="title"/>
           </p:nvPr>
@@ -39334,28 +39544,21 @@
               </a:rPr>
               <a:t>Example of Gid view </a:t>
             </a:r>
-            <a:endParaRPr lang="en-US" sz="2900" b="1">
-              <a:solidFill>
-                <a:schemeClr val="dk1"/>
-              </a:solidFill>
-              <a:latin typeface="Calibri" panose="020F0502020204030204"/>
-              <a:ea typeface="Calibri" panose="020F0502020204030204"/>
-              <a:cs typeface="Calibri" panose="020F0502020204030204"/>
-              <a:sym typeface="Calibri" panose="020F0502020204030204"/>
-            </a:endParaRPr>
           </a:p>
         </p:txBody>
       </p:sp>
       <p:pic>
         <p:nvPicPr>
           <p:cNvPr id="202" name="Google Shape;202;p7" descr="A screen shot of a computer program&#10;&#10;Description automatically generated"/>
-          <p:cNvPicPr preferRelativeResize="0"/>
+          <p:cNvPicPr preferRelativeResize="0">
+            <a:picLocks noGrp="1"/>
+          </p:cNvPicPr>
           <p:nvPr>
             <p:ph type="body" idx="1"/>
           </p:nvPr>
         </p:nvPicPr>
         <p:blipFill rotWithShape="1">
-          <a:blip r:embed="rId1"/>
+          <a:blip r:embed="rId3"/>
           <a:srcRect/>
           <a:stretch>
             <a:fillRect/>
@@ -39452,7 +39655,7 @@
           <p:nvPr/>
         </p:nvPicPr>
         <p:blipFill rotWithShape="1">
-          <a:blip r:embed="rId2"/>
+          <a:blip r:embed="rId4"/>
           <a:srcRect/>
           <a:stretch>
             <a:fillRect/>
@@ -39479,7 +39682,7 @@
           <p:nvPr/>
         </p:nvPicPr>
         <p:blipFill rotWithShape="1">
-          <a:blip r:embed="rId3"/>
+          <a:blip r:embed="rId5"/>
           <a:srcRect/>
           <a:stretch>
             <a:fillRect/>
@@ -39727,14 +39930,14 @@
                 </p:childTnLst>
               </p:cTn>
               <p:prevCondLst>
-                <p:cond evt="onPrev">
+                <p:cond evt="onPrev" delay="0">
                   <p:tgtEl>
                     <p:sldTgt/>
                   </p:tgtEl>
                 </p:cond>
               </p:prevCondLst>
               <p:nextCondLst>
-                <p:cond evt="onNext">
+                <p:cond evt="onNext" delay="0">
                   <p:tgtEl>
                     <p:sldTgt/>
                   </p:tgtEl>
@@ -39754,7 +39957,7 @@
   <p:cSld>
     <p:spTree>
       <p:nvGrpSpPr>
-        <p:cNvPr id="210" name="Shape 210"/>
+        <p:cNvPr id="1" name="Shape 210"/>
         <p:cNvGrpSpPr/>
         <p:nvPr/>
       </p:nvGrpSpPr>
@@ -39769,7 +39972,9 @@
       <p:sp>
         <p:nvSpPr>
           <p:cNvPr id="211" name="Google Shape;211;p8"/>
-          <p:cNvSpPr txBox="1"/>
+          <p:cNvSpPr txBox="1">
+            <a:spLocks noGrp="1"/>
+          </p:cNvSpPr>
           <p:nvPr>
             <p:ph type="title"/>
           </p:nvPr>
@@ -39819,15 +40024,6 @@
               </a:rPr>
               <a:t>Tab Bar</a:t>
             </a:r>
-            <a:endParaRPr lang="en-US" sz="2900" b="1">
-              <a:solidFill>
-                <a:schemeClr val="dk1"/>
-              </a:solidFill>
-              <a:latin typeface="Calibri" panose="020F0502020204030204"/>
-              <a:ea typeface="Calibri" panose="020F0502020204030204"/>
-              <a:cs typeface="Calibri" panose="020F0502020204030204"/>
-              <a:sym typeface="Calibri" panose="020F0502020204030204"/>
-            </a:endParaRPr>
           </a:p>
         </p:txBody>
       </p:sp>
@@ -40032,19 +40228,7 @@
                 <a:cs typeface="Calibri" panose="020F0502020204030204"/>
                 <a:sym typeface="Calibri" panose="020F0502020204030204"/>
               </a:rPr>
-              <a:t>This recipe creates a tabbed example using the following steps</a:t>
-            </a:r>
-            <a:r>
-              <a:rPr lang="en-US" sz="1800">
-                <a:solidFill>
-                  <a:srgbClr val="212121"/>
-                </a:solidFill>
-                <a:latin typeface="Calibri" panose="020F0502020204030204"/>
-                <a:ea typeface="Calibri" panose="020F0502020204030204"/>
-                <a:cs typeface="Calibri" panose="020F0502020204030204"/>
-                <a:sym typeface="Calibri" panose="020F0502020204030204"/>
-              </a:rPr>
-              <a:t>:</a:t>
+              <a:t>This recipe creates a tabbed example using the following steps:</a:t>
             </a:r>
             <a:endParaRPr sz="1800">
               <a:solidFill>
@@ -40120,15 +40304,6 @@
               </a:rPr>
               <a:t>​</a:t>
             </a:r>
-            <a:endParaRPr lang="en-US" sz="1800">
-              <a:solidFill>
-                <a:schemeClr val="dk1"/>
-              </a:solidFill>
-              <a:latin typeface="Calibri" panose="020F0502020204030204"/>
-              <a:ea typeface="Calibri" panose="020F0502020204030204"/>
-              <a:cs typeface="Calibri" panose="020F0502020204030204"/>
-              <a:sym typeface="Calibri" panose="020F0502020204030204"/>
-            </a:endParaRPr>
           </a:p>
           <a:p>
             <a:pPr marL="228600" marR="0" lvl="0" indent="-114300" algn="l" rtl="0">
@@ -40194,15 +40369,6 @@
               </a:rPr>
               <a:t>​</a:t>
             </a:r>
-            <a:endParaRPr lang="en-US" sz="1800">
-              <a:solidFill>
-                <a:schemeClr val="dk1"/>
-              </a:solidFill>
-              <a:latin typeface="Calibri" panose="020F0502020204030204"/>
-              <a:ea typeface="Calibri" panose="020F0502020204030204"/>
-              <a:cs typeface="Calibri" panose="020F0502020204030204"/>
-              <a:sym typeface="Calibri" panose="020F0502020204030204"/>
-            </a:endParaRPr>
           </a:p>
           <a:p>
             <a:pPr marL="228600" marR="0" lvl="0" indent="-114300" algn="l" rtl="0">
@@ -40287,7 +40453,7 @@
           <p:nvPr/>
         </p:nvPicPr>
         <p:blipFill rotWithShape="1">
-          <a:blip r:embed="rId1"/>
+          <a:blip r:embed="rId3"/>
           <a:srcRect/>
           <a:stretch>
             <a:fillRect/>
@@ -41100,14 +41266,14 @@
                 </p:childTnLst>
               </p:cTn>
               <p:prevCondLst>
-                <p:cond evt="onPrev">
+                <p:cond evt="onPrev" delay="0">
                   <p:tgtEl>
                     <p:sldTgt/>
                   </p:tgtEl>
                 </p:cond>
               </p:prevCondLst>
               <p:nextCondLst>
-                <p:cond evt="onNext">
+                <p:cond evt="onNext" delay="0">
                   <p:tgtEl>
                     <p:sldTgt/>
                   </p:tgtEl>
@@ -41127,7 +41293,7 @@
   <p:cSld>
     <p:spTree>
       <p:nvGrpSpPr>
-        <p:cNvPr id="217" name="Shape 217"/>
+        <p:cNvPr id="1" name="Shape 217"/>
         <p:cNvGrpSpPr/>
         <p:nvPr/>
       </p:nvGrpSpPr>
@@ -41142,7 +41308,9 @@
       <p:sp>
         <p:nvSpPr>
           <p:cNvPr id="218" name="Google Shape;218;p9"/>
-          <p:cNvSpPr txBox="1"/>
+          <p:cNvSpPr txBox="1">
+            <a:spLocks noGrp="1"/>
+          </p:cNvSpPr>
           <p:nvPr>
             <p:ph type="title"/>
           </p:nvPr>
@@ -41192,28 +41360,21 @@
               </a:rPr>
               <a:t>Example of Tab bar </a:t>
             </a:r>
-            <a:endParaRPr lang="en-US" sz="2900" b="1">
-              <a:solidFill>
-                <a:schemeClr val="dk1"/>
-              </a:solidFill>
-              <a:latin typeface="Calibri" panose="020F0502020204030204"/>
-              <a:ea typeface="Calibri" panose="020F0502020204030204"/>
-              <a:cs typeface="Calibri" panose="020F0502020204030204"/>
-              <a:sym typeface="Calibri" panose="020F0502020204030204"/>
-            </a:endParaRPr>
           </a:p>
         </p:txBody>
       </p:sp>
       <p:pic>
         <p:nvPicPr>
           <p:cNvPr id="219" name="Google Shape;219;p9" descr="A screen shot of a computer program&#10;&#10;Description automatically generated"/>
-          <p:cNvPicPr preferRelativeResize="0"/>
+          <p:cNvPicPr preferRelativeResize="0">
+            <a:picLocks noGrp="1"/>
+          </p:cNvPicPr>
           <p:nvPr>
             <p:ph type="body" idx="1"/>
           </p:nvPr>
         </p:nvPicPr>
         <p:blipFill rotWithShape="1">
-          <a:blip r:embed="rId1"/>
+          <a:blip r:embed="rId3"/>
           <a:srcRect/>
           <a:stretch>
             <a:fillRect/>
@@ -41310,7 +41471,7 @@
           <p:nvPr/>
         </p:nvPicPr>
         <p:blipFill rotWithShape="1">
-          <a:blip r:embed="rId2"/>
+          <a:blip r:embed="rId4"/>
           <a:srcRect/>
           <a:stretch>
             <a:fillRect/>
@@ -41337,7 +41498,7 @@
           <p:nvPr/>
         </p:nvPicPr>
         <p:blipFill rotWithShape="1">
-          <a:blip r:embed="rId3"/>
+          <a:blip r:embed="rId5"/>
           <a:srcRect/>
           <a:stretch>
             <a:fillRect/>
@@ -41364,7 +41525,7 @@
           <p:nvPr/>
         </p:nvPicPr>
         <p:blipFill rotWithShape="1">
-          <a:blip r:embed="rId4"/>
+          <a:blip r:embed="rId6"/>
           <a:srcRect/>
           <a:stretch>
             <a:fillRect/>
@@ -41391,7 +41552,7 @@
           <p:nvPr/>
         </p:nvPicPr>
         <p:blipFill rotWithShape="1">
-          <a:blip r:embed="rId5"/>
+          <a:blip r:embed="rId7"/>
           <a:srcRect/>
           <a:stretch>
             <a:fillRect/>
@@ -41745,14 +41906,14 @@
                 </p:childTnLst>
               </p:cTn>
               <p:prevCondLst>
-                <p:cond evt="onPrev">
+                <p:cond evt="onPrev" delay="0">
                   <p:tgtEl>
                     <p:sldTgt/>
                   </p:tgtEl>
                 </p:cond>
               </p:prevCondLst>
               <p:nextCondLst>
-                <p:cond evt="onNext">
+                <p:cond evt="onNext" delay="0">
                   <p:tgtEl>
                     <p:sldTgt/>
                   </p:tgtEl>
@@ -42043,9 +42204,11 @@
       </a:bgFillStyleLst>
     </a:fmtScheme>
   </a:themeElements>
+  <a:objectDefaults/>
+  <a:extraClrSchemeLst/>
   <a:extLst>
     <a:ext uri="{05A4C25C-085E-4340-85A3-A5531E510DB2}">
-      <thm15:themeFamily xmlns:thm15="http://schemas.microsoft.com/office/thememl/2012/main" name="Office Theme" id="{62F939B6-93AF-4DB8-9C6B-D6C7DFDC589F}" vid="{4A3C46E8-61CC-4603-A589-7422A47A8E4A}"/>
+      <thm15:themeFamily xmlns:thm15="http://schemas.microsoft.com/office/thememl/2012/main" xmlns="" name="Office Theme" id="{62F939B6-93AF-4DB8-9C6B-D6C7DFDC589F}" vid="{4A3C46E8-61CC-4603-A589-7422A47A8E4A}"/>
     </a:ext>
   </a:extLst>
 </a:theme>
@@ -42327,9 +42490,11 @@
       </a:bgFillStyleLst>
     </a:fmtScheme>
   </a:themeElements>
+  <a:objectDefaults/>
+  <a:extraClrSchemeLst/>
   <a:extLst>
     <a:ext uri="{05A4C25C-085E-4340-85A3-A5531E510DB2}">
-      <thm15:themeFamily xmlns:thm15="http://schemas.microsoft.com/office/thememl/2012/main" name="Office Theme" id="{62F939B6-93AF-4DB8-9C6B-D6C7DFDC589F}" vid="{4A3C46E8-61CC-4603-A589-7422A47A8E4A}"/>
+      <thm15:themeFamily xmlns:thm15="http://schemas.microsoft.com/office/thememl/2012/main" xmlns="" name="Office Theme" id="{62F939B6-93AF-4DB8-9C6B-D6C7DFDC589F}" vid="{4A3C46E8-61CC-4603-A589-7422A47A8E4A}"/>
     </a:ext>
   </a:extLst>
 </a:theme>
